--- a/nfl_bdb_2026_slides.pptx
+++ b/nfl_bdb_2026_slides.pptx
@@ -5,7 +5,7 @@
     <p:sldMasterId id="2147483648" r:id="rId4"/>
   </p:sldMasterIdLst>
   <p:notesMasterIdLst>
-    <p:notesMasterId r:id="rId20"/>
+    <p:notesMasterId r:id="rId19"/>
   </p:notesMasterIdLst>
   <p:sldIdLst>
     <p:sldId id="279" r:id="rId5"/>
@@ -18,11 +18,10 @@
     <p:sldId id="263" r:id="rId12"/>
     <p:sldId id="275" r:id="rId13"/>
     <p:sldId id="273" r:id="rId14"/>
-    <p:sldId id="265" r:id="rId15"/>
-    <p:sldId id="274" r:id="rId16"/>
-    <p:sldId id="266" r:id="rId17"/>
-    <p:sldId id="272" r:id="rId18"/>
-    <p:sldId id="268" r:id="rId19"/>
+    <p:sldId id="280" r:id="rId15"/>
+    <p:sldId id="266" r:id="rId16"/>
+    <p:sldId id="281" r:id="rId17"/>
+    <p:sldId id="268" r:id="rId18"/>
   </p:sldIdLst>
   <p:sldSz cx="12192000" cy="6858000"/>
   <p:notesSz cx="6858000" cy="12192000"/>
@@ -12600,1134 +12599,12 @@
           <a:prstGeom prst="rect">
             <a:avLst/>
           </a:prstGeom>
+          <a:noFill/>
           <a:effectLst>
             <a:softEdge rad="317500"/>
           </a:effectLst>
         </p:spPr>
       </p:pic>
-      <p:sp>
-        <p:nvSpPr>
-          <p:cNvPr id="5" name="TextBox 4"/>
-          <p:cNvSpPr txBox="1"/>
-          <p:nvPr/>
-        </p:nvSpPr>
-        <p:spPr>
-          <a:xfrm>
-            <a:off x="0" y="774700"/>
-            <a:ext cx="12192000" cy="520700"/>
-          </a:xfrm>
-          <a:prstGeom prst="rect">
-            <a:avLst/>
-          </a:prstGeom>
-          <a:noFill/>
-        </p:spPr>
-        <p:txBody>
-          <a:bodyPr wrap="square" lIns="0" tIns="0" rIns="0" bIns="0" anchor="t">
-            <a:noAutofit/>
-          </a:bodyPr>
-          <a:lstStyle/>
-          <a:p>
-            <a:pPr algn="ctr">
-              <a:lnSpc>
-                <a:spcPct val="108000"/>
-              </a:lnSpc>
-            </a:pPr>
-            <a:r>
-              <a:rPr sz="3800" b="1" dirty="0">
-                <a:solidFill>
-                  <a:srgbClr val="121417"/>
-                </a:solidFill>
-                <a:latin typeface="Cascadia Code SemiBold"/>
-              </a:rPr>
-              <a:t>9. Training and Baseline</a:t>
-            </a:r>
-          </a:p>
-        </p:txBody>
-      </p:sp>
-      <p:sp>
-        <p:nvSpPr>
-          <p:cNvPr id="6" name="TextBox 5"/>
-          <p:cNvSpPr txBox="1"/>
-          <p:nvPr/>
-        </p:nvSpPr>
-        <p:spPr>
-          <a:xfrm>
-            <a:off x="762000" y="1562100"/>
-            <a:ext cx="1905000" cy="198120"/>
-          </a:xfrm>
-          <a:prstGeom prst="rect">
-            <a:avLst/>
-          </a:prstGeom>
-          <a:noFill/>
-        </p:spPr>
-        <p:txBody>
-          <a:bodyPr wrap="square" lIns="0" tIns="0" rIns="0" bIns="0" anchor="t">
-            <a:noAutofit/>
-          </a:bodyPr>
-          <a:lstStyle/>
-          <a:p>
-            <a:pPr algn="l">
-              <a:lnSpc>
-                <a:spcPct val="130000"/>
-              </a:lnSpc>
-            </a:pPr>
-            <a:r>
-              <a:rPr sz="1200" b="1" spc="75" dirty="0">
-                <a:solidFill>
-                  <a:srgbClr val="002060"/>
-                </a:solidFill>
-                <a:latin typeface="Cascadia Code SemiBold"/>
-              </a:rPr>
-              <a:t>DATASET AND SPLIT</a:t>
-            </a:r>
-          </a:p>
-        </p:txBody>
-      </p:sp>
-      <p:sp>
-        <p:nvSpPr>
-          <p:cNvPr id="7" name="TextBox 6"/>
-          <p:cNvSpPr txBox="1"/>
-          <p:nvPr/>
-        </p:nvSpPr>
-        <p:spPr>
-          <a:xfrm>
-            <a:off x="2794000" y="1524000"/>
-            <a:ext cx="8585200" cy="927100"/>
-          </a:xfrm>
-          <a:prstGeom prst="rect">
-            <a:avLst/>
-          </a:prstGeom>
-          <a:noFill/>
-          <a:ln>
-            <a:noFill/>
-          </a:ln>
-        </p:spPr>
-        <p:txBody>
-          <a:bodyPr wrap="square" lIns="0" tIns="0" rIns="0" bIns="0" anchor="t">
-            <a:noAutofit/>
-          </a:bodyPr>
-          <a:lstStyle/>
-          <a:p>
-            <a:pPr algn="l">
-              <a:lnSpc>
-                <a:spcPct val="145000"/>
-              </a:lnSpc>
-            </a:pPr>
-            <a:r>
-              <a:rPr lang="en-US" sz="1400" b="0" dirty="0">
-                <a:solidFill>
-                  <a:srgbClr val="121417"/>
-                </a:solidFill>
-                <a:latin typeface="Cascadia Code SemiLight"/>
-              </a:rPr>
-              <a:t>Most of the work is done on a </a:t>
-            </a:r>
-            <a:r>
-              <a:rPr lang="en-US" sz="1400" b="1" dirty="0">
-                <a:solidFill>
-                  <a:srgbClr val="121417"/>
-                </a:solidFill>
-                <a:latin typeface="Cascadia Code SemiBold"/>
-              </a:rPr>
-              <a:t>5k-play dataset</a:t>
-            </a:r>
-            <a:r>
-              <a:rPr lang="en-US" sz="1400" b="0" dirty="0">
-                <a:solidFill>
-                  <a:srgbClr val="121417"/>
-                </a:solidFill>
-                <a:latin typeface="Cascadia Code SemiLight"/>
-              </a:rPr>
-              <a:t>, split into </a:t>
-            </a:r>
-            <a:r>
-              <a:rPr lang="en-US" sz="1400" b="1" dirty="0">
-                <a:solidFill>
-                  <a:srgbClr val="121417"/>
-                </a:solidFill>
-                <a:latin typeface="Cascadia Code SemiBold"/>
-              </a:rPr>
-              <a:t>3,000 training</a:t>
-            </a:r>
-            <a:r>
-              <a:rPr lang="en-US" sz="1400" b="0" dirty="0">
-                <a:solidFill>
-                  <a:srgbClr val="121417"/>
-                </a:solidFill>
-                <a:latin typeface="Cascadia Code SemiLight"/>
-              </a:rPr>
-              <a:t>, </a:t>
-            </a:r>
-            <a:r>
-              <a:rPr lang="en-US" sz="1400" b="1" dirty="0">
-                <a:solidFill>
-                  <a:srgbClr val="121417"/>
-                </a:solidFill>
-                <a:latin typeface="Cascadia Code SemiBold"/>
-              </a:rPr>
-              <a:t>1,000 validation</a:t>
-            </a:r>
-            <a:r>
-              <a:rPr lang="en-US" sz="1400" b="0" dirty="0">
-                <a:solidFill>
-                  <a:srgbClr val="121417"/>
-                </a:solidFill>
-                <a:latin typeface="Cascadia Code SemiLight"/>
-              </a:rPr>
-              <a:t> and </a:t>
-            </a:r>
-            <a:r>
-              <a:rPr lang="en-US" sz="1400" b="1" dirty="0">
-                <a:solidFill>
-                  <a:srgbClr val="121417"/>
-                </a:solidFill>
-                <a:latin typeface="Cascadia Code SemiBold"/>
-              </a:rPr>
-              <a:t>1,000 test</a:t>
-            </a:r>
-            <a:r>
-              <a:rPr lang="en-US" sz="1400" b="0" dirty="0">
-                <a:solidFill>
-                  <a:srgbClr val="121417"/>
-                </a:solidFill>
-                <a:latin typeface="Cascadia Code SemiLight"/>
-              </a:rPr>
-              <a:t> plays and stratified by play length, so every experiment is trained and compared on the same data</a:t>
-            </a:r>
-          </a:p>
-        </p:txBody>
-      </p:sp>
-      <p:sp>
-        <p:nvSpPr>
-          <p:cNvPr id="9" name="TextBox 8"/>
-          <p:cNvSpPr txBox="1"/>
-          <p:nvPr/>
-        </p:nvSpPr>
-        <p:spPr>
-          <a:xfrm>
-            <a:off x="762000" y="2743200"/>
-            <a:ext cx="1905000" cy="393700"/>
-          </a:xfrm>
-          <a:prstGeom prst="rect">
-            <a:avLst/>
-          </a:prstGeom>
-          <a:noFill/>
-        </p:spPr>
-        <p:txBody>
-          <a:bodyPr wrap="square" lIns="0" tIns="0" rIns="0" bIns="0" anchor="t">
-            <a:noAutofit/>
-          </a:bodyPr>
-          <a:lstStyle/>
-          <a:p>
-            <a:pPr algn="l">
-              <a:lnSpc>
-                <a:spcPct val="130000"/>
-              </a:lnSpc>
-            </a:pPr>
-            <a:r>
-              <a:rPr sz="1200" b="1" spc="75" dirty="0">
-                <a:solidFill>
-                  <a:srgbClr val="002060"/>
-                </a:solidFill>
-                <a:latin typeface="Cascadia Code SemiBold"/>
-              </a:rPr>
-              <a:t>LOSS VS. METRIC</a:t>
-            </a:r>
-          </a:p>
-        </p:txBody>
-      </p:sp>
-      <p:sp>
-        <p:nvSpPr>
-          <p:cNvPr id="10" name="TextBox 9"/>
-          <p:cNvSpPr txBox="1"/>
-          <p:nvPr/>
-        </p:nvSpPr>
-        <p:spPr>
-          <a:xfrm>
-            <a:off x="2794000" y="2705100"/>
-            <a:ext cx="8585200" cy="1238250"/>
-          </a:xfrm>
-          <a:prstGeom prst="rect">
-            <a:avLst/>
-          </a:prstGeom>
-          <a:noFill/>
-        </p:spPr>
-        <p:txBody>
-          <a:bodyPr wrap="square" lIns="0" tIns="0" rIns="0" bIns="0" anchor="t">
-            <a:noAutofit/>
-          </a:bodyPr>
-          <a:lstStyle/>
-          <a:p>
-            <a:pPr algn="l">
-              <a:lnSpc>
-                <a:spcPct val="145000"/>
-              </a:lnSpc>
-            </a:pPr>
-            <a:r>
-              <a:rPr lang="en-US" sz="1400" b="0" dirty="0">
-                <a:solidFill>
-                  <a:srgbClr val="121417"/>
-                </a:solidFill>
-                <a:latin typeface="Cascadia Code SemiLight"/>
-              </a:rPr>
-              <a:t>The metric is the </a:t>
-            </a:r>
-            <a:r>
-              <a:rPr lang="en-US" sz="1400" b="1" dirty="0">
-                <a:solidFill>
-                  <a:srgbClr val="121417"/>
-                </a:solidFill>
-                <a:latin typeface="Cascadia Code SemiBold"/>
-              </a:rPr>
-              <a:t>masked RMSE in yards</a:t>
-            </a:r>
-            <a:r>
-              <a:rPr lang="en-US" sz="1400" b="0" dirty="0">
-                <a:solidFill>
-                  <a:srgbClr val="121417"/>
-                </a:solidFill>
-                <a:latin typeface="Cascadia Code SemiLight"/>
-              </a:rPr>
-              <a:t> (padded frames excluded). Training minimizes a custom </a:t>
-            </a:r>
-            <a:r>
-              <a:rPr lang="en-US" sz="1400" b="1" dirty="0">
-                <a:solidFill>
-                  <a:srgbClr val="121417"/>
-                </a:solidFill>
-                <a:latin typeface="Cascadia Code SemiBold"/>
-              </a:rPr>
-              <a:t>composite loss</a:t>
-            </a:r>
-            <a:r>
-              <a:rPr lang="en-US" sz="1400" b="0" dirty="0">
-                <a:solidFill>
-                  <a:srgbClr val="121417"/>
-                </a:solidFill>
-                <a:latin typeface="Cascadia Code SemiLight"/>
-              </a:rPr>
-              <a:t>, where </a:t>
-            </a:r>
-            <a:r>
-              <a:rPr lang="en-US" sz="1400" b="1" dirty="0">
-                <a:solidFill>
-                  <a:srgbClr val="121417"/>
-                </a:solidFill>
-                <a:latin typeface="Cascadia Code SemiBold"/>
-              </a:rPr>
-              <a:t>FDE</a:t>
-            </a:r>
-            <a:r>
-              <a:rPr lang="en-US" sz="1400" b="0" dirty="0">
-                <a:solidFill>
-                  <a:srgbClr val="121417"/>
-                </a:solidFill>
-                <a:latin typeface="Cascadia Code SemiLight"/>
-              </a:rPr>
-              <a:t> (</a:t>
-            </a:r>
-            <a:r>
-              <a:rPr lang="en-US" sz="1400" b="1" dirty="0">
-                <a:solidFill>
-                  <a:srgbClr val="121417"/>
-                </a:solidFill>
-                <a:latin typeface="Cascadia Code SemiBold"/>
-              </a:rPr>
-              <a:t>Final Displacement Error</a:t>
-            </a:r>
-            <a:r>
-              <a:rPr lang="en-US" sz="1400" b="0" dirty="0">
-                <a:solidFill>
-                  <a:srgbClr val="121417"/>
-                </a:solidFill>
-                <a:latin typeface="Cascadia Code SemiLight"/>
-              </a:rPr>
-              <a:t>) is the error on the </a:t>
-            </a:r>
-            <a:r>
-              <a:rPr lang="en-US" sz="1400" b="1" dirty="0">
-                <a:solidFill>
-                  <a:srgbClr val="121417"/>
-                </a:solidFill>
-                <a:latin typeface="Cascadia Code SemiBold"/>
-              </a:rPr>
-              <a:t>last valid frame</a:t>
-            </a:r>
-            <a:r>
-              <a:rPr lang="en-US" sz="1400" b="0" dirty="0">
-                <a:solidFill>
-                  <a:srgbClr val="121417"/>
-                </a:solidFill>
-                <a:latin typeface="Cascadia Code SemiLight"/>
-              </a:rPr>
-              <a:t>, and </a:t>
-            </a:r>
-            <a:r>
-              <a:rPr lang="en-US" sz="1400" b="1" dirty="0">
-                <a:solidFill>
-                  <a:srgbClr val="121417"/>
-                </a:solidFill>
-                <a:latin typeface="Cascadia Code SemiBold"/>
-              </a:rPr>
-              <a:t>jerk</a:t>
-            </a:r>
-            <a:r>
-              <a:rPr lang="en-US" sz="1400" b="0" dirty="0">
-                <a:solidFill>
-                  <a:srgbClr val="121417"/>
-                </a:solidFill>
-                <a:latin typeface="Cascadia Code SemiLight"/>
-              </a:rPr>
-              <a:t> offsets the one-shot decoder's </a:t>
-            </a:r>
-            <a:r>
-              <a:rPr lang="en-US" sz="1400" b="1" dirty="0">
-                <a:solidFill>
-                  <a:srgbClr val="121417"/>
-                </a:solidFill>
-                <a:latin typeface="Cascadia Code SemiBold"/>
-              </a:rPr>
-              <a:t>lack of continuity</a:t>
-            </a:r>
-          </a:p>
-        </p:txBody>
-      </p:sp>
-      <p:cxnSp>
-        <p:nvCxnSpPr>
-          <p:cNvPr id="11" name="Connector 10"/>
-          <p:cNvCxnSpPr/>
-          <p:nvPr/>
-        </p:nvCxnSpPr>
-        <p:spPr>
-          <a:xfrm>
-            <a:off x="812800" y="2578100"/>
-            <a:ext cx="10566400" cy="0"/>
-          </a:xfrm>
-          <a:prstGeom prst="line">
-            <a:avLst/>
-          </a:prstGeom>
-          <a:ln w="6350">
-            <a:solidFill>
-              <a:srgbClr val="FFFFFF">
-                <a:alpha val="12000"/>
-              </a:srgbClr>
-            </a:solidFill>
-          </a:ln>
-        </p:spPr>
-        <p:style>
-          <a:lnRef idx="2">
-            <a:schemeClr val="accent1"/>
-          </a:lnRef>
-          <a:fillRef idx="0">
-            <a:schemeClr val="accent1"/>
-          </a:fillRef>
-          <a:effectRef idx="1">
-            <a:schemeClr val="accent1"/>
-          </a:effectRef>
-          <a:fontRef idx="minor">
-            <a:schemeClr val="tx1"/>
-          </a:fontRef>
-        </p:style>
-      </p:cxnSp>
-      <p:cxnSp>
-        <p:nvCxnSpPr>
-          <p:cNvPr id="920" name="Connector sep 2"/>
-          <p:cNvCxnSpPr/>
-          <p:nvPr/>
-        </p:nvCxnSpPr>
-        <p:spPr>
-          <a:xfrm>
-            <a:off x="812800" y="5803900"/>
-            <a:ext cx="10566400" cy="0"/>
-          </a:xfrm>
-          <a:prstGeom prst="line">
-            <a:avLst/>
-          </a:prstGeom>
-          <a:ln w="6350">
-            <a:solidFill>
-              <a:srgbClr val="FFFFFF">
-                <a:alpha val="12000"/>
-              </a:srgbClr>
-            </a:solidFill>
-          </a:ln>
-        </p:spPr>
-        <p:style>
-          <a:lnRef idx="2">
-            <a:schemeClr val="accent1"/>
-          </a:lnRef>
-          <a:fillRef idx="0">
-            <a:schemeClr val="accent1"/>
-          </a:fillRef>
-          <a:effectRef idx="1">
-            <a:schemeClr val="accent1"/>
-          </a:effectRef>
-          <a:fontRef idx="minor">
-            <a:schemeClr val="tx1"/>
-          </a:fontRef>
-        </p:style>
-      </p:cxnSp>
-      <p:sp>
-        <p:nvSpPr>
-          <p:cNvPr id="12" name="TextBox 11"/>
-          <p:cNvSpPr txBox="1"/>
-          <p:nvPr/>
-        </p:nvSpPr>
-        <p:spPr>
-          <a:xfrm>
-            <a:off x="762000" y="5969000"/>
-            <a:ext cx="1905000" cy="198120"/>
-          </a:xfrm>
-          <a:prstGeom prst="rect">
-            <a:avLst/>
-          </a:prstGeom>
-          <a:noFill/>
-        </p:spPr>
-        <p:txBody>
-          <a:bodyPr wrap="square" lIns="0" tIns="0" rIns="0" bIns="0" anchor="t">
-            <a:noAutofit/>
-          </a:bodyPr>
-          <a:lstStyle/>
-          <a:p>
-            <a:pPr algn="l">
-              <a:lnSpc>
-                <a:spcPct val="130000"/>
-              </a:lnSpc>
-            </a:pPr>
-            <a:r>
-              <a:rPr sz="1200" b="1" spc="75">
-                <a:solidFill>
-                  <a:srgbClr val="FF0000"/>
-                </a:solidFill>
-                <a:latin typeface="Cascadia Code SemiBold"/>
-              </a:rPr>
-              <a:t>STARTING POINT</a:t>
-            </a:r>
-          </a:p>
-        </p:txBody>
-      </p:sp>
-      <p:sp>
-        <p:nvSpPr>
-          <p:cNvPr id="13" name="TextBox 12"/>
-          <p:cNvSpPr txBox="1"/>
-          <p:nvPr/>
-        </p:nvSpPr>
-        <p:spPr>
-          <a:xfrm>
-            <a:off x="2794000" y="5930900"/>
-            <a:ext cx="8585200" cy="622300"/>
-          </a:xfrm>
-          <a:prstGeom prst="rect">
-            <a:avLst/>
-          </a:prstGeom>
-          <a:noFill/>
-        </p:spPr>
-        <p:txBody>
-          <a:bodyPr wrap="square" lIns="0" tIns="0" rIns="0" bIns="0" anchor="t">
-            <a:noAutofit/>
-          </a:bodyPr>
-          <a:lstStyle/>
-          <a:p>
-            <a:pPr algn="l">
-              <a:lnSpc>
-                <a:spcPct val="145000"/>
-              </a:lnSpc>
-            </a:pPr>
-            <a:r>
-              <a:rPr lang="en-US" sz="1400" b="1" dirty="0">
-                <a:solidFill>
-                  <a:srgbClr val="121417"/>
-                </a:solidFill>
-                <a:latin typeface="Cascadia Code SemiBold"/>
-              </a:rPr>
-              <a:t>Batch size 8</a:t>
-            </a:r>
-            <a:r>
-              <a:rPr lang="en-US" sz="1400" b="0" dirty="0">
-                <a:solidFill>
-                  <a:srgbClr val="121417"/>
-                </a:solidFill>
-                <a:latin typeface="Cascadia Code SemiLight"/>
-              </a:rPr>
-              <a:t>, </a:t>
-            </a:r>
-            <a:r>
-              <a:rPr lang="en-US" sz="1400" b="1" dirty="0">
-                <a:solidFill>
-                  <a:srgbClr val="121417"/>
-                </a:solidFill>
-                <a:latin typeface="Cascadia Code SemiBold"/>
-              </a:rPr>
-              <a:t>hidden_dim 64</a:t>
-            </a:r>
-            <a:r>
-              <a:rPr lang="en-US" sz="1400" b="0" dirty="0">
-                <a:solidFill>
-                  <a:srgbClr val="121417"/>
-                </a:solidFill>
-                <a:latin typeface="Cascadia Code SemiLight"/>
-              </a:rPr>
-              <a:t>, </a:t>
-            </a:r>
-            <a:r>
-              <a:rPr lang="en-US" sz="1400" b="1" dirty="0">
-                <a:solidFill>
-                  <a:srgbClr val="121417"/>
-                </a:solidFill>
-                <a:latin typeface="Cascadia Code SemiBold"/>
-              </a:rPr>
-              <a:t>no global features</a:t>
-            </a:r>
-            <a:r>
-              <a:rPr lang="en-US" sz="1400" b="0" dirty="0">
-                <a:solidFill>
-                  <a:srgbClr val="121417"/>
-                </a:solidFill>
-                <a:latin typeface="Cascadia Code SemiLight"/>
-              </a:rPr>
-              <a:t>, </a:t>
-            </a:r>
-            <a:r>
-              <a:rPr lang="en-US" sz="1400" b="1" dirty="0">
-                <a:solidFill>
-                  <a:srgbClr val="121417"/>
-                </a:solidFill>
-                <a:latin typeface="Cascadia Code SemiBold"/>
-              </a:rPr>
-              <a:t>1 GAT layer</a:t>
-            </a:r>
-            <a:r>
-              <a:rPr lang="en-US" sz="1400" b="0" dirty="0">
-                <a:solidFill>
-                  <a:srgbClr val="121417"/>
-                </a:solidFill>
-                <a:latin typeface="Cascadia Code SemiLight"/>
-              </a:rPr>
-              <a:t>, </a:t>
-            </a:r>
-            <a:r>
-              <a:rPr lang="en-US" sz="1400" b="1" dirty="0">
-                <a:solidFill>
-                  <a:srgbClr val="121417"/>
-                </a:solidFill>
-                <a:latin typeface="Cascadia Code SemiBold"/>
-              </a:rPr>
-              <a:t>regressor width 256</a:t>
-            </a:r>
-            <a:r>
-              <a:rPr lang="en-US" sz="1400" b="0" dirty="0">
-                <a:solidFill>
-                  <a:srgbClr val="121417"/>
-                </a:solidFill>
-                <a:latin typeface="Cascadia Code SemiLight"/>
-              </a:rPr>
-              <a:t> → </a:t>
-            </a:r>
-            <a:r>
-              <a:rPr lang="en-US" sz="1400" b="1" dirty="0">
-                <a:solidFill>
-                  <a:srgbClr val="121417"/>
-                </a:solidFill>
-                <a:latin typeface="Cascadia Code SemiBold"/>
-              </a:rPr>
-              <a:t>test RMSE 1.032 yards</a:t>
-            </a:r>
-            <a:r>
-              <a:rPr lang="en-US" sz="1400" b="0" dirty="0">
-                <a:solidFill>
-                  <a:srgbClr val="121417"/>
-                </a:solidFill>
-                <a:latin typeface="Cascadia Code SemiLight"/>
-              </a:rPr>
-              <a:t> — the reference point the next chapter improves on</a:t>
-            </a:r>
-          </a:p>
-        </p:txBody>
-      </p:sp>
-      <p:sp>
-        <p:nvSpPr>
-          <p:cNvPr id="14" name="Text 0">
-            <a:extLst>
-              <a:ext uri="{FF2B5EF4-FFF2-40B4-BE49-F238E27FC236}">
-                <a16:creationId xmlns:a16="http://schemas.microsoft.com/office/drawing/2014/main" id="{615743ED-82EF-A206-EC13-4C0FD3531B3E}"/>
-              </a:ext>
-            </a:extLst>
-          </p:cNvPr>
-          <p:cNvSpPr/>
-          <p:nvPr/>
-        </p:nvSpPr>
-        <p:spPr>
-          <a:xfrm>
-            <a:off x="763649" y="217817"/>
-            <a:ext cx="10883392" cy="208260"/>
-          </a:xfrm>
-          <a:prstGeom prst="rect">
-            <a:avLst/>
-          </a:prstGeom>
-          <a:noFill/>
-          <a:ln/>
-        </p:spPr>
-        <p:txBody>
-          <a:bodyPr wrap="square" lIns="0" tIns="0" rIns="0" bIns="0" rtlCol="0" anchor="t">
-            <a:normAutofit/>
-          </a:bodyPr>
-          <a:lstStyle/>
-          <a:p>
-            <a:pPr marL="0" indent="0" algn="ctr">
-              <a:lnSpc>
-                <a:spcPts val="1440"/>
-              </a:lnSpc>
-              <a:buNone/>
-            </a:pPr>
-            <a:endParaRPr lang="en-US" sz="1200" dirty="0">
-              <a:solidFill>
-                <a:srgbClr val="003268"/>
-              </a:solidFill>
-              <a:latin typeface="Cascadia Code SemiBold" panose="020B0609020000020004" pitchFamily="49" charset="0"/>
-              <a:cs typeface="Cascadia Code SemiBold" panose="020B0609020000020004" pitchFamily="49" charset="0"/>
-            </a:endParaRPr>
-          </a:p>
-        </p:txBody>
-      </p:sp>
-      <p:sp>
-        <p:nvSpPr>
-          <p:cNvPr id="16" name="Text 0">
-            <a:extLst>
-              <a:ext uri="{FF2B5EF4-FFF2-40B4-BE49-F238E27FC236}">
-                <a16:creationId xmlns:a16="http://schemas.microsoft.com/office/drawing/2014/main" id="{1401EC7F-004F-1956-7856-B081C0F48C96}"/>
-              </a:ext>
-            </a:extLst>
-          </p:cNvPr>
-          <p:cNvSpPr/>
-          <p:nvPr/>
-        </p:nvSpPr>
-        <p:spPr>
-          <a:xfrm>
-            <a:off x="763649" y="217817"/>
-            <a:ext cx="10883392" cy="208260"/>
-          </a:xfrm>
-          <a:prstGeom prst="rect">
-            <a:avLst/>
-          </a:prstGeom>
-          <a:noFill/>
-          <a:ln/>
-        </p:spPr>
-        <p:txBody>
-          <a:bodyPr wrap="square" lIns="0" tIns="0" rIns="0" bIns="0" rtlCol="0" anchor="t">
-            <a:normAutofit/>
-          </a:bodyPr>
-          <a:lstStyle/>
-          <a:p>
-            <a:pPr marL="0" indent="0" algn="ctr">
-              <a:lnSpc>
-                <a:spcPts val="1440"/>
-              </a:lnSpc>
-              <a:buNone/>
-            </a:pPr>
-            <a:r>
-              <a:rPr lang="en-US" sz="1200" b="1" kern="0" spc="150" dirty="0">
-                <a:solidFill>
-                  <a:srgbClr val="003268"/>
-                </a:solidFill>
-                <a:latin typeface="Cascadia Code SemiBold" panose="020B0609020000020004" pitchFamily="49" charset="0"/>
-                <a:ea typeface="Arial" pitchFamily="34" charset="-122"/>
-                <a:cs typeface="Cascadia Code SemiBold" panose="020B0609020000020004" pitchFamily="49" charset="0"/>
-              </a:rPr>
-              <a:t>BIG DATA BOWL 2026</a:t>
-            </a:r>
-            <a:endParaRPr lang="en-US" sz="1200" dirty="0">
-              <a:solidFill>
-                <a:srgbClr val="003268"/>
-              </a:solidFill>
-              <a:latin typeface="Cascadia Code SemiBold" panose="020B0609020000020004" pitchFamily="49" charset="0"/>
-              <a:cs typeface="Cascadia Code SemiBold" panose="020B0609020000020004" pitchFamily="49" charset="0"/>
-            </a:endParaRPr>
-          </a:p>
-        </p:txBody>
-      </p:sp>
-      <p:pic>
-        <p:nvPicPr>
-          <p:cNvPr id="18" name="Picture 17">
-            <a:extLst>
-              <a:ext uri="{FF2B5EF4-FFF2-40B4-BE49-F238E27FC236}">
-                <a16:creationId xmlns:a16="http://schemas.microsoft.com/office/drawing/2014/main" id="{C6CF3B10-671C-7E73-177D-E670C9998578}"/>
-              </a:ext>
-            </a:extLst>
-          </p:cNvPr>
-          <p:cNvPicPr>
-            <a:picLocks noChangeAspect="1"/>
-          </p:cNvPicPr>
-          <p:nvPr/>
-        </p:nvPicPr>
-        <p:blipFill>
-          <a:blip r:embed="rId3"/>
-          <a:stretch>
-            <a:fillRect/>
-          </a:stretch>
-        </p:blipFill>
-        <p:spPr>
-          <a:xfrm>
-            <a:off x="4552862" y="48649"/>
-            <a:ext cx="546596" cy="546596"/>
-          </a:xfrm>
-          <a:prstGeom prst="rect">
-            <a:avLst/>
-          </a:prstGeom>
-        </p:spPr>
-      </p:pic>
-      <p:sp>
-        <p:nvSpPr>
-          <p:cNvPr id="20" name="TextBox 19">
-            <a:extLst>
-              <a:ext uri="{FF2B5EF4-FFF2-40B4-BE49-F238E27FC236}">
-                <a16:creationId xmlns:a16="http://schemas.microsoft.com/office/drawing/2014/main" id="{6D83341D-6859-C0A2-D8FB-2A8C579D9586}"/>
-              </a:ext>
-            </a:extLst>
-          </p:cNvPr>
-          <p:cNvSpPr txBox="1"/>
-          <p:nvPr/>
-        </p:nvSpPr>
-        <p:spPr>
-          <a:xfrm>
-            <a:off x="7407563" y="183290"/>
-            <a:ext cx="6096000" cy="271869"/>
-          </a:xfrm>
-          <a:prstGeom prst="rect">
-            <a:avLst/>
-          </a:prstGeom>
-          <a:noFill/>
-        </p:spPr>
-        <p:txBody>
-          <a:bodyPr wrap="square">
-            <a:spAutoFit/>
-          </a:bodyPr>
-          <a:lstStyle/>
-          <a:p>
-            <a:pPr>
-              <a:lnSpc>
-                <a:spcPts val="1365"/>
-              </a:lnSpc>
-            </a:pPr>
-            <a:r>
-              <a:rPr lang="en-US" sz="1200" kern="0" spc="75" dirty="0">
-                <a:solidFill>
-                  <a:srgbClr val="003268"/>
-                </a:solidFill>
-                <a:latin typeface="Cascadia Code Light" panose="020B0609020000020004" pitchFamily="49" charset="0"/>
-                <a:cs typeface="Cascadia Code Light" panose="020B0609020000020004" pitchFamily="49" charset="0"/>
-              </a:rPr>
-              <a:t> </a:t>
-            </a:r>
-            <a:r>
-              <a:rPr lang="en-US" sz="1200" kern="0" spc="75" dirty="0">
-                <a:solidFill>
-                  <a:srgbClr val="003268">
-                    <a:alpha val="50000"/>
-                  </a:srgbClr>
-                </a:solidFill>
-                <a:latin typeface="Cascadia Code ExtraLight" panose="020B0609020000020004" pitchFamily="49" charset="0"/>
-                <a:cs typeface="Cascadia Code ExtraLight" panose="020B0609020000020004" pitchFamily="49" charset="0"/>
-              </a:rPr>
-              <a:t>-</a:t>
-            </a:r>
-            <a:r>
-              <a:rPr lang="en-US" sz="1200" kern="0" spc="75" dirty="0">
-                <a:solidFill>
-                  <a:srgbClr val="003268">
-                    <a:alpha val="50000"/>
-                  </a:srgbClr>
-                </a:solidFill>
-                <a:latin typeface="Cascadia Code Light" panose="020B0609020000020004" pitchFamily="49" charset="0"/>
-                <a:cs typeface="Cascadia Code Light" panose="020B0609020000020004" pitchFamily="49" charset="0"/>
-              </a:rPr>
-              <a:t>      </a:t>
-            </a:r>
-            <a:r>
-              <a:rPr lang="en-US" sz="1200" kern="0" spc="75" dirty="0">
-                <a:solidFill>
-                  <a:srgbClr val="003268">
-                    <a:alpha val="50000"/>
-                  </a:srgbClr>
-                </a:solidFill>
-                <a:latin typeface="Cascadia Code SemiBold" panose="020B0609020000020004" pitchFamily="49" charset="0"/>
-                <a:cs typeface="Cascadia Code SemiBold" panose="020B0609020000020004" pitchFamily="49" charset="0"/>
-              </a:rPr>
-              <a:t>Big Data Analytics and Text Mining</a:t>
-            </a:r>
-            <a:r>
-              <a:rPr lang="en-US" sz="1200" b="1" kern="0" spc="75" dirty="0">
-                <a:solidFill>
-                  <a:srgbClr val="003268"/>
-                </a:solidFill>
-                <a:latin typeface="Cascadia Code SemiBold" panose="020B0609020000020004" pitchFamily="49" charset="0"/>
-                <a:cs typeface="Cascadia Code SemiBold" panose="020B0609020000020004" pitchFamily="49" charset="0"/>
-              </a:rPr>
-              <a:t>	</a:t>
-            </a:r>
-            <a:endParaRPr lang="en-US" sz="1200" dirty="0">
-              <a:solidFill>
-                <a:srgbClr val="003268"/>
-              </a:solidFill>
-              <a:latin typeface="Cascadia Code SemiBold" panose="020B0609020000020004" pitchFamily="49" charset="0"/>
-              <a:cs typeface="Cascadia Code SemiBold" panose="020B0609020000020004" pitchFamily="49" charset="0"/>
-            </a:endParaRPr>
-          </a:p>
-        </p:txBody>
-      </p:sp>
-      <p:sp>
-        <p:nvSpPr>
-          <p:cNvPr id="22" name="TextBox 21">
-            <a:extLst>
-              <a:ext uri="{FF2B5EF4-FFF2-40B4-BE49-F238E27FC236}">
-                <a16:creationId xmlns:a16="http://schemas.microsoft.com/office/drawing/2014/main" id="{C7D7D392-EA72-7395-937F-6736C96D2C5C}"/>
-              </a:ext>
-            </a:extLst>
-          </p:cNvPr>
-          <p:cNvSpPr txBox="1"/>
-          <p:nvPr/>
-        </p:nvSpPr>
-        <p:spPr>
-          <a:xfrm>
-            <a:off x="-1903356" y="185887"/>
-            <a:ext cx="6096000" cy="271869"/>
-          </a:xfrm>
-          <a:prstGeom prst="rect">
-            <a:avLst/>
-          </a:prstGeom>
-          <a:noFill/>
-        </p:spPr>
-        <p:txBody>
-          <a:bodyPr wrap="square">
-            <a:spAutoFit/>
-          </a:bodyPr>
-          <a:lstStyle/>
-          <a:p>
-            <a:pPr marL="0" indent="0" algn="r">
-              <a:lnSpc>
-                <a:spcPts val="1365"/>
-              </a:lnSpc>
-              <a:buNone/>
-            </a:pPr>
-            <a:r>
-              <a:rPr lang="en-US" sz="1200" kern="0" spc="75" dirty="0">
-                <a:solidFill>
-                  <a:srgbClr val="003268"/>
-                </a:solidFill>
-                <a:latin typeface="Cascadia Code ExtraLight" panose="020B0609020000020004" pitchFamily="49" charset="0"/>
-                <a:cs typeface="Cascadia Code ExtraLight" panose="020B0609020000020004" pitchFamily="49" charset="0"/>
-              </a:rPr>
-              <a:t>     </a:t>
-            </a:r>
-            <a:r>
-              <a:rPr lang="en-US" sz="1200" kern="0" spc="75" dirty="0">
-                <a:solidFill>
-                  <a:srgbClr val="003268">
-                    <a:alpha val="50000"/>
-                  </a:srgbClr>
-                </a:solidFill>
-                <a:latin typeface="Cascadia Code SemiBold" panose="020B0609020000020004" pitchFamily="49" charset="0"/>
-                <a:cs typeface="Cascadia Code SemiBold" panose="020B0609020000020004" pitchFamily="49" charset="0"/>
-              </a:rPr>
-              <a:t>Ponzuoli</a:t>
-            </a:r>
-            <a:r>
-              <a:rPr lang="en-US" sz="1200" kern="0" spc="75" dirty="0">
-                <a:solidFill>
-                  <a:srgbClr val="003268">
-                    <a:alpha val="50000"/>
-                  </a:srgbClr>
-                </a:solidFill>
-                <a:latin typeface="Cascadia Code ExtraLight" panose="020B0609020000020004" pitchFamily="49" charset="0"/>
-                <a:cs typeface="Cascadia Code ExtraLight" panose="020B0609020000020004" pitchFamily="49" charset="0"/>
-              </a:rPr>
-              <a:t> </a:t>
-            </a:r>
-            <a:r>
-              <a:rPr lang="en-US" sz="1200" kern="0" spc="75" dirty="0">
-                <a:solidFill>
-                  <a:srgbClr val="003268">
-                    <a:alpha val="50000"/>
-                  </a:srgbClr>
-                </a:solidFill>
-                <a:latin typeface="Cascadia Code SemiBold" panose="020B0609020000020004" pitchFamily="49" charset="0"/>
-                <a:cs typeface="Cascadia Code SemiBold" panose="020B0609020000020004" pitchFamily="49" charset="0"/>
-              </a:rPr>
-              <a:t>Giovanni</a:t>
-            </a:r>
-            <a:r>
-              <a:rPr lang="en-US" sz="1200" kern="0" spc="75" dirty="0">
-                <a:solidFill>
-                  <a:srgbClr val="003268">
-                    <a:alpha val="50000"/>
-                  </a:srgbClr>
-                </a:solidFill>
-                <a:latin typeface="Cascadia Code ExtraLight" panose="020B0609020000020004" pitchFamily="49" charset="0"/>
-                <a:cs typeface="Cascadia Code ExtraLight" panose="020B0609020000020004" pitchFamily="49" charset="0"/>
-              </a:rPr>
-              <a:t>	    - </a:t>
-            </a:r>
-            <a:endParaRPr lang="en-US" sz="1200" dirty="0">
-              <a:solidFill>
-                <a:srgbClr val="003268">
-                  <a:alpha val="50000"/>
-                </a:srgbClr>
-              </a:solidFill>
-              <a:latin typeface="Cascadia Code ExtraLight" panose="020B0609020000020004" pitchFamily="49" charset="0"/>
-              <a:cs typeface="Cascadia Code ExtraLight" panose="020B0609020000020004" pitchFamily="49" charset="0"/>
-            </a:endParaRPr>
-          </a:p>
-        </p:txBody>
-      </p:sp>
-      <p:pic>
-        <p:nvPicPr>
-          <p:cNvPr id="28" name="Loss anatomy" descr="loss_anatomy.png"/>
-          <p:cNvPicPr>
-            <a:picLocks noChangeAspect="1"/>
-          </p:cNvPicPr>
-          <p:nvPr/>
-        </p:nvPicPr>
-        <p:blipFill>
-          <a:blip r:embed="rId4"/>
-          <a:stretch>
-            <a:fillRect/>
-          </a:stretch>
-        </p:blipFill>
-        <p:spPr>
-          <a:xfrm>
-            <a:off x="3853092" y="4350365"/>
-            <a:ext cx="6350000" cy="1430942"/>
-          </a:xfrm>
-          <a:prstGeom prst="rect">
-            <a:avLst/>
-          </a:prstGeom>
-        </p:spPr>
-      </p:pic>
-      <p:sp>
-        <p:nvSpPr>
-          <p:cNvPr id="3" name="TextBox 2">
-            <a:extLst>
-              <a:ext uri="{FF2B5EF4-FFF2-40B4-BE49-F238E27FC236}">
-                <a16:creationId xmlns:a16="http://schemas.microsoft.com/office/drawing/2014/main" id="{E90AB9ED-BAC4-338C-E847-1379A43CE48A}"/>
-              </a:ext>
-            </a:extLst>
-          </p:cNvPr>
-          <p:cNvSpPr txBox="1"/>
-          <p:nvPr/>
-        </p:nvSpPr>
-        <p:spPr>
-          <a:xfrm>
-            <a:off x="3091092" y="4329917"/>
-            <a:ext cx="1320800" cy="246222"/>
-          </a:xfrm>
-          <a:prstGeom prst="rect">
-            <a:avLst/>
-          </a:prstGeom>
-          <a:noFill/>
-        </p:spPr>
-        <p:txBody>
-          <a:bodyPr wrap="square">
-            <a:spAutoFit/>
-          </a:bodyPr>
-          <a:lstStyle/>
-          <a:p>
-            <a:r>
-              <a:rPr lang="it-IT" sz="1100" b="1" spc="75" dirty="0">
-                <a:solidFill>
-                  <a:srgbClr val="000000"/>
-                </a:solidFill>
-                <a:latin typeface="Cascadia Code SemiBold"/>
-              </a:rPr>
-              <a:t>Loss =</a:t>
-            </a:r>
-            <a:endParaRPr lang="it-IT" sz="1600" dirty="0">
-              <a:solidFill>
-                <a:srgbClr val="000000"/>
-              </a:solidFill>
-            </a:endParaRPr>
-          </a:p>
-        </p:txBody>
-      </p:sp>
-      <p:sp>
-        <p:nvSpPr>
-          <p:cNvPr id="15" name="TextBox 14">
-            <a:extLst>
-              <a:ext uri="{FF2B5EF4-FFF2-40B4-BE49-F238E27FC236}">
-                <a16:creationId xmlns:a16="http://schemas.microsoft.com/office/drawing/2014/main" id="{D14E69CD-1F15-6E1D-D7D8-AD0CFE16C17D}"/>
-              </a:ext>
-            </a:extLst>
-          </p:cNvPr>
-          <p:cNvSpPr txBox="1"/>
-          <p:nvPr/>
-        </p:nvSpPr>
-        <p:spPr>
-          <a:xfrm>
-            <a:off x="4270922" y="4319629"/>
-            <a:ext cx="281940" cy="246222"/>
-          </a:xfrm>
-          <a:prstGeom prst="rect">
-            <a:avLst/>
-          </a:prstGeom>
-          <a:noFill/>
-        </p:spPr>
-        <p:txBody>
-          <a:bodyPr wrap="square">
-            <a:spAutoFit/>
-          </a:bodyPr>
-          <a:lstStyle/>
-          <a:p>
-            <a:r>
-              <a:rPr lang="it-IT" sz="1100" b="1" spc="75" dirty="0">
-                <a:solidFill>
-                  <a:srgbClr val="000000"/>
-                </a:solidFill>
-                <a:latin typeface="Cascadia Code SemiBold"/>
-              </a:rPr>
-              <a:t>+</a:t>
-            </a:r>
-            <a:endParaRPr lang="it-IT" dirty="0"/>
-          </a:p>
-        </p:txBody>
-      </p:sp>
-      <p:sp>
-        <p:nvSpPr>
-          <p:cNvPr id="21" name="TextBox 20">
-            <a:extLst>
-              <a:ext uri="{FF2B5EF4-FFF2-40B4-BE49-F238E27FC236}">
-                <a16:creationId xmlns:a16="http://schemas.microsoft.com/office/drawing/2014/main" id="{3523D7B4-45BC-DD9B-E9A3-CFA2335B72A1}"/>
-              </a:ext>
-            </a:extLst>
-          </p:cNvPr>
-          <p:cNvSpPr txBox="1"/>
-          <p:nvPr/>
-        </p:nvSpPr>
-        <p:spPr>
-          <a:xfrm>
-            <a:off x="6823750" y="4319629"/>
-            <a:ext cx="1622657" cy="246222"/>
-          </a:xfrm>
-          <a:prstGeom prst="rect">
-            <a:avLst/>
-          </a:prstGeom>
-          <a:noFill/>
-        </p:spPr>
-        <p:txBody>
-          <a:bodyPr wrap="square">
-            <a:spAutoFit/>
-          </a:bodyPr>
-          <a:lstStyle/>
-          <a:p>
-            <a:r>
-              <a:rPr lang="it-IT" sz="1100" b="1" spc="75" dirty="0">
-                <a:solidFill>
-                  <a:srgbClr val="000000"/>
-                </a:solidFill>
-                <a:latin typeface="Cascadia Code SemiBold"/>
-              </a:rPr>
-              <a:t>+</a:t>
-            </a:r>
-            <a:endParaRPr lang="it-IT" dirty="0"/>
-          </a:p>
-        </p:txBody>
-      </p:sp>
       <p:sp>
         <p:nvSpPr>
           <p:cNvPr id="23" name="Rectangle 22">
@@ -13742,80 +12619,54 @@
         </p:nvSpPr>
         <p:spPr>
           <a:xfrm>
-            <a:off x="2989287" y="4198385"/>
-            <a:ext cx="7671009" cy="1479522"/>
+            <a:off x="3770516" y="3509843"/>
+            <a:ext cx="4661667" cy="944808"/>
           </a:xfrm>
           <a:custGeom>
             <a:avLst/>
             <a:gdLst>
-              <a:gd name="csX0" fmla="*/ 0 w 7671009"/>
-              <a:gd name="csY0" fmla="*/ 0 h 1479522"/>
-              <a:gd name="csX1" fmla="*/ 513368 w 7671009"/>
-              <a:gd name="csY1" fmla="*/ 0 h 1479522"/>
-              <a:gd name="csX2" fmla="*/ 873315 w 7671009"/>
-              <a:gd name="csY2" fmla="*/ 0 h 1479522"/>
-              <a:gd name="csX3" fmla="*/ 1616813 w 7671009"/>
-              <a:gd name="csY3" fmla="*/ 0 h 1479522"/>
-              <a:gd name="csX4" fmla="*/ 2130180 w 7671009"/>
-              <a:gd name="csY4" fmla="*/ 0 h 1479522"/>
-              <a:gd name="csX5" fmla="*/ 2643548 w 7671009"/>
-              <a:gd name="csY5" fmla="*/ 0 h 1479522"/>
-              <a:gd name="csX6" fmla="*/ 3387046 w 7671009"/>
-              <a:gd name="csY6" fmla="*/ 0 h 1479522"/>
-              <a:gd name="csX7" fmla="*/ 3823703 w 7671009"/>
-              <a:gd name="csY7" fmla="*/ 0 h 1479522"/>
-              <a:gd name="csX8" fmla="*/ 4567201 w 7671009"/>
-              <a:gd name="csY8" fmla="*/ 0 h 1479522"/>
-              <a:gd name="csX9" fmla="*/ 5310699 w 7671009"/>
-              <a:gd name="csY9" fmla="*/ 0 h 1479522"/>
-              <a:gd name="csX10" fmla="*/ 5900776 w 7671009"/>
-              <a:gd name="csY10" fmla="*/ 0 h 1479522"/>
-              <a:gd name="csX11" fmla="*/ 6644274 w 7671009"/>
-              <a:gd name="csY11" fmla="*/ 0 h 1479522"/>
-              <a:gd name="csX12" fmla="*/ 7157641 w 7671009"/>
-              <a:gd name="csY12" fmla="*/ 0 h 1479522"/>
-              <a:gd name="csX13" fmla="*/ 7671009 w 7671009"/>
-              <a:gd name="csY13" fmla="*/ 0 h 1479522"/>
-              <a:gd name="csX14" fmla="*/ 7671009 w 7671009"/>
-              <a:gd name="csY14" fmla="*/ 507969 h 1479522"/>
-              <a:gd name="csX15" fmla="*/ 7671009 w 7671009"/>
-              <a:gd name="csY15" fmla="*/ 1001143 h 1479522"/>
-              <a:gd name="csX16" fmla="*/ 7671009 w 7671009"/>
-              <a:gd name="csY16" fmla="*/ 1479522 h 1479522"/>
-              <a:gd name="csX17" fmla="*/ 7004221 w 7671009"/>
-              <a:gd name="csY17" fmla="*/ 1479522 h 1479522"/>
-              <a:gd name="csX18" fmla="*/ 6414144 w 7671009"/>
-              <a:gd name="csY18" fmla="*/ 1479522 h 1479522"/>
-              <a:gd name="csX19" fmla="*/ 6054196 w 7671009"/>
-              <a:gd name="csY19" fmla="*/ 1479522 h 1479522"/>
-              <a:gd name="csX20" fmla="*/ 5617539 w 7671009"/>
-              <a:gd name="csY20" fmla="*/ 1479522 h 1479522"/>
-              <a:gd name="csX21" fmla="*/ 4874041 w 7671009"/>
-              <a:gd name="csY21" fmla="*/ 1479522 h 1479522"/>
-              <a:gd name="csX22" fmla="*/ 4283963 w 7671009"/>
-              <a:gd name="csY22" fmla="*/ 1479522 h 1479522"/>
-              <a:gd name="csX23" fmla="*/ 3847306 w 7671009"/>
-              <a:gd name="csY23" fmla="*/ 1479522 h 1479522"/>
-              <a:gd name="csX24" fmla="*/ 3257228 w 7671009"/>
-              <a:gd name="csY24" fmla="*/ 1479522 h 1479522"/>
-              <a:gd name="csX25" fmla="*/ 2897281 w 7671009"/>
-              <a:gd name="csY25" fmla="*/ 1479522 h 1479522"/>
-              <a:gd name="csX26" fmla="*/ 2537334 w 7671009"/>
-              <a:gd name="csY26" fmla="*/ 1479522 h 1479522"/>
-              <a:gd name="csX27" fmla="*/ 1947256 w 7671009"/>
-              <a:gd name="csY27" fmla="*/ 1479522 h 1479522"/>
-              <a:gd name="csX28" fmla="*/ 1510599 w 7671009"/>
-              <a:gd name="csY28" fmla="*/ 1479522 h 1479522"/>
-              <a:gd name="csX29" fmla="*/ 843811 w 7671009"/>
-              <a:gd name="csY29" fmla="*/ 1479522 h 1479522"/>
-              <a:gd name="csX30" fmla="*/ 0 w 7671009"/>
-              <a:gd name="csY30" fmla="*/ 1479522 h 1479522"/>
-              <a:gd name="csX31" fmla="*/ 0 w 7671009"/>
-              <a:gd name="csY31" fmla="*/ 971553 h 1479522"/>
-              <a:gd name="csX32" fmla="*/ 0 w 7671009"/>
-              <a:gd name="csY32" fmla="*/ 463584 h 1479522"/>
-              <a:gd name="csX33" fmla="*/ 0 w 7671009"/>
-              <a:gd name="csY33" fmla="*/ 0 h 1479522"/>
+              <a:gd name="csX0" fmla="*/ 0 w 4661667"/>
+              <a:gd name="csY0" fmla="*/ 0 h 944808"/>
+              <a:gd name="csX1" fmla="*/ 489475 w 4661667"/>
+              <a:gd name="csY1" fmla="*/ 0 h 944808"/>
+              <a:gd name="csX2" fmla="*/ 1025567 w 4661667"/>
+              <a:gd name="csY2" fmla="*/ 0 h 944808"/>
+              <a:gd name="csX3" fmla="*/ 1515042 w 4661667"/>
+              <a:gd name="csY3" fmla="*/ 0 h 944808"/>
+              <a:gd name="csX4" fmla="*/ 2144367 w 4661667"/>
+              <a:gd name="csY4" fmla="*/ 0 h 944808"/>
+              <a:gd name="csX5" fmla="*/ 2727075 w 4661667"/>
+              <a:gd name="csY5" fmla="*/ 0 h 944808"/>
+              <a:gd name="csX6" fmla="*/ 3309784 w 4661667"/>
+              <a:gd name="csY6" fmla="*/ 0 h 944808"/>
+              <a:gd name="csX7" fmla="*/ 3985725 w 4661667"/>
+              <a:gd name="csY7" fmla="*/ 0 h 944808"/>
+              <a:gd name="csX8" fmla="*/ 4661667 w 4661667"/>
+              <a:gd name="csY8" fmla="*/ 0 h 944808"/>
+              <a:gd name="csX9" fmla="*/ 4661667 w 4661667"/>
+              <a:gd name="csY9" fmla="*/ 444060 h 944808"/>
+              <a:gd name="csX10" fmla="*/ 4661667 w 4661667"/>
+              <a:gd name="csY10" fmla="*/ 944808 h 944808"/>
+              <a:gd name="csX11" fmla="*/ 4218809 w 4661667"/>
+              <a:gd name="csY11" fmla="*/ 944808 h 944808"/>
+              <a:gd name="csX12" fmla="*/ 3729334 w 4661667"/>
+              <a:gd name="csY12" fmla="*/ 944808 h 944808"/>
+              <a:gd name="csX13" fmla="*/ 3100009 w 4661667"/>
+              <a:gd name="csY13" fmla="*/ 944808 h 944808"/>
+              <a:gd name="csX14" fmla="*/ 2424067 w 4661667"/>
+              <a:gd name="csY14" fmla="*/ 944808 h 944808"/>
+              <a:gd name="csX15" fmla="*/ 1887975 w 4661667"/>
+              <a:gd name="csY15" fmla="*/ 944808 h 944808"/>
+              <a:gd name="csX16" fmla="*/ 1212033 w 4661667"/>
+              <a:gd name="csY16" fmla="*/ 944808 h 944808"/>
+              <a:gd name="csX17" fmla="*/ 722558 w 4661667"/>
+              <a:gd name="csY17" fmla="*/ 944808 h 944808"/>
+              <a:gd name="csX18" fmla="*/ 0 w 4661667"/>
+              <a:gd name="csY18" fmla="*/ 944808 h 944808"/>
+              <a:gd name="csX19" fmla="*/ 0 w 4661667"/>
+              <a:gd name="csY19" fmla="*/ 500748 h 944808"/>
+              <a:gd name="csX20" fmla="*/ 0 w 4661667"/>
+              <a:gd name="csY20" fmla="*/ 0 h 944808"/>
             </a:gdLst>
             <a:ahLst/>
             <a:cxnLst>
@@ -13882,222 +12733,221 @@
               <a:cxn ang="0">
                 <a:pos x="csX20" y="csY20"/>
               </a:cxn>
-              <a:cxn ang="0">
-                <a:pos x="csX21" y="csY21"/>
-              </a:cxn>
-              <a:cxn ang="0">
-                <a:pos x="csX22" y="csY22"/>
-              </a:cxn>
-              <a:cxn ang="0">
-                <a:pos x="csX23" y="csY23"/>
-              </a:cxn>
-              <a:cxn ang="0">
-                <a:pos x="csX24" y="csY24"/>
-              </a:cxn>
-              <a:cxn ang="0">
-                <a:pos x="csX25" y="csY25"/>
-              </a:cxn>
-              <a:cxn ang="0">
-                <a:pos x="csX26" y="csY26"/>
-              </a:cxn>
-              <a:cxn ang="0">
-                <a:pos x="csX27" y="csY27"/>
-              </a:cxn>
-              <a:cxn ang="0">
-                <a:pos x="csX28" y="csY28"/>
-              </a:cxn>
-              <a:cxn ang="0">
-                <a:pos x="csX29" y="csY29"/>
-              </a:cxn>
-              <a:cxn ang="0">
-                <a:pos x="csX30" y="csY30"/>
-              </a:cxn>
-              <a:cxn ang="0">
-                <a:pos x="csX31" y="csY31"/>
-              </a:cxn>
-              <a:cxn ang="0">
-                <a:pos x="csX32" y="csY32"/>
-              </a:cxn>
-              <a:cxn ang="0">
-                <a:pos x="csX33" y="csY33"/>
-              </a:cxn>
             </a:cxnLst>
             <a:rect l="l" t="t" r="r" b="b"/>
             <a:pathLst>
-              <a:path w="7671009" h="1479522" extrusionOk="0">
+              <a:path w="4661667" h="944808" fill="none" extrusionOk="0">
                 <a:moveTo>
                   <a:pt x="0" y="0"/>
                 </a:moveTo>
                 <a:cubicBezTo>
-                  <a:pt x="204967" y="-278"/>
-                  <a:pt x="404916" y="29421"/>
-                  <a:pt x="513368" y="0"/>
+                  <a:pt x="215502" y="-50231"/>
+                  <a:pt x="366431" y="55926"/>
+                  <a:pt x="489475" y="0"/>
                 </a:cubicBezTo>
                 <a:cubicBezTo>
-                  <a:pt x="621820" y="-29421"/>
-                  <a:pt x="770535" y="40143"/>
-                  <a:pt x="873315" y="0"/>
+                  <a:pt x="612519" y="-55926"/>
+                  <a:pt x="880486" y="64203"/>
+                  <a:pt x="1025567" y="0"/>
                 </a:cubicBezTo>
                 <a:cubicBezTo>
-                  <a:pt x="976095" y="-40143"/>
-                  <a:pt x="1388619" y="59333"/>
-                  <a:pt x="1616813" y="0"/>
+                  <a:pt x="1170648" y="-64203"/>
+                  <a:pt x="1333230" y="22968"/>
+                  <a:pt x="1515042" y="0"/>
                 </a:cubicBezTo>
                 <a:cubicBezTo>
-                  <a:pt x="1845007" y="-59333"/>
-                  <a:pt x="2019034" y="32314"/>
-                  <a:pt x="2130180" y="0"/>
+                  <a:pt x="1696854" y="-22968"/>
+                  <a:pt x="1844089" y="39900"/>
+                  <a:pt x="2144367" y="0"/>
                 </a:cubicBezTo>
                 <a:cubicBezTo>
-                  <a:pt x="2241326" y="-32314"/>
-                  <a:pt x="2514791" y="6030"/>
-                  <a:pt x="2643548" y="0"/>
+                  <a:pt x="2444645" y="-39900"/>
+                  <a:pt x="2473074" y="40397"/>
+                  <a:pt x="2727075" y="0"/>
                 </a:cubicBezTo>
                 <a:cubicBezTo>
-                  <a:pt x="2772305" y="-6030"/>
-                  <a:pt x="3118298" y="76426"/>
-                  <a:pt x="3387046" y="0"/>
+                  <a:pt x="2981076" y="-40397"/>
+                  <a:pt x="3057640" y="64712"/>
+                  <a:pt x="3309784" y="0"/>
                 </a:cubicBezTo>
                 <a:cubicBezTo>
-                  <a:pt x="3655794" y="-76426"/>
-                  <a:pt x="3709784" y="16760"/>
-                  <a:pt x="3823703" y="0"/>
+                  <a:pt x="3561928" y="-64712"/>
+                  <a:pt x="3746509" y="9346"/>
+                  <a:pt x="3985725" y="0"/>
                 </a:cubicBezTo>
                 <a:cubicBezTo>
-                  <a:pt x="3937622" y="-16760"/>
-                  <a:pt x="4269588" y="73591"/>
-                  <a:pt x="4567201" y="0"/>
+                  <a:pt x="4224941" y="-9346"/>
+                  <a:pt x="4327658" y="16420"/>
+                  <a:pt x="4661667" y="0"/>
                 </a:cubicBezTo>
                 <a:cubicBezTo>
-                  <a:pt x="4864814" y="-73591"/>
-                  <a:pt x="5156286" y="87487"/>
-                  <a:pt x="5310699" y="0"/>
+                  <a:pt x="4684449" y="220421"/>
+                  <a:pt x="4647705" y="254365"/>
+                  <a:pt x="4661667" y="444060"/>
                 </a:cubicBezTo>
                 <a:cubicBezTo>
-                  <a:pt x="5465112" y="-87487"/>
-                  <a:pt x="5612782" y="14618"/>
-                  <a:pt x="5900776" y="0"/>
+                  <a:pt x="4675629" y="633755"/>
+                  <a:pt x="4627358" y="764578"/>
+                  <a:pt x="4661667" y="944808"/>
                 </a:cubicBezTo>
                 <a:cubicBezTo>
-                  <a:pt x="6188770" y="-14618"/>
-                  <a:pt x="6438022" y="88348"/>
-                  <a:pt x="6644274" y="0"/>
+                  <a:pt x="4528410" y="961696"/>
+                  <a:pt x="4377753" y="912245"/>
+                  <a:pt x="4218809" y="944808"/>
                 </a:cubicBezTo>
                 <a:cubicBezTo>
-                  <a:pt x="6850526" y="-88348"/>
-                  <a:pt x="6936682" y="3988"/>
-                  <a:pt x="7157641" y="0"/>
+                  <a:pt x="4059865" y="977371"/>
+                  <a:pt x="3836016" y="926413"/>
+                  <a:pt x="3729334" y="944808"/>
                 </a:cubicBezTo>
                 <a:cubicBezTo>
-                  <a:pt x="7378600" y="-3988"/>
-                  <a:pt x="7461958" y="5740"/>
-                  <a:pt x="7671009" y="0"/>
+                  <a:pt x="3622652" y="963203"/>
+                  <a:pt x="3318882" y="940926"/>
+                  <a:pt x="3100009" y="944808"/>
                 </a:cubicBezTo>
                 <a:cubicBezTo>
-                  <a:pt x="7678922" y="108234"/>
-                  <a:pt x="7637942" y="330107"/>
-                  <a:pt x="7671009" y="507969"/>
+                  <a:pt x="2881137" y="948690"/>
+                  <a:pt x="2616959" y="914751"/>
+                  <a:pt x="2424067" y="944808"/>
                 </a:cubicBezTo>
                 <a:cubicBezTo>
-                  <a:pt x="7704076" y="685831"/>
-                  <a:pt x="7616685" y="858039"/>
-                  <a:pt x="7671009" y="1001143"/>
+                  <a:pt x="2231175" y="974865"/>
+                  <a:pt x="2142211" y="908327"/>
+                  <a:pt x="1887975" y="944808"/>
                 </a:cubicBezTo>
                 <a:cubicBezTo>
-                  <a:pt x="7725333" y="1144247"/>
-                  <a:pt x="7657452" y="1375464"/>
-                  <a:pt x="7671009" y="1479522"/>
+                  <a:pt x="1633739" y="981289"/>
+                  <a:pt x="1435099" y="896409"/>
+                  <a:pt x="1212033" y="944808"/>
                 </a:cubicBezTo>
                 <a:cubicBezTo>
-                  <a:pt x="7411064" y="1554773"/>
-                  <a:pt x="7190809" y="1439777"/>
-                  <a:pt x="7004221" y="1479522"/>
+                  <a:pt x="988967" y="993207"/>
+                  <a:pt x="851892" y="914666"/>
+                  <a:pt x="722558" y="944808"/>
                 </a:cubicBezTo>
                 <a:cubicBezTo>
-                  <a:pt x="6817633" y="1519267"/>
-                  <a:pt x="6656342" y="1430005"/>
-                  <a:pt x="6414144" y="1479522"/>
+                  <a:pt x="593225" y="974950"/>
+                  <a:pt x="189977" y="872402"/>
+                  <a:pt x="0" y="944808"/>
                 </a:cubicBezTo>
                 <a:cubicBezTo>
-                  <a:pt x="6171946" y="1529039"/>
-                  <a:pt x="6176988" y="1463124"/>
-                  <a:pt x="6054196" y="1479522"/>
+                  <a:pt x="-21807" y="778828"/>
+                  <a:pt x="29523" y="647653"/>
+                  <a:pt x="0" y="500748"/>
                 </a:cubicBezTo>
                 <a:cubicBezTo>
-                  <a:pt x="5931404" y="1495920"/>
-                  <a:pt x="5778809" y="1464037"/>
-                  <a:pt x="5617539" y="1479522"/>
+                  <a:pt x="-29523" y="353843"/>
+                  <a:pt x="9022" y="200788"/>
+                  <a:pt x="0" y="0"/>
+                </a:cubicBezTo>
+                <a:close/>
+              </a:path>
+              <a:path w="4661667" h="944808" stroke="0" extrusionOk="0">
+                <a:moveTo>
+                  <a:pt x="0" y="0"/>
+                </a:moveTo>
+                <a:cubicBezTo>
+                  <a:pt x="147585" y="-37092"/>
+                  <a:pt x="356685" y="30244"/>
+                  <a:pt x="536092" y="0"/>
                 </a:cubicBezTo>
                 <a:cubicBezTo>
-                  <a:pt x="5456269" y="1495007"/>
-                  <a:pt x="5172806" y="1391275"/>
-                  <a:pt x="4874041" y="1479522"/>
+                  <a:pt x="715499" y="-30244"/>
+                  <a:pt x="796491" y="48567"/>
+                  <a:pt x="978950" y="0"/>
                 </a:cubicBezTo>
                 <a:cubicBezTo>
-                  <a:pt x="4575276" y="1567769"/>
-                  <a:pt x="4442582" y="1419248"/>
-                  <a:pt x="4283963" y="1479522"/>
+                  <a:pt x="1161409" y="-48567"/>
+                  <a:pt x="1421708" y="55245"/>
+                  <a:pt x="1654892" y="0"/>
                 </a:cubicBezTo>
                 <a:cubicBezTo>
-                  <a:pt x="4125344" y="1539796"/>
-                  <a:pt x="4043056" y="1436016"/>
-                  <a:pt x="3847306" y="1479522"/>
+                  <a:pt x="1888076" y="-55245"/>
+                  <a:pt x="2052533" y="10880"/>
+                  <a:pt x="2190983" y="0"/>
                 </a:cubicBezTo>
                 <a:cubicBezTo>
-                  <a:pt x="3651556" y="1523028"/>
-                  <a:pt x="3528207" y="1425732"/>
-                  <a:pt x="3257228" y="1479522"/>
+                  <a:pt x="2329433" y="-10880"/>
+                  <a:pt x="2574939" y="35469"/>
+                  <a:pt x="2727075" y="0"/>
                 </a:cubicBezTo>
                 <a:cubicBezTo>
-                  <a:pt x="2986249" y="1533312"/>
-                  <a:pt x="3004074" y="1443338"/>
-                  <a:pt x="2897281" y="1479522"/>
+                  <a:pt x="2879211" y="-35469"/>
+                  <a:pt x="3260080" y="23351"/>
+                  <a:pt x="3403017" y="0"/>
                 </a:cubicBezTo>
                 <a:cubicBezTo>
-                  <a:pt x="2790488" y="1515706"/>
-                  <a:pt x="2611554" y="1455916"/>
-                  <a:pt x="2537334" y="1479522"/>
+                  <a:pt x="3545954" y="-23351"/>
+                  <a:pt x="3749759" y="39840"/>
+                  <a:pt x="3892492" y="0"/>
                 </a:cubicBezTo>
                 <a:cubicBezTo>
-                  <a:pt x="2463114" y="1503128"/>
-                  <a:pt x="2100880" y="1451310"/>
-                  <a:pt x="1947256" y="1479522"/>
+                  <a:pt x="4035226" y="-39840"/>
+                  <a:pt x="4307408" y="80928"/>
+                  <a:pt x="4661667" y="0"/>
                 </a:cubicBezTo>
                 <a:cubicBezTo>
-                  <a:pt x="1793632" y="1507734"/>
-                  <a:pt x="1714917" y="1462793"/>
-                  <a:pt x="1510599" y="1479522"/>
+                  <a:pt x="4663994" y="179130"/>
+                  <a:pt x="4625619" y="362895"/>
+                  <a:pt x="4661667" y="491300"/>
                 </a:cubicBezTo>
                 <a:cubicBezTo>
-                  <a:pt x="1306281" y="1496251"/>
-                  <a:pt x="1031762" y="1450627"/>
-                  <a:pt x="843811" y="1479522"/>
+                  <a:pt x="4697715" y="619705"/>
+                  <a:pt x="4636650" y="722427"/>
+                  <a:pt x="4661667" y="944808"/>
                 </a:cubicBezTo>
                 <a:cubicBezTo>
-                  <a:pt x="655860" y="1508417"/>
-                  <a:pt x="205282" y="1433383"/>
-                  <a:pt x="0" y="1479522"/>
+                  <a:pt x="4493709" y="1014407"/>
+                  <a:pt x="4287761" y="879424"/>
+                  <a:pt x="4078959" y="944808"/>
                 </a:cubicBezTo>
                 <a:cubicBezTo>
-                  <a:pt x="-42218" y="1244768"/>
-                  <a:pt x="23076" y="1223538"/>
-                  <a:pt x="0" y="971553"/>
+                  <a:pt x="3870157" y="1010192"/>
+                  <a:pt x="3774215" y="901569"/>
+                  <a:pt x="3542867" y="944808"/>
                 </a:cubicBezTo>
                 <a:cubicBezTo>
-                  <a:pt x="-23076" y="719568"/>
-                  <a:pt x="7479" y="665747"/>
-                  <a:pt x="0" y="463584"/>
+                  <a:pt x="3311519" y="988047"/>
+                  <a:pt x="3097992" y="896018"/>
+                  <a:pt x="2866925" y="944808"/>
                 </a:cubicBezTo>
                 <a:cubicBezTo>
-                  <a:pt x="-7479" y="261421"/>
-                  <a:pt x="43511" y="158394"/>
+                  <a:pt x="2635858" y="993598"/>
+                  <a:pt x="2511881" y="875584"/>
+                  <a:pt x="2190983" y="944808"/>
+                </a:cubicBezTo>
+                <a:cubicBezTo>
+                  <a:pt x="1870085" y="1014032"/>
+                  <a:pt x="1852869" y="943996"/>
+                  <a:pt x="1701508" y="944808"/>
+                </a:cubicBezTo>
+                <a:cubicBezTo>
+                  <a:pt x="1550147" y="945620"/>
+                  <a:pt x="1405194" y="920052"/>
+                  <a:pt x="1118800" y="944808"/>
+                </a:cubicBezTo>
+                <a:cubicBezTo>
+                  <a:pt x="832406" y="969564"/>
+                  <a:pt x="556689" y="829336"/>
+                  <a:pt x="0" y="944808"/>
+                </a:cubicBezTo>
+                <a:cubicBezTo>
+                  <a:pt x="-47866" y="761960"/>
+                  <a:pt x="21522" y="675174"/>
+                  <a:pt x="0" y="472404"/>
+                </a:cubicBezTo>
+                <a:cubicBezTo>
+                  <a:pt x="-21522" y="269634"/>
+                  <a:pt x="33196" y="209248"/>
                   <a:pt x="0" y="0"/>
                 </a:cubicBezTo>
                 <a:close/>
               </a:path>
             </a:pathLst>
           </a:custGeom>
-          <a:noFill/>
+          <a:solidFill>
+            <a:srgbClr val="F6F5EF"/>
+          </a:solidFill>
           <a:ln w="31750">
             <a:solidFill>
               <a:srgbClr val="FF0000"/>
@@ -14136,80 +12986,40 @@
           <a:bodyPr rtlCol="0" anchor="ctr"/>
           <a:lstStyle/>
           <a:p>
-            <a:pPr algn="ctr"/>
-            <a:endParaRPr lang="it-IT"/>
+            <a:pPr marL="0" marR="0" lvl="0" indent="0" algn="ctr" defTabSz="914400" rtl="0" eaLnBrk="1" fontAlgn="auto" latinLnBrk="0" hangingPunct="1">
+              <a:lnSpc>
+                <a:spcPct val="100000"/>
+              </a:lnSpc>
+              <a:spcBef>
+                <a:spcPts val="0"/>
+              </a:spcBef>
+              <a:spcAft>
+                <a:spcPts val="0"/>
+              </a:spcAft>
+              <a:buClrTx/>
+              <a:buSzTx/>
+              <a:buFontTx/>
+              <a:buNone/>
+              <a:tabLst/>
+              <a:defRPr/>
+            </a:pPr>
+            <a:endParaRPr kumimoji="0" lang="it-IT" sz="1450" b="0" i="0" u="none" strike="noStrike" kern="1200" cap="none" spc="0" normalizeH="0" baseline="0" noProof="0">
+              <a:ln>
+                <a:noFill/>
+              </a:ln>
+              <a:solidFill>
+                <a:srgbClr val="F5F3EC"/>
+              </a:solidFill>
+              <a:effectLst/>
+              <a:uLnTx/>
+              <a:uFillTx/>
+              <a:latin typeface="Arial"/>
+              <a:ea typeface="+mn-ea"/>
+              <a:cs typeface="+mn-cs"/>
+            </a:endParaRPr>
           </a:p>
         </p:txBody>
       </p:sp>
-    </p:spTree>
-  </p:cSld>
-  <p:clrMapOvr>
-    <a:masterClrMapping/>
-  </p:clrMapOvr>
-</p:sld>
-</file>
-
-<file path=ppt/slides/slide12.xml><?xml version="1.0" encoding="utf-8"?>
-<p:sld xmlns:a="http://schemas.openxmlformats.org/drawingml/2006/main" xmlns:r="http://schemas.openxmlformats.org/officeDocument/2006/relationships" xmlns:p="http://schemas.openxmlformats.org/presentationml/2006/main">
-  <p:cSld>
-    <p:bg>
-      <p:bgPr>
-        <a:solidFill>
-          <a:srgbClr val="F5F3EC"/>
-        </a:solidFill>
-        <a:effectLst/>
-      </p:bgPr>
-    </p:bg>
-    <p:spTree>
-      <p:nvGrpSpPr>
-        <p:cNvPr id="1" name=""/>
-        <p:cNvGrpSpPr/>
-        <p:nvPr/>
-      </p:nvGrpSpPr>
-      <p:grpSpPr>
-        <a:xfrm>
-          <a:off x="0" y="0"/>
-          <a:ext cx="0" cy="0"/>
-          <a:chOff x="0" y="0"/>
-          <a:chExt cx="0" cy="0"/>
-        </a:xfrm>
-      </p:grpSpPr>
-      <p:pic>
-        <p:nvPicPr>
-          <p:cNvPr id="27" name="Picture 26" descr="image.png">
-            <a:extLst>
-              <a:ext uri="{FF2B5EF4-FFF2-40B4-BE49-F238E27FC236}">
-                <a16:creationId xmlns:a16="http://schemas.microsoft.com/office/drawing/2014/main" id="{A8FAC3E2-AE50-372F-39D2-6E1DB5E3B7D5}"/>
-              </a:ext>
-            </a:extLst>
-          </p:cNvPr>
-          <p:cNvPicPr>
-            <a:picLocks noChangeAspect="1"/>
-          </p:cNvPicPr>
-          <p:nvPr/>
-        </p:nvPicPr>
-        <p:blipFill>
-          <a:blip r:embed="rId2">
-            <a:alphaModFix amt="15000"/>
-          </a:blip>
-          <a:srcRect l="19132" t="34876" r="19132" b="33281"/>
-          <a:stretch>
-            <a:fillRect/>
-          </a:stretch>
-        </p:blipFill>
-        <p:spPr>
-          <a:xfrm>
-            <a:off x="0" y="284703"/>
-            <a:ext cx="12192000" cy="6288594"/>
-          </a:xfrm>
-          <a:prstGeom prst="rect">
-            <a:avLst/>
-          </a:prstGeom>
-          <a:effectLst>
-            <a:softEdge rad="317500"/>
-          </a:effectLst>
-        </p:spPr>
-      </p:pic>
       <p:sp>
         <p:nvSpPr>
           <p:cNvPr id="5" name="TextBox 4"/>
@@ -14232,19 +13042,39 @@
           </a:bodyPr>
           <a:lstStyle/>
           <a:p>
-            <a:pPr algn="ctr">
+            <a:pPr marL="0" marR="0" lvl="0" indent="0" algn="ctr" defTabSz="914400" rtl="0" eaLnBrk="1" fontAlgn="auto" latinLnBrk="0" hangingPunct="1">
               <a:lnSpc>
                 <a:spcPct val="108000"/>
               </a:lnSpc>
+              <a:spcBef>
+                <a:spcPts val="0"/>
+              </a:spcBef>
+              <a:spcAft>
+                <a:spcPts val="0"/>
+              </a:spcAft>
+              <a:buClrTx/>
+              <a:buSzTx/>
+              <a:buFontTx/>
+              <a:buNone/>
+              <a:tabLst/>
+              <a:defRPr/>
             </a:pPr>
             <a:r>
-              <a:rPr sz="3800" b="1" dirty="0">
-                <a:solidFill>
-                  <a:srgbClr val="121417"/>
-                </a:solidFill>
+              <a:rPr kumimoji="0" sz="3800" b="1" i="0" u="none" strike="noStrike" kern="1200" cap="none" spc="0" normalizeH="0" baseline="0" noProof="0" dirty="0">
+                <a:ln>
+                  <a:noFill/>
+                </a:ln>
+                <a:solidFill>
+                  <a:srgbClr val="121417"/>
+                </a:solidFill>
+                <a:effectLst/>
+                <a:uLnTx/>
+                <a:uFillTx/>
                 <a:latin typeface="Cascadia Code SemiBold"/>
-              </a:rPr>
-              <a:t>9. Optimizer and LR Schedule</a:t>
+                <a:ea typeface="+mn-ea"/>
+                <a:cs typeface="+mn-cs"/>
+              </a:rPr>
+              <a:t>9. Training and Baseline</a:t>
             </a:r>
           </a:p>
         </p:txBody>
@@ -14271,19 +13101,39 @@
           </a:bodyPr>
           <a:lstStyle/>
           <a:p>
-            <a:pPr algn="l">
+            <a:pPr marL="0" marR="0" lvl="0" indent="0" algn="l" defTabSz="914400" rtl="0" eaLnBrk="1" fontAlgn="auto" latinLnBrk="0" hangingPunct="1">
               <a:lnSpc>
                 <a:spcPct val="130000"/>
               </a:lnSpc>
+              <a:spcBef>
+                <a:spcPts val="0"/>
+              </a:spcBef>
+              <a:spcAft>
+                <a:spcPts val="0"/>
+              </a:spcAft>
+              <a:buClrTx/>
+              <a:buSzTx/>
+              <a:buFontTx/>
+              <a:buNone/>
+              <a:tabLst/>
+              <a:defRPr/>
             </a:pPr>
             <a:r>
-              <a:rPr sz="1200" b="1" spc="75">
+              <a:rPr kumimoji="0" sz="1200" b="1" i="0" u="none" strike="noStrike" kern="1200" cap="none" spc="75" normalizeH="0" baseline="0" noProof="0" dirty="0">
+                <a:ln>
+                  <a:noFill/>
+                </a:ln>
                 <a:solidFill>
                   <a:srgbClr val="002060"/>
                 </a:solidFill>
+                <a:effectLst/>
+                <a:uLnTx/>
+                <a:uFillTx/>
                 <a:latin typeface="Cascadia Code SemiBold"/>
-              </a:rPr>
-              <a:t>OPTIMIZER</a:t>
+                <a:ea typeface="+mn-ea"/>
+                <a:cs typeface="+mn-cs"/>
+              </a:rPr>
+              <a:t>DATASET AND SPLIT</a:t>
             </a:r>
           </a:p>
         </p:txBody>
@@ -14303,6 +13153,9 @@
             <a:avLst/>
           </a:prstGeom>
           <a:noFill/>
+          <a:ln>
+            <a:noFill/>
+          </a:ln>
         </p:spPr>
         <p:txBody>
           <a:bodyPr wrap="square" lIns="0" tIns="0" rIns="0" bIns="0" anchor="t">
@@ -14310,132 +13163,110 @@
           </a:bodyPr>
           <a:lstStyle/>
           <a:p>
-            <a:pPr algn="l">
+            <a:pPr marL="0" marR="0" lvl="0" indent="0" algn="l" defTabSz="914400" rtl="0" eaLnBrk="1" fontAlgn="auto" latinLnBrk="0" hangingPunct="1">
               <a:lnSpc>
                 <a:spcPct val="145000"/>
               </a:lnSpc>
+              <a:spcBef>
+                <a:spcPts val="0"/>
+              </a:spcBef>
+              <a:spcAft>
+                <a:spcPts val="0"/>
+              </a:spcAft>
+              <a:buClrTx/>
+              <a:buSzTx/>
+              <a:buFontTx/>
+              <a:buNone/>
+              <a:tabLst/>
+              <a:defRPr/>
             </a:pPr>
             <a:r>
-              <a:rPr lang="en-US" sz="1400" b="1" dirty="0">
-                <a:solidFill>
-                  <a:srgbClr val="121417"/>
-                </a:solidFill>
+              <a:rPr kumimoji="0" lang="en-US" sz="1400" b="0" i="0" u="none" strike="noStrike" kern="1200" cap="none" spc="0" normalizeH="0" baseline="0" noProof="0" dirty="0">
+                <a:ln>
+                  <a:noFill/>
+                </a:ln>
+                <a:solidFill>
+                  <a:srgbClr val="121417"/>
+                </a:solidFill>
+                <a:effectLst/>
+                <a:uLnTx/>
+                <a:uFillTx/>
+                <a:latin typeface="Cascadia Code SemiLight"/>
+                <a:ea typeface="+mn-ea"/>
+                <a:cs typeface="+mn-cs"/>
+              </a:rPr>
+              <a:t>Most of the work uses a </a:t>
+            </a:r>
+            <a:r>
+              <a:rPr kumimoji="0" lang="en-US" sz="1400" b="1" i="0" u="none" strike="noStrike" kern="1200" cap="none" spc="0" normalizeH="0" baseline="0" noProof="0" dirty="0">
+                <a:ln>
+                  <a:noFill/>
+                </a:ln>
+                <a:solidFill>
+                  <a:srgbClr val="121417"/>
+                </a:solidFill>
+                <a:effectLst/>
+                <a:uLnTx/>
+                <a:uFillTx/>
                 <a:latin typeface="Cascadia Code SemiBold"/>
-              </a:rPr>
-              <a:t>AdamW</a:t>
-            </a:r>
-            <a:r>
-              <a:rPr lang="en-US" sz="1400" b="0" dirty="0">
-                <a:solidFill>
-                  <a:srgbClr val="121417"/>
-                </a:solidFill>
+                <a:ea typeface="+mn-ea"/>
+                <a:cs typeface="+mn-cs"/>
+              </a:rPr>
+              <a:t>5k-play dataset</a:t>
+            </a:r>
+            <a:r>
+              <a:rPr kumimoji="0" lang="en-US" sz="1400" b="0" i="0" u="none" strike="noStrike" kern="1200" cap="none" spc="0" normalizeH="0" baseline="0" noProof="0" dirty="0">
+                <a:ln>
+                  <a:noFill/>
+                </a:ln>
+                <a:solidFill>
+                  <a:srgbClr val="121417"/>
+                </a:solidFill>
+                <a:effectLst/>
+                <a:uLnTx/>
+                <a:uFillTx/>
                 <a:latin typeface="Cascadia Code SemiLight"/>
-              </a:rPr>
-              <a:t> at </a:t>
-            </a:r>
-            <a:r>
-              <a:rPr lang="en-US" sz="1400" b="1" dirty="0">
-                <a:solidFill>
-                  <a:srgbClr val="121417"/>
-                </a:solidFill>
-                <a:latin typeface="Cascadia Code SemiBold"/>
-              </a:rPr>
-              <a:t>initial learning rate 2e-3</a:t>
-            </a:r>
-            <a:r>
-              <a:rPr lang="en-US" sz="1400" b="0" dirty="0">
-                <a:solidFill>
-                  <a:srgbClr val="121417"/>
-                </a:solidFill>
+                <a:ea typeface="+mn-ea"/>
+                <a:cs typeface="+mn-cs"/>
+              </a:rPr>
+              <a:t>: </a:t>
+            </a:r>
+            <a:r>
+              <a:rPr kumimoji="0" lang="en-US" sz="1400" b="0" i="0" u="none" strike="noStrike" kern="1200" cap="none" spc="0" normalizeH="0" baseline="0" noProof="0" dirty="0">
+                <a:ln>
+                  <a:noFill/>
+                </a:ln>
+                <a:solidFill>
+                  <a:srgbClr val="121417"/>
+                </a:solidFill>
+                <a:effectLst/>
+                <a:uLnTx/>
+                <a:uFillTx/>
+                <a:latin typeface="Cascadia Code SemiBold" panose="020B0609020000020004" pitchFamily="49" charset="0"/>
+                <a:cs typeface="Cascadia Code SemiBold" panose="020B0609020000020004" pitchFamily="49" charset="0"/>
+              </a:rPr>
+              <a:t>3,000 training, 1,000 validation and 1,000 test plays</a:t>
+            </a:r>
+            <a:r>
+              <a:rPr kumimoji="0" lang="en-US" sz="1400" b="0" i="0" u="none" strike="noStrike" kern="1200" cap="none" spc="0" normalizeH="0" baseline="0" noProof="0" dirty="0">
+                <a:ln>
+                  <a:noFill/>
+                </a:ln>
+                <a:solidFill>
+                  <a:srgbClr val="121417"/>
+                </a:solidFill>
+                <a:effectLst/>
+                <a:uLnTx/>
+                <a:uFillTx/>
                 <a:latin typeface="Cascadia Code SemiLight"/>
-              </a:rPr>
-              <a:t>, with </a:t>
-            </a:r>
-            <a:r>
-              <a:rPr lang="en-US" sz="1400" b="1" dirty="0">
-                <a:solidFill>
-                  <a:srgbClr val="121417"/>
-                </a:solidFill>
-                <a:latin typeface="Cascadia Code SemiBold"/>
-              </a:rPr>
-              <a:t>gradient clipping</a:t>
-            </a:r>
-            <a:r>
-              <a:rPr lang="en-US" sz="1400" b="0" dirty="0">
-                <a:solidFill>
-                  <a:srgbClr val="121417"/>
-                </a:solidFill>
-                <a:latin typeface="Cascadia Code SemiLight"/>
-              </a:rPr>
-              <a:t> at norm </a:t>
-            </a:r>
-            <a:r>
-              <a:rPr lang="en-US" sz="1400" b="1" dirty="0">
-                <a:solidFill>
-                  <a:srgbClr val="121417"/>
-                </a:solidFill>
-                <a:latin typeface="Cascadia Code SemiBold"/>
-              </a:rPr>
-              <a:t>1.0</a:t>
-            </a:r>
-            <a:r>
-              <a:rPr lang="en-US" sz="1400" b="0" dirty="0">
-                <a:solidFill>
-                  <a:srgbClr val="121417"/>
-                </a:solidFill>
-                <a:latin typeface="Cascadia Code SemiLight"/>
-              </a:rPr>
-              <a:t>; at batch size 1 each epoch is </a:t>
-            </a:r>
-            <a:r>
-              <a:rPr lang="en-US" sz="1400" b="1" dirty="0">
-                <a:solidFill>
-                  <a:srgbClr val="121417"/>
-                </a:solidFill>
-                <a:latin typeface="Cascadia Code SemiBold"/>
-              </a:rPr>
-              <a:t>3,000 weight updates</a:t>
+                <a:ea typeface="+mn-ea"/>
+                <a:cs typeface="+mn-cs"/>
+              </a:rPr>
+              <a:t>, stratified by play length and shared by every experiment</a:t>
             </a:r>
           </a:p>
         </p:txBody>
       </p:sp>
-      <p:cxnSp>
-        <p:nvCxnSpPr>
-          <p:cNvPr id="8" name="Connector 7"/>
-          <p:cNvCxnSpPr/>
-          <p:nvPr/>
-        </p:nvCxnSpPr>
-        <p:spPr>
-          <a:xfrm>
-            <a:off x="812800" y="2275417"/>
-            <a:ext cx="10566400" cy="0"/>
-          </a:xfrm>
-          <a:prstGeom prst="line">
-            <a:avLst/>
-          </a:prstGeom>
-          <a:ln w="6350">
-            <a:solidFill>
-              <a:srgbClr val="FFFFFF">
-                <a:alpha val="12000"/>
-              </a:srgbClr>
-            </a:solidFill>
-          </a:ln>
-        </p:spPr>
-        <p:style>
-          <a:lnRef idx="2">
-            <a:schemeClr val="accent1"/>
-          </a:lnRef>
-          <a:fillRef idx="0">
-            <a:schemeClr val="accent1"/>
-          </a:fillRef>
-          <a:effectRef idx="1">
-            <a:schemeClr val="accent1"/>
-          </a:effectRef>
-          <a:fontRef idx="minor">
-            <a:schemeClr val="tx1"/>
-          </a:fontRef>
-        </p:style>
-      </p:cxnSp>
       <p:sp>
         <p:nvSpPr>
           <p:cNvPr id="9" name="TextBox 8"/>
@@ -14444,7 +13275,7 @@
         </p:nvSpPr>
         <p:spPr>
           <a:xfrm>
-            <a:off x="762000" y="2442633"/>
+            <a:off x="762000" y="2463800"/>
             <a:ext cx="1905000" cy="393700"/>
           </a:xfrm>
           <a:prstGeom prst="rect">
@@ -14458,19 +13289,39 @@
           </a:bodyPr>
           <a:lstStyle/>
           <a:p>
-            <a:pPr algn="l">
+            <a:pPr marL="0" marR="0" lvl="0" indent="0" algn="l" defTabSz="914400" rtl="0" eaLnBrk="1" fontAlgn="auto" latinLnBrk="0" hangingPunct="1">
               <a:lnSpc>
                 <a:spcPct val="130000"/>
               </a:lnSpc>
+              <a:spcBef>
+                <a:spcPts val="0"/>
+              </a:spcBef>
+              <a:spcAft>
+                <a:spcPts val="0"/>
+              </a:spcAft>
+              <a:buClrTx/>
+              <a:buSzTx/>
+              <a:buFontTx/>
+              <a:buNone/>
+              <a:tabLst/>
+              <a:defRPr/>
             </a:pPr>
             <a:r>
-              <a:rPr sz="1200" b="1" spc="75" dirty="0">
+              <a:rPr kumimoji="0" sz="1200" b="1" i="0" u="none" strike="noStrike" kern="1200" cap="none" spc="75" normalizeH="0" baseline="0" noProof="0" dirty="0">
+                <a:ln>
+                  <a:noFill/>
+                </a:ln>
                 <a:solidFill>
                   <a:srgbClr val="002060"/>
                 </a:solidFill>
+                <a:effectLst/>
+                <a:uLnTx/>
+                <a:uFillTx/>
                 <a:latin typeface="Cascadia Code SemiBold"/>
-              </a:rPr>
-              <a:t>SCHEDULER</a:t>
+                <a:ea typeface="+mn-ea"/>
+                <a:cs typeface="+mn-cs"/>
+              </a:rPr>
+              <a:t>LOSS VS. METRIC</a:t>
             </a:r>
           </a:p>
         </p:txBody>
@@ -14483,7 +13334,7 @@
         </p:nvSpPr>
         <p:spPr>
           <a:xfrm>
-            <a:off x="2794000" y="2404533"/>
+            <a:off x="2794000" y="2425700"/>
             <a:ext cx="8585200" cy="927100"/>
           </a:xfrm>
           <a:prstGeom prst="rect">
@@ -14497,210 +13348,391 @@
           </a:bodyPr>
           <a:lstStyle/>
           <a:p>
-            <a:pPr algn="l">
+            <a:pPr marL="0" marR="0" lvl="0" indent="0" algn="l" defTabSz="914400" rtl="0" eaLnBrk="1" fontAlgn="auto" latinLnBrk="0" hangingPunct="1">
               <a:lnSpc>
                 <a:spcPct val="145000"/>
               </a:lnSpc>
+              <a:spcBef>
+                <a:spcPts val="0"/>
+              </a:spcBef>
+              <a:spcAft>
+                <a:spcPts val="0"/>
+              </a:spcAft>
+              <a:buClrTx/>
+              <a:buSzTx/>
+              <a:buFontTx/>
+              <a:buNone/>
+              <a:tabLst/>
+              <a:defRPr/>
             </a:pPr>
             <a:r>
-              <a:rPr lang="en-US" sz="1400" b="1" dirty="0">
-                <a:solidFill>
-                  <a:srgbClr val="121417"/>
-                </a:solidFill>
+              <a:rPr kumimoji="0" lang="en-US" sz="1400" b="0" i="0" u="none" strike="noStrike" kern="1200" cap="none" spc="0" normalizeH="0" baseline="0" noProof="0" dirty="0">
+                <a:ln>
+                  <a:noFill/>
+                </a:ln>
+                <a:solidFill>
+                  <a:srgbClr val="121417"/>
+                </a:solidFill>
+                <a:effectLst/>
+                <a:uLnTx/>
+                <a:uFillTx/>
+                <a:latin typeface="Cascadia Code SemiLight"/>
+                <a:ea typeface="+mn-ea"/>
+                <a:cs typeface="+mn-cs"/>
+              </a:rPr>
+              <a:t>Metric: </a:t>
+            </a:r>
+            <a:r>
+              <a:rPr kumimoji="0" lang="en-US" sz="1400" b="1" i="0" u="none" strike="noStrike" kern="1200" cap="none" spc="0" normalizeH="0" baseline="0" noProof="0" dirty="0">
+                <a:ln>
+                  <a:noFill/>
+                </a:ln>
+                <a:solidFill>
+                  <a:srgbClr val="121417"/>
+                </a:solidFill>
+                <a:effectLst/>
+                <a:uLnTx/>
+                <a:uFillTx/>
                 <a:latin typeface="Cascadia Code SemiBold"/>
-              </a:rPr>
-              <a:t>ReduceLROnPlateau</a:t>
-            </a:r>
-            <a:r>
-              <a:rPr lang="en-US" sz="1400" b="0" dirty="0">
-                <a:solidFill>
-                  <a:srgbClr val="121417"/>
-                </a:solidFill>
+                <a:ea typeface="+mn-ea"/>
+                <a:cs typeface="+mn-cs"/>
+              </a:rPr>
+              <a:t>masked RMSE</a:t>
+            </a:r>
+            <a:r>
+              <a:rPr kumimoji="0" lang="en-US" sz="1400" b="0" i="0" u="none" strike="noStrike" kern="1200" cap="none" spc="0" normalizeH="0" baseline="0" noProof="0" dirty="0">
+                <a:ln>
+                  <a:noFill/>
+                </a:ln>
+                <a:solidFill>
+                  <a:srgbClr val="121417"/>
+                </a:solidFill>
+                <a:effectLst/>
+                <a:uLnTx/>
+                <a:uFillTx/>
                 <a:latin typeface="Cascadia Code SemiLight"/>
-              </a:rPr>
-              <a:t> on the </a:t>
-            </a:r>
-            <a:r>
-              <a:rPr lang="en-US" sz="1400" b="1" dirty="0">
-                <a:solidFill>
-                  <a:srgbClr val="121417"/>
-                </a:solidFill>
+                <a:ea typeface="+mn-ea"/>
+                <a:cs typeface="+mn-cs"/>
+              </a:rPr>
+              <a:t> in yards. </a:t>
+            </a:r>
+            <a:r>
+              <a:rPr kumimoji="0" lang="en-US" sz="1400" b="0" i="0" u="none" strike="noStrike" kern="1200" cap="none" spc="0" normalizeH="0" baseline="0" noProof="0" dirty="0">
+                <a:ln>
+                  <a:noFill/>
+                </a:ln>
+                <a:solidFill>
+                  <a:srgbClr val="121417"/>
+                </a:solidFill>
+                <a:effectLst/>
+                <a:uLnTx/>
+                <a:uFillTx/>
+                <a:latin typeface="Cascadia Code SemiLight" panose="020B0609020000020004" pitchFamily="49" charset="0"/>
+                <a:cs typeface="Cascadia Code SemiLight" panose="020B0609020000020004" pitchFamily="49" charset="0"/>
+              </a:rPr>
+              <a:t>A </a:t>
+            </a:r>
+            <a:r>
+              <a:rPr kumimoji="0" lang="en-US" sz="1400" b="0" i="0" u="none" strike="noStrike" kern="1200" cap="none" spc="0" normalizeH="0" baseline="0" noProof="0" dirty="0">
+                <a:ln>
+                  <a:noFill/>
+                </a:ln>
+                <a:solidFill>
+                  <a:srgbClr val="121417"/>
+                </a:solidFill>
+                <a:effectLst/>
+                <a:uLnTx/>
+                <a:uFillTx/>
+                <a:latin typeface="Cascadia Code SemiBold" panose="020B0609020000020004" pitchFamily="49" charset="0"/>
+                <a:cs typeface="Cascadia Code SemiBold" panose="020B0609020000020004" pitchFamily="49" charset="0"/>
+              </a:rPr>
+              <a:t>composite loss </a:t>
+            </a:r>
+            <a:r>
+              <a:rPr kumimoji="0" lang="en-US" sz="1400" b="0" i="0" u="none" strike="noStrike" kern="1200" cap="none" spc="0" normalizeH="0" baseline="0" noProof="0" dirty="0">
+                <a:ln>
+                  <a:noFill/>
+                </a:ln>
+                <a:solidFill>
+                  <a:srgbClr val="121417"/>
+                </a:solidFill>
+                <a:effectLst/>
+                <a:uLnTx/>
+                <a:uFillTx/>
+                <a:latin typeface="Cascadia Code SemiLight" panose="020B0609020000020004" pitchFamily="49" charset="0"/>
+                <a:cs typeface="Cascadia Code SemiLight" panose="020B0609020000020004" pitchFamily="49" charset="0"/>
+              </a:rPr>
+              <a:t>with contributions from </a:t>
+            </a:r>
+            <a:r>
+              <a:rPr kumimoji="0" lang="en-US" sz="1400" b="0" i="0" u="none" strike="noStrike" kern="1200" cap="none" spc="0" normalizeH="0" baseline="0" noProof="0" dirty="0">
+                <a:ln>
+                  <a:noFill/>
+                </a:ln>
+                <a:solidFill>
+                  <a:srgbClr val="121417"/>
+                </a:solidFill>
+                <a:effectLst/>
+                <a:uLnTx/>
+                <a:uFillTx/>
+                <a:latin typeface="Cascadia Code SemiBold" panose="020B0609020000020004" pitchFamily="49" charset="0"/>
+                <a:cs typeface="Cascadia Code SemiBold" panose="020B0609020000020004" pitchFamily="49" charset="0"/>
+              </a:rPr>
+              <a:t>RMSE</a:t>
+            </a:r>
+            <a:r>
+              <a:rPr kumimoji="0" lang="en-US" sz="1400" b="0" i="0" u="none" strike="noStrike" kern="1200" cap="none" spc="0" normalizeH="0" baseline="0" noProof="0" dirty="0">
+                <a:ln>
+                  <a:noFill/>
+                </a:ln>
+                <a:solidFill>
+                  <a:srgbClr val="121417"/>
+                </a:solidFill>
+                <a:effectLst/>
+                <a:uLnTx/>
+                <a:uFillTx/>
+                <a:latin typeface="Cascadia Code SemiLight"/>
+                <a:ea typeface="+mn-ea"/>
+                <a:cs typeface="+mn-cs"/>
+              </a:rPr>
+              <a:t> + </a:t>
+            </a:r>
+            <a:r>
+              <a:rPr kumimoji="0" lang="en-US" sz="1400" b="0" i="0" u="none" strike="noStrike" kern="1200" cap="none" spc="0" normalizeH="0" baseline="0" noProof="0" dirty="0">
+                <a:ln>
+                  <a:noFill/>
+                </a:ln>
+                <a:solidFill>
+                  <a:srgbClr val="121417"/>
+                </a:solidFill>
+                <a:effectLst/>
+                <a:uLnTx/>
+                <a:uFillTx/>
+                <a:latin typeface="Cascadia Code SemiBold" panose="020B0609020000020004" pitchFamily="49" charset="0"/>
+                <a:cs typeface="Cascadia Code SemiBold" panose="020B0609020000020004" pitchFamily="49" charset="0"/>
+              </a:rPr>
+              <a:t>FDE </a:t>
+            </a:r>
+            <a:r>
+              <a:rPr lang="en-US" sz="1400" dirty="0">
+                <a:solidFill>
+                  <a:srgbClr val="121417"/>
+                </a:solidFill>
+                <a:latin typeface="Cascadia Code SemiLight"/>
+              </a:rPr>
+              <a:t>(</a:t>
+            </a:r>
+            <a:r>
+              <a:rPr kumimoji="0" lang="en-US" sz="1400" b="0" i="0" u="none" strike="noStrike" kern="1200" cap="none" spc="0" normalizeH="0" baseline="0" noProof="0" dirty="0">
+                <a:ln>
+                  <a:noFill/>
+                </a:ln>
+                <a:solidFill>
+                  <a:srgbClr val="121417"/>
+                </a:solidFill>
+                <a:effectLst/>
+                <a:uLnTx/>
+                <a:uFillTx/>
+                <a:latin typeface="Cascadia Code SemiBold" panose="020B0609020000020004" pitchFamily="49" charset="0"/>
+                <a:cs typeface="Cascadia Code SemiBold" panose="020B0609020000020004" pitchFamily="49" charset="0"/>
+              </a:rPr>
+              <a:t>F</a:t>
+            </a:r>
+            <a:r>
+              <a:rPr kumimoji="0" lang="en-US" sz="1400" b="0" i="0" u="none" strike="noStrike" kern="1200" cap="none" spc="0" normalizeH="0" baseline="0" noProof="0" dirty="0">
+                <a:ln>
+                  <a:noFill/>
+                </a:ln>
+                <a:solidFill>
+                  <a:srgbClr val="121417"/>
+                </a:solidFill>
+                <a:effectLst/>
+                <a:uLnTx/>
+                <a:uFillTx/>
+                <a:latin typeface="Cascadia Code SemiLight"/>
+                <a:ea typeface="+mn-ea"/>
+                <a:cs typeface="+mn-cs"/>
+              </a:rPr>
+              <a:t>inal </a:t>
+            </a:r>
+            <a:r>
+              <a:rPr kumimoji="0" lang="en-US" sz="1400" b="0" i="0" u="none" strike="noStrike" kern="1200" cap="none" spc="0" normalizeH="0" baseline="0" noProof="0" dirty="0">
+                <a:ln>
+                  <a:noFill/>
+                </a:ln>
+                <a:solidFill>
+                  <a:srgbClr val="121417"/>
+                </a:solidFill>
+                <a:effectLst/>
+                <a:uLnTx/>
+                <a:uFillTx/>
+                <a:latin typeface="Cascadia Code SemiBold" panose="020B0609020000020004" pitchFamily="49" charset="0"/>
+                <a:cs typeface="Cascadia Code SemiBold" panose="020B0609020000020004" pitchFamily="49" charset="0"/>
+              </a:rPr>
+              <a:t>D</a:t>
+            </a:r>
+            <a:r>
+              <a:rPr kumimoji="0" lang="en-US" sz="1400" b="0" i="0" u="none" strike="noStrike" kern="1200" cap="none" spc="0" normalizeH="0" baseline="0" noProof="0" dirty="0">
+                <a:ln>
+                  <a:noFill/>
+                </a:ln>
+                <a:solidFill>
+                  <a:srgbClr val="121417"/>
+                </a:solidFill>
+                <a:effectLst/>
+                <a:uLnTx/>
+                <a:uFillTx/>
+                <a:latin typeface="Cascadia Code SemiLight"/>
+                <a:ea typeface="+mn-ea"/>
+                <a:cs typeface="+mn-cs"/>
+              </a:rPr>
+              <a:t>isplacement </a:t>
+            </a:r>
+            <a:r>
+              <a:rPr kumimoji="0" lang="en-US" sz="1400" b="0" i="0" u="none" strike="noStrike" kern="1200" cap="none" spc="0" normalizeH="0" baseline="0" noProof="0" dirty="0">
+                <a:ln>
+                  <a:noFill/>
+                </a:ln>
+                <a:solidFill>
+                  <a:srgbClr val="121417"/>
+                </a:solidFill>
+                <a:effectLst/>
+                <a:uLnTx/>
+                <a:uFillTx/>
+                <a:latin typeface="Cascadia Code SemiBold" panose="020B0609020000020004" pitchFamily="49" charset="0"/>
+                <a:cs typeface="Cascadia Code SemiBold" panose="020B0609020000020004" pitchFamily="49" charset="0"/>
+              </a:rPr>
+              <a:t>E</a:t>
+            </a:r>
+            <a:r>
+              <a:rPr kumimoji="0" lang="en-US" sz="1400" b="0" i="0" u="none" strike="noStrike" kern="1200" cap="none" spc="0" normalizeH="0" baseline="0" noProof="0" dirty="0">
+                <a:ln>
+                  <a:noFill/>
+                </a:ln>
+                <a:solidFill>
+                  <a:srgbClr val="121417"/>
+                </a:solidFill>
+                <a:effectLst/>
+                <a:uLnTx/>
+                <a:uFillTx/>
+                <a:latin typeface="Cascadia Code SemiLight"/>
+                <a:ea typeface="+mn-ea"/>
+                <a:cs typeface="+mn-cs"/>
+              </a:rPr>
+              <a:t>rror</a:t>
+            </a:r>
+            <a:r>
+              <a:rPr lang="en-US" sz="1400" dirty="0">
+                <a:solidFill>
+                  <a:srgbClr val="121417"/>
+                </a:solidFill>
+                <a:latin typeface="Cascadia Code SemiLight"/>
+              </a:rPr>
+              <a:t>,</a:t>
+            </a:r>
+            <a:r>
+              <a:rPr kumimoji="0" lang="en-US" sz="1400" b="0" i="0" u="none" strike="noStrike" kern="1200" cap="none" spc="0" normalizeH="0" baseline="0" noProof="0" dirty="0">
+                <a:ln>
+                  <a:noFill/>
+                </a:ln>
+                <a:solidFill>
+                  <a:srgbClr val="121417"/>
+                </a:solidFill>
+                <a:effectLst/>
+                <a:uLnTx/>
+                <a:uFillTx/>
+                <a:latin typeface="Cascadia Code SemiLight"/>
+                <a:ea typeface="+mn-ea"/>
+                <a:cs typeface="+mn-cs"/>
+              </a:rPr>
+              <a:t> </a:t>
+            </a:r>
+            <a:r>
+              <a:rPr kumimoji="0" lang="en-US" sz="1400" b="0" i="0" u="none" strike="noStrike" kern="1200" cap="none" spc="0" normalizeH="0" baseline="0" noProof="0" dirty="0">
+                <a:ln>
+                  <a:noFill/>
+                </a:ln>
+                <a:solidFill>
+                  <a:srgbClr val="121417"/>
+                </a:solidFill>
+                <a:effectLst/>
+                <a:uLnTx/>
+                <a:uFillTx/>
+                <a:latin typeface="Cascadia Code SemiBold" panose="020B0609020000020004" pitchFamily="49" charset="0"/>
+                <a:cs typeface="Cascadia Code SemiBold" panose="020B0609020000020004" pitchFamily="49" charset="0"/>
+              </a:rPr>
+              <a:t>last valid frame</a:t>
+            </a:r>
+            <a:r>
+              <a:rPr kumimoji="0" lang="en-US" sz="1400" b="0" i="0" u="none" strike="noStrike" kern="1200" cap="none" spc="0" normalizeH="0" baseline="0" noProof="0" dirty="0">
+                <a:ln>
+                  <a:noFill/>
+                </a:ln>
+                <a:solidFill>
+                  <a:srgbClr val="121417"/>
+                </a:solidFill>
+                <a:effectLst/>
+                <a:uLnTx/>
+                <a:uFillTx/>
+                <a:latin typeface="Cascadia Code SemiLight"/>
+                <a:ea typeface="+mn-ea"/>
+                <a:cs typeface="+mn-cs"/>
+              </a:rPr>
+              <a:t>) + </a:t>
+            </a:r>
+            <a:r>
+              <a:rPr kumimoji="0" lang="en-US" sz="1400" b="1" i="0" u="none" strike="noStrike" kern="1200" cap="none" spc="0" normalizeH="0" baseline="0" noProof="0" dirty="0">
+                <a:ln>
+                  <a:noFill/>
+                </a:ln>
+                <a:solidFill>
+                  <a:srgbClr val="121417"/>
+                </a:solidFill>
+                <a:effectLst/>
+                <a:uLnTx/>
+                <a:uFillTx/>
                 <a:latin typeface="Cascadia Code SemiBold"/>
-              </a:rPr>
-              <a:t>validation loss</a:t>
-            </a:r>
-            <a:r>
-              <a:rPr lang="en-US" sz="1400" b="0" dirty="0">
-                <a:solidFill>
-                  <a:srgbClr val="121417"/>
-                </a:solidFill>
+                <a:ea typeface="+mn-ea"/>
+                <a:cs typeface="+mn-cs"/>
+              </a:rPr>
+              <a:t>jerk</a:t>
+            </a:r>
+            <a:r>
+              <a:rPr kumimoji="0" lang="en-US" sz="1400" b="0" i="0" u="none" strike="noStrike" kern="1200" cap="none" spc="0" normalizeH="0" baseline="0" noProof="0" dirty="0">
+                <a:ln>
+                  <a:noFill/>
+                </a:ln>
+                <a:solidFill>
+                  <a:srgbClr val="121417"/>
+                </a:solidFill>
+                <a:effectLst/>
+                <a:uLnTx/>
+                <a:uFillTx/>
                 <a:latin typeface="Cascadia Code SemiLight"/>
-              </a:rPr>
-              <a:t>: the LR is multiplied by </a:t>
-            </a:r>
-            <a:r>
-              <a:rPr lang="en-US" sz="1400" b="1" dirty="0">
-                <a:solidFill>
-                  <a:srgbClr val="121417"/>
-                </a:solidFill>
-                <a:latin typeface="Cascadia Code SemiBold"/>
-              </a:rPr>
-              <a:t>0.5</a:t>
-            </a:r>
-            <a:r>
-              <a:rPr lang="en-US" sz="1400" b="0" dirty="0">
-                <a:solidFill>
-                  <a:srgbClr val="121417"/>
-                </a:solidFill>
-                <a:latin typeface="Cascadia Code SemiLight"/>
-              </a:rPr>
-              <a:t> after </a:t>
-            </a:r>
-            <a:r>
-              <a:rPr lang="en-US" sz="1400" b="1" dirty="0">
-                <a:solidFill>
-                  <a:srgbClr val="121417"/>
-                </a:solidFill>
-                <a:latin typeface="Cascadia Code SemiBold"/>
-              </a:rPr>
-              <a:t>6 epochs</a:t>
-            </a:r>
-            <a:r>
-              <a:rPr lang="en-US" sz="1400" b="0" dirty="0">
-                <a:solidFill>
-                  <a:srgbClr val="121417"/>
-                </a:solidFill>
-                <a:latin typeface="Cascadia Code SemiLight"/>
-              </a:rPr>
-              <a:t> without a </a:t>
-            </a:r>
-            <a:r>
-              <a:rPr lang="en-US" sz="1400" b="1" dirty="0">
-                <a:solidFill>
-                  <a:srgbClr val="121417"/>
-                </a:solidFill>
-                <a:latin typeface="Cascadia Code SemiBold"/>
-              </a:rPr>
-              <a:t>1% relative improvement</a:t>
-            </a:r>
-            <a:r>
-              <a:rPr lang="en-US" sz="1400" b="0" dirty="0">
-                <a:solidFill>
-                  <a:srgbClr val="121417"/>
-                </a:solidFill>
-                <a:latin typeface="Cascadia Code SemiLight"/>
-              </a:rPr>
-              <a:t>, then a </a:t>
-            </a:r>
-            <a:r>
-              <a:rPr lang="en-US" sz="1400" b="1" dirty="0">
-                <a:solidFill>
-                  <a:srgbClr val="121417"/>
-                </a:solidFill>
-                <a:latin typeface="Cascadia Code SemiBold"/>
-              </a:rPr>
-              <a:t>1-epoch cooldown</a:t>
-            </a:r>
-            <a:r>
-              <a:rPr lang="en-US" sz="1400" b="0" dirty="0">
-                <a:solidFill>
-                  <a:srgbClr val="121417"/>
-                </a:solidFill>
-                <a:latin typeface="Cascadia Code SemiLight"/>
-              </a:rPr>
-              <a:t>, down to </a:t>
-            </a:r>
-            <a:r>
-              <a:rPr lang="en-US" sz="1400" b="1" dirty="0">
-                <a:solidFill>
-                  <a:srgbClr val="121417"/>
-                </a:solidFill>
-                <a:latin typeface="Cascadia Code SemiBold"/>
-              </a:rPr>
-              <a:t>1e-7</a:t>
-            </a:r>
-            <a:r>
-              <a:rPr lang="en-US" sz="1400" b="0" dirty="0">
-                <a:solidFill>
-                  <a:srgbClr val="121417"/>
-                </a:solidFill>
-                <a:latin typeface="Cascadia Code SemiLight"/>
-              </a:rPr>
-              <a:t>; the final model halved it </a:t>
-            </a:r>
-            <a:r>
-              <a:rPr lang="en-US" sz="1400" b="1" dirty="0">
-                <a:solidFill>
-                  <a:srgbClr val="121417"/>
-                </a:solidFill>
-                <a:latin typeface="Cascadia Code SemiBold"/>
-              </a:rPr>
-              <a:t>9 times</a:t>
-            </a:r>
-            <a:r>
-              <a:rPr lang="en-US" sz="1400" b="0" dirty="0">
-                <a:solidFill>
-                  <a:srgbClr val="121417"/>
-                </a:solidFill>
-                <a:latin typeface="Cascadia Code SemiLight"/>
-              </a:rPr>
-              <a:t>, from </a:t>
-            </a:r>
-            <a:r>
-              <a:rPr lang="en-US" sz="1400" b="1" dirty="0">
-                <a:solidFill>
-                  <a:srgbClr val="121417"/>
-                </a:solidFill>
-                <a:latin typeface="Cascadia Code SemiBold"/>
-              </a:rPr>
-              <a:t>2e-3 to 3.9e-6</a:t>
-            </a:r>
-            <a:endParaRPr lang="en-US" sz="1400" b="0" dirty="0">
-              <a:solidFill>
-                <a:srgbClr val="121417"/>
-              </a:solidFill>
-              <a:latin typeface="Cascadia Code SemiLight"/>
-            </a:endParaRPr>
+                <a:ea typeface="+mn-ea"/>
+                <a:cs typeface="+mn-cs"/>
+              </a:rPr>
+              <a:t>, which offsets the one-shot decoder's </a:t>
+            </a:r>
+            <a:r>
+              <a:rPr kumimoji="0" lang="en-US" sz="1400" b="0" i="0" u="none" strike="noStrike" kern="1200" cap="none" spc="0" normalizeH="0" baseline="0" noProof="0" dirty="0">
+                <a:ln>
+                  <a:noFill/>
+                </a:ln>
+                <a:solidFill>
+                  <a:srgbClr val="121417"/>
+                </a:solidFill>
+                <a:effectLst/>
+                <a:uLnTx/>
+                <a:uFillTx/>
+                <a:latin typeface="Cascadia Code SemiBold" panose="020B0609020000020004" pitchFamily="49" charset="0"/>
+                <a:cs typeface="Cascadia Code SemiBold" panose="020B0609020000020004" pitchFamily="49" charset="0"/>
+              </a:rPr>
+              <a:t>lack of continuity</a:t>
+            </a:r>
           </a:p>
         </p:txBody>
       </p:sp>
-      <p:cxnSp>
-        <p:nvCxnSpPr>
-          <p:cNvPr id="11" name="Connector 10"/>
-          <p:cNvCxnSpPr/>
-          <p:nvPr/>
-        </p:nvCxnSpPr>
-        <p:spPr>
-          <a:xfrm>
-            <a:off x="812800" y="3460750"/>
-            <a:ext cx="10566400" cy="0"/>
-          </a:xfrm>
-          <a:prstGeom prst="line">
-            <a:avLst/>
-          </a:prstGeom>
-          <a:ln w="6350">
-            <a:solidFill>
-              <a:srgbClr val="FFFFFF">
-                <a:alpha val="12000"/>
-              </a:srgbClr>
-            </a:solidFill>
-          </a:ln>
-        </p:spPr>
-        <p:style>
-          <a:lnRef idx="2">
-            <a:schemeClr val="accent1"/>
-          </a:lnRef>
-          <a:fillRef idx="0">
-            <a:schemeClr val="accent1"/>
-          </a:fillRef>
-          <a:effectRef idx="1">
-            <a:schemeClr val="accent1"/>
-          </a:effectRef>
-          <a:fontRef idx="minor">
-            <a:schemeClr val="tx1"/>
-          </a:fontRef>
-        </p:style>
-      </p:cxnSp>
       <p:sp>
         <p:nvSpPr>
           <p:cNvPr id="12" name="TextBox 11"/>
@@ -14709,7 +13741,7 @@
         </p:nvSpPr>
         <p:spPr>
           <a:xfrm>
-            <a:off x="762000" y="3627967"/>
+            <a:off x="762000" y="5969000"/>
             <a:ext cx="1905000" cy="393700"/>
           </a:xfrm>
           <a:prstGeom prst="rect">
@@ -14723,19 +13755,39 @@
           </a:bodyPr>
           <a:lstStyle/>
           <a:p>
-            <a:pPr algn="l">
+            <a:pPr marL="0" marR="0" lvl="0" indent="0" algn="l" defTabSz="914400" rtl="0" eaLnBrk="1" fontAlgn="auto" latinLnBrk="0" hangingPunct="1">
               <a:lnSpc>
                 <a:spcPct val="130000"/>
               </a:lnSpc>
+              <a:spcBef>
+                <a:spcPts val="0"/>
+              </a:spcBef>
+              <a:spcAft>
+                <a:spcPts val="0"/>
+              </a:spcAft>
+              <a:buClrTx/>
+              <a:buSzTx/>
+              <a:buFontTx/>
+              <a:buNone/>
+              <a:tabLst/>
+              <a:defRPr/>
             </a:pPr>
             <a:r>
-              <a:rPr sz="1200" b="1" spc="75" dirty="0">
+              <a:rPr kumimoji="0" sz="1200" b="1" i="0" u="none" strike="noStrike" kern="1200" cap="none" spc="75" normalizeH="0" baseline="0" noProof="0">
+                <a:ln>
+                  <a:noFill/>
+                </a:ln>
                 <a:solidFill>
                   <a:srgbClr val="FF0000"/>
                 </a:solidFill>
+                <a:effectLst/>
+                <a:uLnTx/>
+                <a:uFillTx/>
                 <a:latin typeface="Cascadia Code SemiBold"/>
-              </a:rPr>
-              <a:t>EARLY STOPPING AND CHECKPOINT</a:t>
+                <a:ea typeface="+mn-ea"/>
+                <a:cs typeface="+mn-cs"/>
+              </a:rPr>
+              <a:t>STARTING POINT</a:t>
             </a:r>
           </a:p>
         </p:txBody>
@@ -14748,8 +13800,8 @@
         </p:nvSpPr>
         <p:spPr>
           <a:xfrm>
-            <a:off x="2794000" y="3589867"/>
-            <a:ext cx="8585200" cy="927100"/>
+            <a:off x="2794000" y="5930900"/>
+            <a:ext cx="8585200" cy="622300"/>
           </a:xfrm>
           <a:prstGeom prst="rect">
             <a:avLst/>
@@ -14762,134 +13814,227 @@
           </a:bodyPr>
           <a:lstStyle/>
           <a:p>
-            <a:pPr algn="l">
+            <a:pPr marL="0" marR="0" lvl="0" indent="0" algn="l" defTabSz="914400" rtl="0" eaLnBrk="1" fontAlgn="auto" latinLnBrk="0" hangingPunct="1">
               <a:lnSpc>
                 <a:spcPct val="145000"/>
               </a:lnSpc>
+              <a:spcBef>
+                <a:spcPts val="0"/>
+              </a:spcBef>
+              <a:spcAft>
+                <a:spcPts val="0"/>
+              </a:spcAft>
+              <a:buClrTx/>
+              <a:buSzTx/>
+              <a:buFontTx/>
+              <a:buNone/>
+              <a:tabLst/>
+              <a:defRPr/>
             </a:pPr>
             <a:r>
-              <a:rPr lang="en-US" sz="1400" b="1" dirty="0">
-                <a:solidFill>
-                  <a:srgbClr val="121417"/>
-                </a:solidFill>
+              <a:rPr kumimoji="0" lang="en-US" sz="1400" b="1" i="0" u="none" strike="noStrike" kern="1200" cap="none" spc="0" normalizeH="0" baseline="0" noProof="0" dirty="0">
+                <a:ln>
+                  <a:noFill/>
+                </a:ln>
+                <a:solidFill>
+                  <a:srgbClr val="121417"/>
+                </a:solidFill>
+                <a:effectLst/>
+                <a:uLnTx/>
+                <a:uFillTx/>
                 <a:latin typeface="Cascadia Code SemiBold"/>
-              </a:rPr>
-              <a:t>Early stopping</a:t>
-            </a:r>
-            <a:r>
-              <a:rPr lang="en-US" sz="1400" b="0" dirty="0">
-                <a:solidFill>
-                  <a:srgbClr val="121417"/>
-                </a:solidFill>
+                <a:ea typeface="+mn-ea"/>
+                <a:cs typeface="+mn-cs"/>
+              </a:rPr>
+              <a:t>Batch size 8</a:t>
+            </a:r>
+            <a:r>
+              <a:rPr kumimoji="0" lang="en-US" sz="1400" b="0" i="0" u="none" strike="noStrike" kern="1200" cap="none" spc="0" normalizeH="0" baseline="0" noProof="0" dirty="0">
+                <a:ln>
+                  <a:noFill/>
+                </a:ln>
+                <a:solidFill>
+                  <a:srgbClr val="121417"/>
+                </a:solidFill>
+                <a:effectLst/>
+                <a:uLnTx/>
+                <a:uFillTx/>
                 <a:latin typeface="Cascadia Code SemiLight"/>
-              </a:rPr>
-              <a:t> uses </a:t>
-            </a:r>
-            <a:r>
-              <a:rPr lang="en-US" sz="1400" b="1" dirty="0">
-                <a:solidFill>
-                  <a:srgbClr val="121417"/>
-                </a:solidFill>
+                <a:ea typeface="+mn-ea"/>
+                <a:cs typeface="+mn-cs"/>
+              </a:rPr>
+              <a:t>, </a:t>
+            </a:r>
+            <a:r>
+              <a:rPr kumimoji="0" lang="en-US" sz="1400" b="1" i="0" u="none" strike="noStrike" kern="1200" cap="none" spc="0" normalizeH="0" baseline="0" noProof="0" dirty="0">
+                <a:ln>
+                  <a:noFill/>
+                </a:ln>
+                <a:solidFill>
+                  <a:srgbClr val="121417"/>
+                </a:solidFill>
+                <a:effectLst/>
+                <a:uLnTx/>
+                <a:uFillTx/>
                 <a:latin typeface="Cascadia Code SemiBold"/>
-              </a:rPr>
-              <a:t>patience 20</a:t>
-            </a:r>
-            <a:r>
-              <a:rPr lang="en-US" sz="1400" b="0" dirty="0">
-                <a:solidFill>
-                  <a:srgbClr val="121417"/>
-                </a:solidFill>
+                <a:ea typeface="+mn-ea"/>
+                <a:cs typeface="+mn-cs"/>
+              </a:rPr>
+              <a:t>hidden_dim 64</a:t>
+            </a:r>
+            <a:r>
+              <a:rPr kumimoji="0" lang="en-US" sz="1400" b="0" i="0" u="none" strike="noStrike" kern="1200" cap="none" spc="0" normalizeH="0" baseline="0" noProof="0" dirty="0">
+                <a:ln>
+                  <a:noFill/>
+                </a:ln>
+                <a:solidFill>
+                  <a:srgbClr val="121417"/>
+                </a:solidFill>
+                <a:effectLst/>
+                <a:uLnTx/>
+                <a:uFillTx/>
                 <a:latin typeface="Cascadia Code SemiLight"/>
-              </a:rPr>
-              <a:t> (&gt; 6), so the LR drops first and it </a:t>
-            </a:r>
-            <a:r>
-              <a:rPr lang="en-US" sz="1400" b="1" dirty="0">
-                <a:solidFill>
-                  <a:srgbClr val="121417"/>
-                </a:solidFill>
+                <a:ea typeface="+mn-ea"/>
+                <a:cs typeface="+mn-cs"/>
+              </a:rPr>
+              <a:t>, </a:t>
+            </a:r>
+            <a:r>
+              <a:rPr kumimoji="0" lang="en-US" sz="1400" b="1" i="0" u="none" strike="noStrike" kern="1200" cap="none" spc="0" normalizeH="0" baseline="0" noProof="0" dirty="0">
+                <a:ln>
+                  <a:noFill/>
+                </a:ln>
+                <a:solidFill>
+                  <a:srgbClr val="121417"/>
+                </a:solidFill>
+                <a:effectLst/>
+                <a:uLnTx/>
+                <a:uFillTx/>
                 <a:latin typeface="Cascadia Code SemiBold"/>
-              </a:rPr>
-              <a:t>never fired</a:t>
-            </a:r>
-            <a:r>
-              <a:rPr lang="en-US" sz="1400" b="0" dirty="0">
-                <a:solidFill>
-                  <a:srgbClr val="121417"/>
-                </a:solidFill>
+                <a:ea typeface="+mn-ea"/>
+                <a:cs typeface="+mn-cs"/>
+              </a:rPr>
+              <a:t>no global features</a:t>
+            </a:r>
+            <a:r>
+              <a:rPr kumimoji="0" lang="en-US" sz="1400" b="0" i="0" u="none" strike="noStrike" kern="1200" cap="none" spc="0" normalizeH="0" baseline="0" noProof="0" dirty="0">
+                <a:ln>
+                  <a:noFill/>
+                </a:ln>
+                <a:solidFill>
+                  <a:srgbClr val="121417"/>
+                </a:solidFill>
+                <a:effectLst/>
+                <a:uLnTx/>
+                <a:uFillTx/>
                 <a:latin typeface="Cascadia Code SemiLight"/>
-              </a:rPr>
-              <a:t>: all 12 runs used the full </a:t>
-            </a:r>
-            <a:r>
-              <a:rPr lang="en-US" sz="1400" b="1" dirty="0">
-                <a:solidFill>
-                  <a:srgbClr val="121417"/>
-                </a:solidFill>
+                <a:ea typeface="+mn-ea"/>
+                <a:cs typeface="+mn-cs"/>
+              </a:rPr>
+              <a:t>, </a:t>
+            </a:r>
+            <a:r>
+              <a:rPr kumimoji="0" lang="en-US" sz="1400" b="1" i="0" u="none" strike="noStrike" kern="1200" cap="none" spc="0" normalizeH="0" baseline="0" noProof="0" dirty="0">
+                <a:ln>
+                  <a:noFill/>
+                </a:ln>
+                <a:solidFill>
+                  <a:srgbClr val="121417"/>
+                </a:solidFill>
+                <a:effectLst/>
+                <a:uLnTx/>
+                <a:uFillTx/>
                 <a:latin typeface="Cascadia Code SemiBold"/>
-              </a:rPr>
-              <a:t>100 epochs</a:t>
-            </a:r>
-            <a:r>
-              <a:rPr lang="en-US" sz="1400" b="0" dirty="0">
-                <a:solidFill>
-                  <a:srgbClr val="121417"/>
-                </a:solidFill>
+                <a:ea typeface="+mn-ea"/>
+                <a:cs typeface="+mn-cs"/>
+              </a:rPr>
+              <a:t>1 GAT layer</a:t>
+            </a:r>
+            <a:r>
+              <a:rPr kumimoji="0" lang="en-US" sz="1400" b="0" i="0" u="none" strike="noStrike" kern="1200" cap="none" spc="0" normalizeH="0" baseline="0" noProof="0" dirty="0">
+                <a:ln>
+                  <a:noFill/>
+                </a:ln>
+                <a:solidFill>
+                  <a:srgbClr val="121417"/>
+                </a:solidFill>
+                <a:effectLst/>
+                <a:uLnTx/>
+                <a:uFillTx/>
                 <a:latin typeface="Cascadia Code SemiLight"/>
-              </a:rPr>
-              <a:t>. Each validation improvement saves a </a:t>
-            </a:r>
-            <a:r>
-              <a:rPr lang="en-US" sz="1400" b="1" dirty="0">
-                <a:solidFill>
-                  <a:srgbClr val="121417"/>
-                </a:solidFill>
+                <a:ea typeface="+mn-ea"/>
+                <a:cs typeface="+mn-cs"/>
+              </a:rPr>
+              <a:t>, </a:t>
+            </a:r>
+            <a:r>
+              <a:rPr kumimoji="0" lang="en-US" sz="1400" b="1" i="0" u="none" strike="noStrike" kern="1200" cap="none" spc="0" normalizeH="0" baseline="0" noProof="0" dirty="0">
+                <a:ln>
+                  <a:noFill/>
+                </a:ln>
+                <a:solidFill>
+                  <a:srgbClr val="121417"/>
+                </a:solidFill>
+                <a:effectLst/>
+                <a:uLnTx/>
+                <a:uFillTx/>
                 <a:latin typeface="Cascadia Code SemiBold"/>
-              </a:rPr>
-              <a:t>checkpoint</a:t>
-            </a:r>
-            <a:r>
-              <a:rPr lang="en-US" sz="1400" b="0" dirty="0">
-                <a:solidFill>
-                  <a:srgbClr val="121417"/>
-                </a:solidFill>
+                <a:ea typeface="+mn-ea"/>
+                <a:cs typeface="+mn-cs"/>
+              </a:rPr>
+              <a:t>regressor width 256</a:t>
+            </a:r>
+            <a:r>
+              <a:rPr kumimoji="0" lang="en-US" sz="1400" b="0" i="0" u="none" strike="noStrike" kern="1200" cap="none" spc="0" normalizeH="0" baseline="0" noProof="0" dirty="0">
+                <a:ln>
+                  <a:noFill/>
+                </a:ln>
+                <a:solidFill>
+                  <a:srgbClr val="121417"/>
+                </a:solidFill>
+                <a:effectLst/>
+                <a:uLnTx/>
+                <a:uFillTx/>
                 <a:latin typeface="Cascadia Code SemiLight"/>
-              </a:rPr>
-              <a:t>; the test set is evaluated </a:t>
-            </a:r>
-            <a:r>
-              <a:rPr lang="en-US" sz="1400" b="1" dirty="0">
-                <a:solidFill>
-                  <a:srgbClr val="121417"/>
-                </a:solidFill>
+                <a:ea typeface="+mn-ea"/>
+                <a:cs typeface="+mn-cs"/>
+              </a:rPr>
+              <a:t> → </a:t>
+            </a:r>
+            <a:r>
+              <a:rPr kumimoji="0" lang="en-US" sz="1400" b="1" i="0" u="none" strike="noStrike" kern="1200" cap="none" spc="0" normalizeH="0" baseline="0" noProof="0" dirty="0">
+                <a:ln>
+                  <a:noFill/>
+                </a:ln>
+                <a:solidFill>
+                  <a:srgbClr val="121417"/>
+                </a:solidFill>
+                <a:effectLst/>
+                <a:uLnTx/>
+                <a:uFillTx/>
                 <a:latin typeface="Cascadia Code SemiBold"/>
-              </a:rPr>
-              <a:t>once</a:t>
-            </a:r>
-            <a:r>
-              <a:rPr lang="en-US" sz="1400" b="0" dirty="0">
-                <a:solidFill>
-                  <a:srgbClr val="121417"/>
-                </a:solidFill>
+                <a:ea typeface="+mn-ea"/>
+                <a:cs typeface="+mn-cs"/>
+              </a:rPr>
+              <a:t>test RMSE 1.032 yards</a:t>
+            </a:r>
+            <a:r>
+              <a:rPr kumimoji="0" lang="en-US" sz="1400" b="0" i="0" u="none" strike="noStrike" kern="1200" cap="none" spc="0" normalizeH="0" baseline="0" noProof="0" dirty="0">
+                <a:ln>
+                  <a:noFill/>
+                </a:ln>
+                <a:solidFill>
+                  <a:srgbClr val="121417"/>
+                </a:solidFill>
+                <a:effectLst/>
+                <a:uLnTx/>
+                <a:uFillTx/>
                 <a:latin typeface="Cascadia Code SemiLight"/>
-              </a:rPr>
-              <a:t>, on the </a:t>
-            </a:r>
-            <a:r>
-              <a:rPr lang="en-US" sz="1400" b="1" dirty="0">
-                <a:solidFill>
-                  <a:srgbClr val="121417"/>
-                </a:solidFill>
-                <a:latin typeface="Cascadia Code SemiBold"/>
-              </a:rPr>
-              <a:t>best checkpoint</a:t>
-            </a:r>
-            <a:endParaRPr lang="en-US" sz="1400" b="0" dirty="0">
-              <a:solidFill>
-                <a:srgbClr val="121417"/>
-              </a:solidFill>
-              <a:latin typeface="Cascadia Code SemiLight"/>
-            </a:endParaRPr>
+                <a:ea typeface="+mn-ea"/>
+                <a:cs typeface="+mn-cs"/>
+              </a:rPr>
+              <a:t> — the reference point the next chapter improves on</a:t>
+            </a:r>
           </a:p>
         </p:txBody>
       </p:sp>
@@ -14922,17 +14067,35 @@
           </a:bodyPr>
           <a:lstStyle/>
           <a:p>
-            <a:pPr marL="0" indent="0" algn="ctr">
+            <a:pPr marL="0" marR="0" lvl="0" indent="0" algn="ctr" defTabSz="914400" rtl="0" eaLnBrk="1" fontAlgn="auto" latinLnBrk="0" hangingPunct="1">
               <a:lnSpc>
                 <a:spcPts val="1440"/>
               </a:lnSpc>
+              <a:spcBef>
+                <a:spcPts val="0"/>
+              </a:spcBef>
+              <a:spcAft>
+                <a:spcPts val="0"/>
+              </a:spcAft>
+              <a:buClrTx/>
+              <a:buSzTx/>
+              <a:buFontTx/>
               <a:buNone/>
+              <a:tabLst/>
+              <a:defRPr/>
             </a:pPr>
-            <a:endParaRPr lang="en-US" sz="1200" dirty="0">
+            <a:endParaRPr kumimoji="0" lang="en-US" sz="1200" b="0" i="0" u="none" strike="noStrike" kern="1200" cap="none" spc="0" normalizeH="0" baseline="0" noProof="0" dirty="0">
+              <a:ln>
+                <a:noFill/>
+              </a:ln>
               <a:solidFill>
                 <a:srgbClr val="003268"/>
               </a:solidFill>
+              <a:effectLst/>
+              <a:uLnTx/>
+              <a:uFillTx/>
               <a:latin typeface="Cascadia Code SemiBold" panose="020B0609020000020004" pitchFamily="49" charset="0"/>
+              <a:ea typeface="+mn-ea"/>
               <a:cs typeface="Cascadia Code SemiBold" panose="020B0609020000020004" pitchFamily="49" charset="0"/>
             </a:endParaRPr>
           </a:p>
@@ -14967,28 +14130,52 @@
           </a:bodyPr>
           <a:lstStyle/>
           <a:p>
-            <a:pPr marL="0" indent="0" algn="ctr">
+            <a:pPr marL="0" marR="0" lvl="0" indent="0" algn="ctr" defTabSz="914400" rtl="0" eaLnBrk="1" fontAlgn="auto" latinLnBrk="0" hangingPunct="1">
               <a:lnSpc>
                 <a:spcPts val="1440"/>
               </a:lnSpc>
+              <a:spcBef>
+                <a:spcPts val="0"/>
+              </a:spcBef>
+              <a:spcAft>
+                <a:spcPts val="0"/>
+              </a:spcAft>
+              <a:buClrTx/>
+              <a:buSzTx/>
+              <a:buFontTx/>
               <a:buNone/>
+              <a:tabLst/>
+              <a:defRPr/>
             </a:pPr>
             <a:r>
-              <a:rPr lang="en-US" sz="1200" b="1" kern="0" spc="150" dirty="0">
+              <a:rPr kumimoji="0" lang="en-US" sz="1200" b="1" i="0" u="none" strike="noStrike" kern="0" cap="none" spc="150" normalizeH="0" baseline="0" noProof="0" dirty="0">
+                <a:ln>
+                  <a:noFill/>
+                </a:ln>
                 <a:solidFill>
                   <a:srgbClr val="003268"/>
                 </a:solidFill>
+                <a:effectLst/>
+                <a:uLnTx/>
+                <a:uFillTx/>
                 <a:latin typeface="Cascadia Code SemiBold" panose="020B0609020000020004" pitchFamily="49" charset="0"/>
                 <a:ea typeface="Arial" pitchFamily="34" charset="-122"/>
                 <a:cs typeface="Cascadia Code SemiBold" panose="020B0609020000020004" pitchFamily="49" charset="0"/>
               </a:rPr>
               <a:t>BIG DATA BOWL 2026</a:t>
             </a:r>
-            <a:endParaRPr lang="en-US" sz="1200" dirty="0">
+            <a:endParaRPr kumimoji="0" lang="en-US" sz="1200" b="0" i="0" u="none" strike="noStrike" kern="1200" cap="none" spc="0" normalizeH="0" baseline="0" noProof="0" dirty="0">
+              <a:ln>
+                <a:noFill/>
+              </a:ln>
               <a:solidFill>
                 <a:srgbClr val="003268"/>
               </a:solidFill>
+              <a:effectLst/>
+              <a:uLnTx/>
+              <a:uFillTx/>
               <a:latin typeface="Cascadia Code SemiBold" panose="020B0609020000020004" pitchFamily="49" charset="0"/>
+              <a:ea typeface="+mn-ea"/>
               <a:cs typeface="Cascadia Code SemiBold" panose="020B0609020000020004" pitchFamily="49" charset="0"/>
             </a:endParaRPr>
           </a:p>
@@ -15052,72 +14239,126 @@
           </a:bodyPr>
           <a:lstStyle/>
           <a:p>
-            <a:pPr>
+            <a:pPr marL="0" marR="0" lvl="0" indent="0" algn="l" defTabSz="914400" rtl="0" eaLnBrk="1" fontAlgn="auto" latinLnBrk="0" hangingPunct="1">
               <a:lnSpc>
                 <a:spcPts val="1365"/>
               </a:lnSpc>
+              <a:spcBef>
+                <a:spcPts val="0"/>
+              </a:spcBef>
+              <a:spcAft>
+                <a:spcPts val="0"/>
+              </a:spcAft>
+              <a:buClrTx/>
+              <a:buSzTx/>
+              <a:buFontTx/>
+              <a:buNone/>
+              <a:tabLst/>
+              <a:defRPr/>
             </a:pPr>
             <a:r>
-              <a:rPr lang="en-US" sz="1200" kern="0" spc="75" dirty="0">
+              <a:rPr kumimoji="0" lang="en-US" sz="1200" b="0" i="0" u="none" strike="noStrike" kern="0" cap="none" spc="75" normalizeH="0" baseline="0" noProof="0" dirty="0">
+                <a:ln>
+                  <a:noFill/>
+                </a:ln>
                 <a:solidFill>
                   <a:srgbClr val="003268"/>
                 </a:solidFill>
+                <a:effectLst/>
+                <a:uLnTx/>
+                <a:uFillTx/>
                 <a:latin typeface="Cascadia Code Light" panose="020B0609020000020004" pitchFamily="49" charset="0"/>
+                <a:ea typeface="+mn-ea"/>
                 <a:cs typeface="Cascadia Code Light" panose="020B0609020000020004" pitchFamily="49" charset="0"/>
               </a:rPr>
               <a:t> </a:t>
             </a:r>
             <a:r>
-              <a:rPr lang="en-US" sz="1200" kern="0" spc="75" dirty="0">
+              <a:rPr kumimoji="0" lang="en-US" sz="1200" b="0" i="0" u="none" strike="noStrike" kern="0" cap="none" spc="75" normalizeH="0" baseline="0" noProof="0" dirty="0">
+                <a:ln>
+                  <a:noFill/>
+                </a:ln>
                 <a:solidFill>
                   <a:srgbClr val="003268">
                     <a:alpha val="50000"/>
                   </a:srgbClr>
                 </a:solidFill>
+                <a:effectLst/>
+                <a:uLnTx/>
+                <a:uFillTx/>
                 <a:latin typeface="Cascadia Code ExtraLight" panose="020B0609020000020004" pitchFamily="49" charset="0"/>
+                <a:ea typeface="+mn-ea"/>
                 <a:cs typeface="Cascadia Code ExtraLight" panose="020B0609020000020004" pitchFamily="49" charset="0"/>
               </a:rPr>
               <a:t>-</a:t>
             </a:r>
             <a:r>
-              <a:rPr lang="en-US" sz="1200" kern="0" spc="75" dirty="0">
+              <a:rPr kumimoji="0" lang="en-US" sz="1200" b="0" i="0" u="none" strike="noStrike" kern="0" cap="none" spc="75" normalizeH="0" baseline="0" noProof="0" dirty="0">
+                <a:ln>
+                  <a:noFill/>
+                </a:ln>
                 <a:solidFill>
                   <a:srgbClr val="003268">
                     <a:alpha val="50000"/>
                   </a:srgbClr>
                 </a:solidFill>
+                <a:effectLst/>
+                <a:uLnTx/>
+                <a:uFillTx/>
                 <a:latin typeface="Cascadia Code Light" panose="020B0609020000020004" pitchFamily="49" charset="0"/>
+                <a:ea typeface="+mn-ea"/>
                 <a:cs typeface="Cascadia Code Light" panose="020B0609020000020004" pitchFamily="49" charset="0"/>
               </a:rPr>
               <a:t>      </a:t>
             </a:r>
             <a:r>
-              <a:rPr lang="en-US" sz="1200" kern="0" spc="75" dirty="0">
+              <a:rPr kumimoji="0" lang="en-US" sz="1200" b="0" i="0" u="none" strike="noStrike" kern="0" cap="none" spc="75" normalizeH="0" baseline="0" noProof="0" dirty="0">
+                <a:ln>
+                  <a:noFill/>
+                </a:ln>
                 <a:solidFill>
                   <a:srgbClr val="003268">
                     <a:alpha val="50000"/>
                   </a:srgbClr>
                 </a:solidFill>
+                <a:effectLst/>
+                <a:uLnTx/>
+                <a:uFillTx/>
                 <a:latin typeface="Cascadia Code SemiBold" panose="020B0609020000020004" pitchFamily="49" charset="0"/>
+                <a:ea typeface="+mn-ea"/>
                 <a:cs typeface="Cascadia Code SemiBold" panose="020B0609020000020004" pitchFamily="49" charset="0"/>
               </a:rPr>
               <a:t>Big Data Analytics and Text Mining</a:t>
             </a:r>
             <a:r>
-              <a:rPr lang="en-US" sz="1200" b="1" kern="0" spc="75" dirty="0">
+              <a:rPr kumimoji="0" lang="en-US" sz="1200" b="1" i="0" u="none" strike="noStrike" kern="0" cap="none" spc="75" normalizeH="0" baseline="0" noProof="0" dirty="0">
+                <a:ln>
+                  <a:noFill/>
+                </a:ln>
                 <a:solidFill>
                   <a:srgbClr val="003268"/>
                 </a:solidFill>
+                <a:effectLst/>
+                <a:uLnTx/>
+                <a:uFillTx/>
                 <a:latin typeface="Cascadia Code SemiBold" panose="020B0609020000020004" pitchFamily="49" charset="0"/>
+                <a:ea typeface="+mn-ea"/>
                 <a:cs typeface="Cascadia Code SemiBold" panose="020B0609020000020004" pitchFamily="49" charset="0"/>
               </a:rPr>
               <a:t>	</a:t>
             </a:r>
-            <a:endParaRPr lang="en-US" sz="1200" dirty="0">
+            <a:endParaRPr kumimoji="0" lang="en-US" sz="1200" b="0" i="0" u="none" strike="noStrike" kern="1200" cap="none" spc="0" normalizeH="0" baseline="0" noProof="0" dirty="0">
+              <a:ln>
+                <a:noFill/>
+              </a:ln>
               <a:solidFill>
                 <a:srgbClr val="003268"/>
               </a:solidFill>
+              <a:effectLst/>
+              <a:uLnTx/>
+              <a:uFillTx/>
               <a:latin typeface="Cascadia Code SemiBold" panose="020B0609020000020004" pitchFamily="49" charset="0"/>
+              <a:ea typeface="+mn-ea"/>
               <a:cs typeface="Cascadia Code SemiBold" panose="020B0609020000020004" pitchFamily="49" charset="0"/>
             </a:endParaRPr>
           </a:p>
@@ -15151,85 +14392,217 @@
           </a:bodyPr>
           <a:lstStyle/>
           <a:p>
-            <a:pPr marL="0" indent="0" algn="r">
+            <a:pPr marL="0" marR="0" lvl="0" indent="0" algn="r" defTabSz="914400" rtl="0" eaLnBrk="1" fontAlgn="auto" latinLnBrk="0" hangingPunct="1">
               <a:lnSpc>
                 <a:spcPts val="1365"/>
               </a:lnSpc>
+              <a:spcBef>
+                <a:spcPts val="0"/>
+              </a:spcBef>
+              <a:spcAft>
+                <a:spcPts val="0"/>
+              </a:spcAft>
+              <a:buClrTx/>
+              <a:buSzTx/>
+              <a:buFontTx/>
               <a:buNone/>
+              <a:tabLst/>
+              <a:defRPr/>
             </a:pPr>
             <a:r>
-              <a:rPr lang="en-US" sz="1200" kern="0" spc="75" dirty="0">
+              <a:rPr kumimoji="0" lang="en-US" sz="1200" b="0" i="0" u="none" strike="noStrike" kern="0" cap="none" spc="75" normalizeH="0" baseline="0" noProof="0" dirty="0">
+                <a:ln>
+                  <a:noFill/>
+                </a:ln>
                 <a:solidFill>
                   <a:srgbClr val="003268"/>
                 </a:solidFill>
+                <a:effectLst/>
+                <a:uLnTx/>
+                <a:uFillTx/>
                 <a:latin typeface="Cascadia Code ExtraLight" panose="020B0609020000020004" pitchFamily="49" charset="0"/>
+                <a:ea typeface="+mn-ea"/>
                 <a:cs typeface="Cascadia Code ExtraLight" panose="020B0609020000020004" pitchFamily="49" charset="0"/>
               </a:rPr>
               <a:t>     </a:t>
             </a:r>
             <a:r>
-              <a:rPr lang="en-US" sz="1200" kern="0" spc="75" dirty="0">
+              <a:rPr kumimoji="0" lang="en-US" sz="1200" b="0" i="0" u="none" strike="noStrike" kern="0" cap="none" spc="75" normalizeH="0" baseline="0" noProof="0" dirty="0">
+                <a:ln>
+                  <a:noFill/>
+                </a:ln>
                 <a:solidFill>
                   <a:srgbClr val="003268">
                     <a:alpha val="50000"/>
                   </a:srgbClr>
                 </a:solidFill>
+                <a:effectLst/>
+                <a:uLnTx/>
+                <a:uFillTx/>
                 <a:latin typeface="Cascadia Code SemiBold" panose="020B0609020000020004" pitchFamily="49" charset="0"/>
+                <a:ea typeface="+mn-ea"/>
                 <a:cs typeface="Cascadia Code SemiBold" panose="020B0609020000020004" pitchFamily="49" charset="0"/>
               </a:rPr>
               <a:t>Ponzuoli</a:t>
             </a:r>
             <a:r>
-              <a:rPr lang="en-US" sz="1200" kern="0" spc="75" dirty="0">
+              <a:rPr kumimoji="0" lang="en-US" sz="1200" b="0" i="0" u="none" strike="noStrike" kern="0" cap="none" spc="75" normalizeH="0" baseline="0" noProof="0" dirty="0">
+                <a:ln>
+                  <a:noFill/>
+                </a:ln>
                 <a:solidFill>
                   <a:srgbClr val="003268">
                     <a:alpha val="50000"/>
                   </a:srgbClr>
                 </a:solidFill>
+                <a:effectLst/>
+                <a:uLnTx/>
+                <a:uFillTx/>
                 <a:latin typeface="Cascadia Code ExtraLight" panose="020B0609020000020004" pitchFamily="49" charset="0"/>
+                <a:ea typeface="+mn-ea"/>
                 <a:cs typeface="Cascadia Code ExtraLight" panose="020B0609020000020004" pitchFamily="49" charset="0"/>
               </a:rPr>
               <a:t> </a:t>
             </a:r>
             <a:r>
-              <a:rPr lang="en-US" sz="1200" kern="0" spc="75" dirty="0">
+              <a:rPr kumimoji="0" lang="en-US" sz="1200" b="0" i="0" u="none" strike="noStrike" kern="0" cap="none" spc="75" normalizeH="0" baseline="0" noProof="0" dirty="0">
+                <a:ln>
+                  <a:noFill/>
+                </a:ln>
                 <a:solidFill>
                   <a:srgbClr val="003268">
                     <a:alpha val="50000"/>
                   </a:srgbClr>
                 </a:solidFill>
+                <a:effectLst/>
+                <a:uLnTx/>
+                <a:uFillTx/>
                 <a:latin typeface="Cascadia Code SemiBold" panose="020B0609020000020004" pitchFamily="49" charset="0"/>
+                <a:ea typeface="+mn-ea"/>
                 <a:cs typeface="Cascadia Code SemiBold" panose="020B0609020000020004" pitchFamily="49" charset="0"/>
               </a:rPr>
               <a:t>Giovanni</a:t>
             </a:r>
             <a:r>
-              <a:rPr lang="en-US" sz="1200" kern="0" spc="75" dirty="0">
+              <a:rPr kumimoji="0" lang="en-US" sz="1200" b="0" i="0" u="none" strike="noStrike" kern="0" cap="none" spc="75" normalizeH="0" baseline="0" noProof="0" dirty="0">
+                <a:ln>
+                  <a:noFill/>
+                </a:ln>
                 <a:solidFill>
                   <a:srgbClr val="003268">
                     <a:alpha val="50000"/>
                   </a:srgbClr>
                 </a:solidFill>
+                <a:effectLst/>
+                <a:uLnTx/>
+                <a:uFillTx/>
                 <a:latin typeface="Cascadia Code ExtraLight" panose="020B0609020000020004" pitchFamily="49" charset="0"/>
+                <a:ea typeface="+mn-ea"/>
                 <a:cs typeface="Cascadia Code ExtraLight" panose="020B0609020000020004" pitchFamily="49" charset="0"/>
               </a:rPr>
               <a:t>	    - </a:t>
             </a:r>
-            <a:endParaRPr lang="en-US" sz="1200" dirty="0">
+            <a:endParaRPr kumimoji="0" lang="en-US" sz="1200" b="0" i="0" u="none" strike="noStrike" kern="1200" cap="none" spc="0" normalizeH="0" baseline="0" noProof="0" dirty="0">
+              <a:ln>
+                <a:noFill/>
+              </a:ln>
               <a:solidFill>
                 <a:srgbClr val="003268">
                   <a:alpha val="50000"/>
                 </a:srgbClr>
               </a:solidFill>
+              <a:effectLst/>
+              <a:uLnTx/>
+              <a:uFillTx/>
               <a:latin typeface="Cascadia Code ExtraLight" panose="020B0609020000020004" pitchFamily="49" charset="0"/>
+              <a:ea typeface="+mn-ea"/>
               <a:cs typeface="Cascadia Code ExtraLight" panose="020B0609020000020004" pitchFamily="49" charset="0"/>
+            </a:endParaRPr>
+          </a:p>
+        </p:txBody>
+      </p:sp>
+      <p:sp>
+        <p:nvSpPr>
+          <p:cNvPr id="3" name="TextBox 2">
+            <a:extLst>
+              <a:ext uri="{FF2B5EF4-FFF2-40B4-BE49-F238E27FC236}">
+                <a16:creationId xmlns:a16="http://schemas.microsoft.com/office/drawing/2014/main" id="{E90AB9ED-BAC4-338C-E847-1379A43CE48A}"/>
+              </a:ext>
+            </a:extLst>
+          </p:cNvPr>
+          <p:cNvSpPr txBox="1"/>
+          <p:nvPr/>
+        </p:nvSpPr>
+        <p:spPr>
+          <a:xfrm>
+            <a:off x="3827527" y="3583502"/>
+            <a:ext cx="739648" cy="137884"/>
+          </a:xfrm>
+          <a:prstGeom prst="rect">
+            <a:avLst/>
+          </a:prstGeom>
+          <a:noFill/>
+        </p:spPr>
+        <p:txBody>
+          <a:bodyPr wrap="square">
+            <a:spAutoFit/>
+          </a:bodyPr>
+          <a:lstStyle/>
+          <a:p>
+            <a:pPr marL="0" marR="0" lvl="0" indent="0" algn="l" defTabSz="914400" rtl="0" eaLnBrk="1" fontAlgn="auto" latinLnBrk="0" hangingPunct="1">
+              <a:lnSpc>
+                <a:spcPct val="100000"/>
+              </a:lnSpc>
+              <a:spcBef>
+                <a:spcPts val="0"/>
+              </a:spcBef>
+              <a:spcAft>
+                <a:spcPts val="0"/>
+              </a:spcAft>
+              <a:buClrTx/>
+              <a:buSzTx/>
+              <a:buFontTx/>
+              <a:buNone/>
+              <a:tabLst/>
+              <a:defRPr/>
+            </a:pPr>
+            <a:r>
+              <a:rPr kumimoji="0" lang="it-IT" sz="600" b="1" i="0" u="none" strike="noStrike" kern="1200" cap="none" spc="75" normalizeH="0" baseline="0" noProof="0" dirty="0">
+                <a:ln>
+                  <a:noFill/>
+                </a:ln>
+                <a:solidFill>
+                  <a:srgbClr val="000000"/>
+                </a:solidFill>
+                <a:effectLst/>
+                <a:uLnTx/>
+                <a:uFillTx/>
+                <a:latin typeface="Cascadia Code SemiBold"/>
+                <a:ea typeface="+mn-ea"/>
+                <a:cs typeface="+mn-cs"/>
+              </a:rPr>
+              <a:t>Loss =</a:t>
+            </a:r>
+            <a:endParaRPr kumimoji="0" lang="it-IT" sz="900" b="0" i="0" u="none" strike="noStrike" kern="1200" cap="none" spc="0" normalizeH="0" baseline="0" noProof="0" dirty="0">
+              <a:ln>
+                <a:noFill/>
+              </a:ln>
+              <a:solidFill>
+                <a:srgbClr val="000000"/>
+              </a:solidFill>
+              <a:effectLst/>
+              <a:uLnTx/>
+              <a:uFillTx/>
+              <a:latin typeface="Arial"/>
+              <a:ea typeface="+mn-ea"/>
+              <a:cs typeface="+mn-cs"/>
             </a:endParaRPr>
           </a:p>
         </p:txBody>
       </p:sp>
       <p:pic>
         <p:nvPicPr>
-          <p:cNvPr id="28" name="Picture 27" descr="train_chart.png"/>
+          <p:cNvPr id="28" name="Loss anatomy" descr="loss_anatomy.png"/>
           <p:cNvPicPr>
             <a:picLocks noChangeAspect="1"/>
           </p:cNvPicPr>
@@ -15243,14 +14616,585 @@
         </p:blipFill>
         <p:spPr>
           <a:xfrm>
-            <a:off x="3891024" y="4775200"/>
-            <a:ext cx="7488176" cy="1778000"/>
+            <a:off x="4254246" y="3594952"/>
+            <a:ext cx="4052479" cy="913206"/>
           </a:xfrm>
           <a:prstGeom prst="rect">
             <a:avLst/>
           </a:prstGeom>
         </p:spPr>
       </p:pic>
+      <p:sp>
+        <p:nvSpPr>
+          <p:cNvPr id="15" name="TextBox 14">
+            <a:extLst>
+              <a:ext uri="{FF2B5EF4-FFF2-40B4-BE49-F238E27FC236}">
+                <a16:creationId xmlns:a16="http://schemas.microsoft.com/office/drawing/2014/main" id="{D14E69CD-1F15-6E1D-D7D8-AD0CFE16C17D}"/>
+              </a:ext>
+            </a:extLst>
+          </p:cNvPr>
+          <p:cNvSpPr txBox="1"/>
+          <p:nvPr/>
+        </p:nvSpPr>
+        <p:spPr>
+          <a:xfrm>
+            <a:off x="4488232" y="3577740"/>
+            <a:ext cx="157886" cy="137884"/>
+          </a:xfrm>
+          <a:prstGeom prst="rect">
+            <a:avLst/>
+          </a:prstGeom>
+          <a:noFill/>
+        </p:spPr>
+        <p:txBody>
+          <a:bodyPr wrap="square">
+            <a:spAutoFit/>
+          </a:bodyPr>
+          <a:lstStyle/>
+          <a:p>
+            <a:pPr marL="0" marR="0" lvl="0" indent="0" algn="l" defTabSz="914400" rtl="0" eaLnBrk="1" fontAlgn="auto" latinLnBrk="0" hangingPunct="1">
+              <a:lnSpc>
+                <a:spcPct val="100000"/>
+              </a:lnSpc>
+              <a:spcBef>
+                <a:spcPts val="0"/>
+              </a:spcBef>
+              <a:spcAft>
+                <a:spcPts val="0"/>
+              </a:spcAft>
+              <a:buClrTx/>
+              <a:buSzTx/>
+              <a:buFontTx/>
+              <a:buNone/>
+              <a:tabLst/>
+              <a:defRPr/>
+            </a:pPr>
+            <a:r>
+              <a:rPr kumimoji="0" lang="it-IT" sz="600" b="1" i="0" u="none" strike="noStrike" kern="1200" cap="none" spc="75" normalizeH="0" baseline="0" noProof="0" dirty="0">
+                <a:ln>
+                  <a:noFill/>
+                </a:ln>
+                <a:solidFill>
+                  <a:srgbClr val="000000"/>
+                </a:solidFill>
+                <a:effectLst/>
+                <a:uLnTx/>
+                <a:uFillTx/>
+                <a:latin typeface="Cascadia Code SemiBold"/>
+                <a:ea typeface="+mn-ea"/>
+                <a:cs typeface="+mn-cs"/>
+              </a:rPr>
+              <a:t>+</a:t>
+            </a:r>
+            <a:endParaRPr kumimoji="0" lang="it-IT" sz="1450" b="0" i="0" u="none" strike="noStrike" kern="1200" cap="none" spc="0" normalizeH="0" baseline="0" noProof="0" dirty="0">
+              <a:ln>
+                <a:noFill/>
+              </a:ln>
+              <a:solidFill>
+                <a:srgbClr val="F5F3EC"/>
+              </a:solidFill>
+              <a:effectLst/>
+              <a:uLnTx/>
+              <a:uFillTx/>
+              <a:latin typeface="Arial"/>
+              <a:ea typeface="+mn-ea"/>
+              <a:cs typeface="+mn-cs"/>
+            </a:endParaRPr>
+          </a:p>
+        </p:txBody>
+      </p:sp>
+      <p:sp>
+        <p:nvSpPr>
+          <p:cNvPr id="21" name="TextBox 20">
+            <a:extLst>
+              <a:ext uri="{FF2B5EF4-FFF2-40B4-BE49-F238E27FC236}">
+                <a16:creationId xmlns:a16="http://schemas.microsoft.com/office/drawing/2014/main" id="{3523D7B4-45BC-DD9B-E9A3-CFA2335B72A1}"/>
+              </a:ext>
+            </a:extLst>
+          </p:cNvPr>
+          <p:cNvSpPr txBox="1"/>
+          <p:nvPr/>
+        </p:nvSpPr>
+        <p:spPr>
+          <a:xfrm>
+            <a:off x="6168803" y="3577740"/>
+            <a:ext cx="908688" cy="137884"/>
+          </a:xfrm>
+          <a:prstGeom prst="rect">
+            <a:avLst/>
+          </a:prstGeom>
+          <a:noFill/>
+        </p:spPr>
+        <p:txBody>
+          <a:bodyPr wrap="square">
+            <a:spAutoFit/>
+          </a:bodyPr>
+          <a:lstStyle/>
+          <a:p>
+            <a:pPr marL="0" marR="0" lvl="0" indent="0" algn="l" defTabSz="914400" rtl="0" eaLnBrk="1" fontAlgn="auto" latinLnBrk="0" hangingPunct="1">
+              <a:lnSpc>
+                <a:spcPct val="100000"/>
+              </a:lnSpc>
+              <a:spcBef>
+                <a:spcPts val="0"/>
+              </a:spcBef>
+              <a:spcAft>
+                <a:spcPts val="0"/>
+              </a:spcAft>
+              <a:buClrTx/>
+              <a:buSzTx/>
+              <a:buFontTx/>
+              <a:buNone/>
+              <a:tabLst/>
+              <a:defRPr/>
+            </a:pPr>
+            <a:r>
+              <a:rPr kumimoji="0" lang="it-IT" sz="600" b="1" i="0" u="none" strike="noStrike" kern="1200" cap="none" spc="75" normalizeH="0" baseline="0" noProof="0" dirty="0">
+                <a:ln>
+                  <a:noFill/>
+                </a:ln>
+                <a:solidFill>
+                  <a:srgbClr val="000000"/>
+                </a:solidFill>
+                <a:effectLst/>
+                <a:uLnTx/>
+                <a:uFillTx/>
+                <a:latin typeface="Cascadia Code SemiBold"/>
+                <a:ea typeface="+mn-ea"/>
+                <a:cs typeface="+mn-cs"/>
+              </a:rPr>
+              <a:t>+</a:t>
+            </a:r>
+            <a:endParaRPr kumimoji="0" lang="it-IT" sz="1450" b="0" i="0" u="none" strike="noStrike" kern="1200" cap="none" spc="0" normalizeH="0" baseline="0" noProof="0" dirty="0">
+              <a:ln>
+                <a:noFill/>
+              </a:ln>
+              <a:solidFill>
+                <a:srgbClr val="F5F3EC"/>
+              </a:solidFill>
+              <a:effectLst/>
+              <a:uLnTx/>
+              <a:uFillTx/>
+              <a:latin typeface="Arial"/>
+              <a:ea typeface="+mn-ea"/>
+              <a:cs typeface="+mn-cs"/>
+            </a:endParaRPr>
+          </a:p>
+        </p:txBody>
+      </p:sp>
+      <p:sp>
+        <p:nvSpPr>
+          <p:cNvPr id="3027" name="TextBox 5"/>
+          <p:cNvSpPr txBox="1"/>
+          <p:nvPr/>
+        </p:nvSpPr>
+        <p:spPr>
+          <a:xfrm>
+            <a:off x="762000" y="4762500"/>
+            <a:ext cx="1905000" cy="393700"/>
+          </a:xfrm>
+          <a:prstGeom prst="rect">
+            <a:avLst/>
+          </a:prstGeom>
+          <a:noFill/>
+        </p:spPr>
+        <p:txBody>
+          <a:bodyPr wrap="square" lIns="0" tIns="0" rIns="0" bIns="0" anchor="t">
+            <a:noAutofit/>
+          </a:bodyPr>
+          <a:lstStyle/>
+          <a:p>
+            <a:pPr marL="0" marR="0" lvl="0" indent="0" algn="l" defTabSz="914400" rtl="0" eaLnBrk="1" fontAlgn="auto" latinLnBrk="0" hangingPunct="1">
+              <a:lnSpc>
+                <a:spcPct val="130000"/>
+              </a:lnSpc>
+              <a:spcBef>
+                <a:spcPts val="0"/>
+              </a:spcBef>
+              <a:spcAft>
+                <a:spcPts val="0"/>
+              </a:spcAft>
+              <a:buClrTx/>
+              <a:buSzTx/>
+              <a:buFontTx/>
+              <a:buNone/>
+              <a:tabLst/>
+              <a:defRPr/>
+            </a:pPr>
+            <a:r>
+              <a:rPr kumimoji="0" sz="1200" b="1" i="0" u="none" strike="noStrike" kern="1200" cap="none" spc="75" normalizeH="0" baseline="0" noProof="0" dirty="0">
+                <a:ln>
+                  <a:noFill/>
+                </a:ln>
+                <a:solidFill>
+                  <a:srgbClr val="FF0000"/>
+                </a:solidFill>
+                <a:effectLst/>
+                <a:uLnTx/>
+                <a:uFillTx/>
+                <a:latin typeface="Cascadia Code SemiBold"/>
+                <a:ea typeface="+mn-ea"/>
+                <a:cs typeface="+mn-cs"/>
+              </a:rPr>
+              <a:t>OPTIMIZER AND SCHEDULE</a:t>
+            </a:r>
+          </a:p>
+        </p:txBody>
+      </p:sp>
+      <p:sp>
+        <p:nvSpPr>
+          <p:cNvPr id="3028" name="TextBox 6"/>
+          <p:cNvSpPr txBox="1"/>
+          <p:nvPr/>
+        </p:nvSpPr>
+        <p:spPr>
+          <a:xfrm>
+            <a:off x="2794000" y="4724400"/>
+            <a:ext cx="8585200" cy="927100"/>
+          </a:xfrm>
+          <a:prstGeom prst="rect">
+            <a:avLst/>
+          </a:prstGeom>
+          <a:noFill/>
+        </p:spPr>
+        <p:txBody>
+          <a:bodyPr wrap="square" lIns="0" tIns="0" rIns="0" bIns="0" anchor="t">
+            <a:noAutofit/>
+          </a:bodyPr>
+          <a:lstStyle/>
+          <a:p>
+            <a:pPr marL="0" marR="0" lvl="0" indent="0" algn="l" defTabSz="914400" rtl="0" eaLnBrk="1" fontAlgn="auto" latinLnBrk="0" hangingPunct="1">
+              <a:lnSpc>
+                <a:spcPct val="145000"/>
+              </a:lnSpc>
+              <a:spcBef>
+                <a:spcPts val="0"/>
+              </a:spcBef>
+              <a:spcAft>
+                <a:spcPts val="0"/>
+              </a:spcAft>
+              <a:buClrTx/>
+              <a:buSzTx/>
+              <a:buFontTx/>
+              <a:buNone/>
+              <a:tabLst/>
+              <a:defRPr/>
+            </a:pPr>
+            <a:r>
+              <a:rPr kumimoji="0" lang="en-US" sz="1400" b="1" i="0" u="none" strike="noStrike" kern="1200" cap="none" spc="0" normalizeH="0" baseline="0" noProof="0" dirty="0">
+                <a:ln>
+                  <a:noFill/>
+                </a:ln>
+                <a:solidFill>
+                  <a:srgbClr val="121417"/>
+                </a:solidFill>
+                <a:effectLst/>
+                <a:uLnTx/>
+                <a:uFillTx/>
+                <a:latin typeface="Cascadia Code SemiBold"/>
+                <a:ea typeface="+mn-ea"/>
+                <a:cs typeface="+mn-cs"/>
+              </a:rPr>
+              <a:t>AdamW</a:t>
+            </a:r>
+            <a:r>
+              <a:rPr kumimoji="0" lang="en-US" sz="1400" b="0" i="0" u="none" strike="noStrike" kern="1200" cap="none" spc="0" normalizeH="0" baseline="0" noProof="0" dirty="0">
+                <a:ln>
+                  <a:noFill/>
+                </a:ln>
+                <a:solidFill>
+                  <a:srgbClr val="121417"/>
+                </a:solidFill>
+                <a:effectLst/>
+                <a:uLnTx/>
+                <a:uFillTx/>
+                <a:latin typeface="Cascadia Code SemiLight"/>
+                <a:ea typeface="+mn-ea"/>
+                <a:cs typeface="+mn-cs"/>
+              </a:rPr>
+              <a:t> at 2e-3 with gradient clipping 1.0; </a:t>
+            </a:r>
+            <a:r>
+              <a:rPr kumimoji="0" lang="en-US" sz="1400" b="1" i="0" u="none" strike="noStrike" kern="1200" cap="none" spc="0" normalizeH="0" baseline="0" noProof="0" dirty="0">
+                <a:ln>
+                  <a:noFill/>
+                </a:ln>
+                <a:solidFill>
+                  <a:srgbClr val="121417"/>
+                </a:solidFill>
+                <a:effectLst/>
+                <a:uLnTx/>
+                <a:uFillTx/>
+                <a:latin typeface="Cascadia Code SemiBold"/>
+                <a:ea typeface="+mn-ea"/>
+                <a:cs typeface="+mn-cs"/>
+              </a:rPr>
+              <a:t>ReduceLROnPlateau</a:t>
+            </a:r>
+            <a:r>
+              <a:rPr kumimoji="0" lang="en-US" sz="1400" b="0" i="0" u="none" strike="noStrike" kern="1200" cap="none" spc="0" normalizeH="0" baseline="0" noProof="0" dirty="0">
+                <a:ln>
+                  <a:noFill/>
+                </a:ln>
+                <a:solidFill>
+                  <a:srgbClr val="121417"/>
+                </a:solidFill>
+                <a:effectLst/>
+                <a:uLnTx/>
+                <a:uFillTx/>
+                <a:latin typeface="Cascadia Code SemiLight"/>
+                <a:ea typeface="+mn-ea"/>
+                <a:cs typeface="+mn-cs"/>
+              </a:rPr>
+              <a:t> halves the LR after 6 epochs without a </a:t>
+            </a:r>
+            <a:r>
+              <a:rPr kumimoji="0" lang="en-US" sz="1400" b="0" i="0" u="none" strike="noStrike" kern="1200" cap="none" spc="0" normalizeH="0" baseline="0" noProof="0" dirty="0">
+                <a:ln>
+                  <a:noFill/>
+                </a:ln>
+                <a:solidFill>
+                  <a:srgbClr val="121417"/>
+                </a:solidFill>
+                <a:effectLst/>
+                <a:uLnTx/>
+                <a:uFillTx/>
+                <a:latin typeface="Cascadia Code SemiBold" panose="020B0609020000020004" pitchFamily="49" charset="0"/>
+                <a:cs typeface="Cascadia Code SemiBold" panose="020B0609020000020004" pitchFamily="49" charset="0"/>
+              </a:rPr>
+              <a:t>1%</a:t>
+            </a:r>
+            <a:r>
+              <a:rPr kumimoji="0" lang="en-US" sz="1400" b="0" i="0" u="none" strike="noStrike" kern="1200" cap="none" spc="0" normalizeH="0" baseline="0" noProof="0" dirty="0">
+                <a:ln>
+                  <a:noFill/>
+                </a:ln>
+                <a:solidFill>
+                  <a:srgbClr val="121417"/>
+                </a:solidFill>
+                <a:effectLst/>
+                <a:uLnTx/>
+                <a:uFillTx/>
+                <a:latin typeface="Cascadia Code SemiLight"/>
+                <a:ea typeface="+mn-ea"/>
+                <a:cs typeface="+mn-cs"/>
+              </a:rPr>
+              <a:t> gain (9 </a:t>
+            </a:r>
+            <a:r>
+              <a:rPr kumimoji="0" lang="en-US" sz="1400" b="0" i="0" u="none" strike="noStrike" kern="1200" cap="none" spc="0" normalizeH="0" baseline="0" noProof="0" dirty="0" err="1">
+                <a:ln>
+                  <a:noFill/>
+                </a:ln>
+                <a:solidFill>
+                  <a:srgbClr val="121417"/>
+                </a:solidFill>
+                <a:effectLst/>
+                <a:uLnTx/>
+                <a:uFillTx/>
+                <a:latin typeface="Cascadia Code SemiLight"/>
+                <a:ea typeface="+mn-ea"/>
+                <a:cs typeface="+mn-cs"/>
+              </a:rPr>
+              <a:t>halvings</a:t>
+            </a:r>
+            <a:r>
+              <a:rPr kumimoji="0" lang="en-US" sz="1400" b="0" i="0" u="none" strike="noStrike" kern="1200" cap="none" spc="0" normalizeH="0" baseline="0" noProof="0" dirty="0">
+                <a:ln>
+                  <a:noFill/>
+                </a:ln>
+                <a:solidFill>
+                  <a:srgbClr val="121417"/>
+                </a:solidFill>
+                <a:effectLst/>
+                <a:uLnTx/>
+                <a:uFillTx/>
+                <a:latin typeface="Cascadia Code SemiLight"/>
+                <a:ea typeface="+mn-ea"/>
+                <a:cs typeface="+mn-cs"/>
+              </a:rPr>
+              <a:t> in the final model); early stopping never fired, so all runs used </a:t>
+            </a:r>
+            <a:r>
+              <a:rPr kumimoji="0" lang="en-US" sz="1400" b="0" i="0" u="none" strike="noStrike" kern="1200" cap="none" spc="0" normalizeH="0" baseline="0" noProof="0" dirty="0">
+                <a:ln>
+                  <a:noFill/>
+                </a:ln>
+                <a:solidFill>
+                  <a:srgbClr val="121417"/>
+                </a:solidFill>
+                <a:effectLst/>
+                <a:uLnTx/>
+                <a:uFillTx/>
+                <a:latin typeface="Cascadia Code SemiBold" panose="020B0609020000020004" pitchFamily="49" charset="0"/>
+                <a:cs typeface="Cascadia Code SemiBold" panose="020B0609020000020004" pitchFamily="49" charset="0"/>
+              </a:rPr>
+              <a:t>100 epochs </a:t>
+            </a:r>
+            <a:r>
+              <a:rPr kumimoji="0" lang="en-US" sz="1400" b="0" i="0" u="none" strike="noStrike" kern="1200" cap="none" spc="0" normalizeH="0" baseline="0" noProof="0" dirty="0">
+                <a:ln>
+                  <a:noFill/>
+                </a:ln>
+                <a:solidFill>
+                  <a:srgbClr val="121417"/>
+                </a:solidFill>
+                <a:effectLst/>
+                <a:uLnTx/>
+                <a:uFillTx/>
+                <a:latin typeface="Cascadia Code SemiLight"/>
+                <a:ea typeface="+mn-ea"/>
+                <a:cs typeface="+mn-cs"/>
+              </a:rPr>
+              <a:t>and the </a:t>
+            </a:r>
+            <a:r>
+              <a:rPr kumimoji="0" lang="en-US" sz="1400" b="0" i="0" u="none" strike="noStrike" kern="1200" cap="none" spc="0" normalizeH="0" baseline="0" noProof="0" dirty="0">
+                <a:ln>
+                  <a:noFill/>
+                </a:ln>
+                <a:solidFill>
+                  <a:srgbClr val="121417"/>
+                </a:solidFill>
+                <a:effectLst/>
+                <a:uLnTx/>
+                <a:uFillTx/>
+                <a:latin typeface="Cascadia Code SemiBold" panose="020B0609020000020004" pitchFamily="49" charset="0"/>
+                <a:cs typeface="Cascadia Code SemiBold" panose="020B0609020000020004" pitchFamily="49" charset="0"/>
+              </a:rPr>
+              <a:t>best checkpoint </a:t>
+            </a:r>
+            <a:r>
+              <a:rPr kumimoji="0" lang="en-US" sz="1400" b="0" i="0" u="none" strike="noStrike" kern="1200" cap="none" spc="0" normalizeH="0" baseline="0" noProof="0" dirty="0">
+                <a:ln>
+                  <a:noFill/>
+                </a:ln>
+                <a:solidFill>
+                  <a:srgbClr val="121417"/>
+                </a:solidFill>
+                <a:effectLst/>
+                <a:uLnTx/>
+                <a:uFillTx/>
+                <a:latin typeface="Cascadia Code SemiLight"/>
+                <a:ea typeface="+mn-ea"/>
+                <a:cs typeface="+mn-cs"/>
+              </a:rPr>
+              <a:t>is tested</a:t>
+            </a:r>
+          </a:p>
+        </p:txBody>
+      </p:sp>
+      <p:cxnSp>
+        <p:nvCxnSpPr>
+          <p:cNvPr id="3029" name="Connector 7"/>
+          <p:cNvCxnSpPr/>
+          <p:nvPr/>
+        </p:nvCxnSpPr>
+        <p:spPr>
+          <a:xfrm>
+            <a:off x="812800" y="2286000"/>
+            <a:ext cx="10566400" cy="0"/>
+          </a:xfrm>
+          <a:prstGeom prst="line">
+            <a:avLst/>
+          </a:prstGeom>
+          <a:ln w="6350">
+            <a:solidFill>
+              <a:srgbClr val="FFFFFF">
+                <a:alpha val="12000"/>
+              </a:srgbClr>
+            </a:solidFill>
+          </a:ln>
+        </p:spPr>
+        <p:style>
+          <a:lnRef idx="2">
+            <a:schemeClr val="accent1"/>
+          </a:lnRef>
+          <a:fillRef idx="0">
+            <a:schemeClr val="accent1"/>
+          </a:fillRef>
+          <a:effectRef idx="1">
+            <a:schemeClr val="accent1"/>
+          </a:effectRef>
+          <a:fontRef idx="minor">
+            <a:schemeClr val="tx1"/>
+          </a:fontRef>
+        </p:style>
+      </p:cxnSp>
+      <p:cxnSp>
+        <p:nvCxnSpPr>
+          <p:cNvPr id="3030" name="Connector 7"/>
+          <p:cNvCxnSpPr/>
+          <p:nvPr/>
+        </p:nvCxnSpPr>
+        <p:spPr>
+          <a:xfrm>
+            <a:off x="812800" y="4584700"/>
+            <a:ext cx="10566400" cy="0"/>
+          </a:xfrm>
+          <a:prstGeom prst="line">
+            <a:avLst/>
+          </a:prstGeom>
+          <a:ln w="6350">
+            <a:solidFill>
+              <a:srgbClr val="FFFFFF">
+                <a:alpha val="12000"/>
+              </a:srgbClr>
+            </a:solidFill>
+          </a:ln>
+        </p:spPr>
+        <p:style>
+          <a:lnRef idx="2">
+            <a:schemeClr val="accent1"/>
+          </a:lnRef>
+          <a:fillRef idx="0">
+            <a:schemeClr val="accent1"/>
+          </a:fillRef>
+          <a:effectRef idx="1">
+            <a:schemeClr val="accent1"/>
+          </a:effectRef>
+          <a:fontRef idx="minor">
+            <a:schemeClr val="tx1"/>
+          </a:fontRef>
+        </p:style>
+      </p:cxnSp>
+      <p:cxnSp>
+        <p:nvCxnSpPr>
+          <p:cNvPr id="3031" name="Connector 7"/>
+          <p:cNvCxnSpPr/>
+          <p:nvPr/>
+        </p:nvCxnSpPr>
+        <p:spPr>
+          <a:xfrm>
+            <a:off x="812800" y="5791200"/>
+            <a:ext cx="10566400" cy="0"/>
+          </a:xfrm>
+          <a:prstGeom prst="line">
+            <a:avLst/>
+          </a:prstGeom>
+          <a:ln w="6350">
+            <a:solidFill>
+              <a:srgbClr val="FFFFFF">
+                <a:alpha val="12000"/>
+              </a:srgbClr>
+            </a:solidFill>
+          </a:ln>
+        </p:spPr>
+        <p:style>
+          <a:lnRef idx="2">
+            <a:schemeClr val="accent1"/>
+          </a:lnRef>
+          <a:fillRef idx="0">
+            <a:schemeClr val="accent1"/>
+          </a:fillRef>
+          <a:effectRef idx="1">
+            <a:schemeClr val="accent1"/>
+          </a:effectRef>
+          <a:fontRef idx="minor">
+            <a:schemeClr val="tx1"/>
+          </a:fontRef>
+        </p:style>
+      </p:cxnSp>
     </p:spTree>
   </p:cSld>
   <p:clrMapOvr>
@@ -15259,7 +15203,7 @@
 </p:sld>
 </file>
 
-<file path=ppt/slides/slide13.xml><?xml version="1.0" encoding="utf-8"?>
+<file path=ppt/slides/slide12.xml><?xml version="1.0" encoding="utf-8"?>
 <p:sld xmlns:a="http://schemas.openxmlformats.org/drawingml/2006/main" xmlns:r="http://schemas.openxmlformats.org/officeDocument/2006/relationships" xmlns:p="http://schemas.openxmlformats.org/presentationml/2006/main">
   <p:cSld>
     <p:bg>
@@ -15284,6 +15228,42 @@
           <a:chExt cx="0" cy="0"/>
         </a:xfrm>
       </p:grpSpPr>
+      <p:pic>
+        <p:nvPicPr>
+          <p:cNvPr id="30" name="Picture 29" descr="image.png">
+            <a:extLst>
+              <a:ext uri="{FF2B5EF4-FFF2-40B4-BE49-F238E27FC236}">
+                <a16:creationId xmlns:a16="http://schemas.microsoft.com/office/drawing/2014/main" id="{1E40342B-032E-950B-0E39-D72974C0F990}"/>
+              </a:ext>
+            </a:extLst>
+          </p:cNvPr>
+          <p:cNvPicPr>
+            <a:picLocks noChangeAspect="1"/>
+          </p:cNvPicPr>
+          <p:nvPr/>
+        </p:nvPicPr>
+        <p:blipFill>
+          <a:blip r:embed="rId2">
+            <a:alphaModFix amt="15000"/>
+          </a:blip>
+          <a:srcRect l="19132" t="34876" r="19132" b="33281"/>
+          <a:stretch>
+            <a:fillRect/>
+          </a:stretch>
+        </p:blipFill>
+        <p:spPr>
+          <a:xfrm>
+            <a:off x="0" y="284703"/>
+            <a:ext cx="12192000" cy="6288594"/>
+          </a:xfrm>
+          <a:prstGeom prst="rect">
+            <a:avLst/>
+          </a:prstGeom>
+          <a:effectLst>
+            <a:softEdge rad="317500"/>
+          </a:effectLst>
+        </p:spPr>
+      </p:pic>
       <p:cxnSp>
         <p:nvCxnSpPr>
           <p:cNvPr id="8" name="Connector 7"/>
@@ -15358,42 +15338,6 @@
           </a:fontRef>
         </p:style>
       </p:cxnSp>
-      <p:pic>
-        <p:nvPicPr>
-          <p:cNvPr id="30" name="Picture 29" descr="image.png">
-            <a:extLst>
-              <a:ext uri="{FF2B5EF4-FFF2-40B4-BE49-F238E27FC236}">
-                <a16:creationId xmlns:a16="http://schemas.microsoft.com/office/drawing/2014/main" id="{1E40342B-032E-950B-0E39-D72974C0F990}"/>
-              </a:ext>
-            </a:extLst>
-          </p:cNvPr>
-          <p:cNvPicPr>
-            <a:picLocks noChangeAspect="1"/>
-          </p:cNvPicPr>
-          <p:nvPr/>
-        </p:nvPicPr>
-        <p:blipFill>
-          <a:blip r:embed="rId2">
-            <a:alphaModFix amt="15000"/>
-          </a:blip>
-          <a:srcRect l="19132" t="34876" r="19132" b="33281"/>
-          <a:stretch>
-            <a:fillRect/>
-          </a:stretch>
-        </p:blipFill>
-        <p:spPr>
-          <a:xfrm>
-            <a:off x="0" y="284703"/>
-            <a:ext cx="12192000" cy="6288594"/>
-          </a:xfrm>
-          <a:prstGeom prst="rect">
-            <a:avLst/>
-          </a:prstGeom>
-          <a:effectLst>
-            <a:softEdge rad="317500"/>
-          </a:effectLst>
-        </p:spPr>
-      </p:pic>
       <p:sp>
         <p:nvSpPr>
           <p:cNvPr id="5" name="TextBox 4"/>
@@ -16925,7 +16869,7 @@
 </p:sld>
 </file>
 
-<file path=ppt/slides/slide14.xml><?xml version="1.0" encoding="utf-8"?>
+<file path=ppt/slides/slide13.xml><?xml version="1.0" encoding="utf-8"?>
 <p:sld xmlns:a="http://schemas.openxmlformats.org/drawingml/2006/main" xmlns:r="http://schemas.openxmlformats.org/officeDocument/2006/relationships" xmlns:p="http://schemas.openxmlformats.org/presentationml/2006/main">
   <p:cSld>
     <p:bg>
@@ -17154,17 +17098,35 @@
           </a:bodyPr>
           <a:lstStyle/>
           <a:p>
-            <a:pPr marL="0" indent="0" algn="ctr">
+            <a:pPr marL="0" marR="0" lvl="0" indent="0" algn="ctr" defTabSz="914400" rtl="0" eaLnBrk="1" fontAlgn="auto" latinLnBrk="0" hangingPunct="1">
               <a:lnSpc>
                 <a:spcPts val="1440"/>
               </a:lnSpc>
+              <a:spcBef>
+                <a:spcPts val="0"/>
+              </a:spcBef>
+              <a:spcAft>
+                <a:spcPts val="0"/>
+              </a:spcAft>
+              <a:buClrTx/>
+              <a:buSzTx/>
+              <a:buFontTx/>
               <a:buNone/>
+              <a:tabLst/>
+              <a:defRPr/>
             </a:pPr>
-            <a:endParaRPr lang="en-US" sz="1200" dirty="0">
+            <a:endParaRPr kumimoji="0" lang="en-US" sz="1200" b="0" i="0" u="none" strike="noStrike" kern="1200" cap="none" spc="0" normalizeH="0" baseline="0" noProof="0" dirty="0">
+              <a:ln>
+                <a:noFill/>
+              </a:ln>
               <a:solidFill>
                 <a:srgbClr val="003268"/>
               </a:solidFill>
+              <a:effectLst/>
+              <a:uLnTx/>
+              <a:uFillTx/>
               <a:latin typeface="Cascadia Code SemiBold" panose="020B0609020000020004" pitchFamily="49" charset="0"/>
+              <a:ea typeface="+mn-ea"/>
               <a:cs typeface="Cascadia Code SemiBold" panose="020B0609020000020004" pitchFamily="49" charset="0"/>
             </a:endParaRPr>
           </a:p>
@@ -17199,28 +17161,52 @@
           </a:bodyPr>
           <a:lstStyle/>
           <a:p>
-            <a:pPr marL="0" indent="0" algn="ctr">
+            <a:pPr marL="0" marR="0" lvl="0" indent="0" algn="ctr" defTabSz="914400" rtl="0" eaLnBrk="1" fontAlgn="auto" latinLnBrk="0" hangingPunct="1">
               <a:lnSpc>
                 <a:spcPts val="1440"/>
               </a:lnSpc>
+              <a:spcBef>
+                <a:spcPts val="0"/>
+              </a:spcBef>
+              <a:spcAft>
+                <a:spcPts val="0"/>
+              </a:spcAft>
+              <a:buClrTx/>
+              <a:buSzTx/>
+              <a:buFontTx/>
               <a:buNone/>
+              <a:tabLst/>
+              <a:defRPr/>
             </a:pPr>
             <a:r>
-              <a:rPr lang="en-US" sz="1200" b="1" kern="0" spc="150" dirty="0">
+              <a:rPr kumimoji="0" lang="en-US" sz="1200" b="1" i="0" u="none" strike="noStrike" kern="0" cap="none" spc="150" normalizeH="0" baseline="0" noProof="0" dirty="0">
+                <a:ln>
+                  <a:noFill/>
+                </a:ln>
                 <a:solidFill>
                   <a:srgbClr val="003268"/>
                 </a:solidFill>
+                <a:effectLst/>
+                <a:uLnTx/>
+                <a:uFillTx/>
                 <a:latin typeface="Cascadia Code SemiBold" panose="020B0609020000020004" pitchFamily="49" charset="0"/>
                 <a:ea typeface="Arial" pitchFamily="34" charset="-122"/>
                 <a:cs typeface="Cascadia Code SemiBold" panose="020B0609020000020004" pitchFamily="49" charset="0"/>
               </a:rPr>
               <a:t>BIG DATA BOWL 2026</a:t>
             </a:r>
-            <a:endParaRPr lang="en-US" sz="1200" dirty="0">
+            <a:endParaRPr kumimoji="0" lang="en-US" sz="1200" b="0" i="0" u="none" strike="noStrike" kern="1200" cap="none" spc="0" normalizeH="0" baseline="0" noProof="0" dirty="0">
+              <a:ln>
+                <a:noFill/>
+              </a:ln>
               <a:solidFill>
                 <a:srgbClr val="003268"/>
               </a:solidFill>
+              <a:effectLst/>
+              <a:uLnTx/>
+              <a:uFillTx/>
               <a:latin typeface="Cascadia Code SemiBold" panose="020B0609020000020004" pitchFamily="49" charset="0"/>
+              <a:ea typeface="+mn-ea"/>
               <a:cs typeface="Cascadia Code SemiBold" panose="020B0609020000020004" pitchFamily="49" charset="0"/>
             </a:endParaRPr>
           </a:p>
@@ -17284,72 +17270,126 @@
           </a:bodyPr>
           <a:lstStyle/>
           <a:p>
-            <a:pPr>
+            <a:pPr marL="0" marR="0" lvl="0" indent="0" algn="l" defTabSz="914400" rtl="0" eaLnBrk="1" fontAlgn="auto" latinLnBrk="0" hangingPunct="1">
               <a:lnSpc>
                 <a:spcPts val="1365"/>
               </a:lnSpc>
+              <a:spcBef>
+                <a:spcPts val="0"/>
+              </a:spcBef>
+              <a:spcAft>
+                <a:spcPts val="0"/>
+              </a:spcAft>
+              <a:buClrTx/>
+              <a:buSzTx/>
+              <a:buFontTx/>
+              <a:buNone/>
+              <a:tabLst/>
+              <a:defRPr/>
             </a:pPr>
             <a:r>
-              <a:rPr lang="en-US" sz="1200" kern="0" spc="75" dirty="0">
+              <a:rPr kumimoji="0" lang="en-US" sz="1200" b="0" i="0" u="none" strike="noStrike" kern="0" cap="none" spc="75" normalizeH="0" baseline="0" noProof="0" dirty="0">
+                <a:ln>
+                  <a:noFill/>
+                </a:ln>
                 <a:solidFill>
                   <a:srgbClr val="003268"/>
                 </a:solidFill>
+                <a:effectLst/>
+                <a:uLnTx/>
+                <a:uFillTx/>
                 <a:latin typeface="Cascadia Code Light" panose="020B0609020000020004" pitchFamily="49" charset="0"/>
+                <a:ea typeface="+mn-ea"/>
                 <a:cs typeface="Cascadia Code Light" panose="020B0609020000020004" pitchFamily="49" charset="0"/>
               </a:rPr>
               <a:t> </a:t>
             </a:r>
             <a:r>
-              <a:rPr lang="en-US" sz="1200" kern="0" spc="75" dirty="0">
+              <a:rPr kumimoji="0" lang="en-US" sz="1200" b="0" i="0" u="none" strike="noStrike" kern="0" cap="none" spc="75" normalizeH="0" baseline="0" noProof="0" dirty="0">
+                <a:ln>
+                  <a:noFill/>
+                </a:ln>
                 <a:solidFill>
                   <a:srgbClr val="003268">
                     <a:alpha val="50000"/>
                   </a:srgbClr>
                 </a:solidFill>
+                <a:effectLst/>
+                <a:uLnTx/>
+                <a:uFillTx/>
                 <a:latin typeface="Cascadia Code ExtraLight" panose="020B0609020000020004" pitchFamily="49" charset="0"/>
+                <a:ea typeface="+mn-ea"/>
                 <a:cs typeface="Cascadia Code ExtraLight" panose="020B0609020000020004" pitchFamily="49" charset="0"/>
               </a:rPr>
               <a:t>-</a:t>
             </a:r>
             <a:r>
-              <a:rPr lang="en-US" sz="1200" kern="0" spc="75" dirty="0">
+              <a:rPr kumimoji="0" lang="en-US" sz="1200" b="0" i="0" u="none" strike="noStrike" kern="0" cap="none" spc="75" normalizeH="0" baseline="0" noProof="0" dirty="0">
+                <a:ln>
+                  <a:noFill/>
+                </a:ln>
                 <a:solidFill>
                   <a:srgbClr val="003268">
                     <a:alpha val="50000"/>
                   </a:srgbClr>
                 </a:solidFill>
+                <a:effectLst/>
+                <a:uLnTx/>
+                <a:uFillTx/>
                 <a:latin typeface="Cascadia Code Light" panose="020B0609020000020004" pitchFamily="49" charset="0"/>
+                <a:ea typeface="+mn-ea"/>
                 <a:cs typeface="Cascadia Code Light" panose="020B0609020000020004" pitchFamily="49" charset="0"/>
               </a:rPr>
               <a:t>      </a:t>
             </a:r>
             <a:r>
-              <a:rPr lang="en-US" sz="1200" kern="0" spc="75" dirty="0">
+              <a:rPr kumimoji="0" lang="en-US" sz="1200" b="0" i="0" u="none" strike="noStrike" kern="0" cap="none" spc="75" normalizeH="0" baseline="0" noProof="0" dirty="0">
+                <a:ln>
+                  <a:noFill/>
+                </a:ln>
                 <a:solidFill>
                   <a:srgbClr val="003268">
                     <a:alpha val="50000"/>
                   </a:srgbClr>
                 </a:solidFill>
+                <a:effectLst/>
+                <a:uLnTx/>
+                <a:uFillTx/>
                 <a:latin typeface="Cascadia Code SemiBold" panose="020B0609020000020004" pitchFamily="49" charset="0"/>
+                <a:ea typeface="+mn-ea"/>
                 <a:cs typeface="Cascadia Code SemiBold" panose="020B0609020000020004" pitchFamily="49" charset="0"/>
               </a:rPr>
               <a:t>Big Data Analytics and Text Mining</a:t>
             </a:r>
             <a:r>
-              <a:rPr lang="en-US" sz="1200" b="1" kern="0" spc="75" dirty="0">
+              <a:rPr kumimoji="0" lang="en-US" sz="1200" b="1" i="0" u="none" strike="noStrike" kern="0" cap="none" spc="75" normalizeH="0" baseline="0" noProof="0" dirty="0">
+                <a:ln>
+                  <a:noFill/>
+                </a:ln>
                 <a:solidFill>
                   <a:srgbClr val="003268"/>
                 </a:solidFill>
+                <a:effectLst/>
+                <a:uLnTx/>
+                <a:uFillTx/>
                 <a:latin typeface="Cascadia Code SemiBold" panose="020B0609020000020004" pitchFamily="49" charset="0"/>
+                <a:ea typeface="+mn-ea"/>
                 <a:cs typeface="Cascadia Code SemiBold" panose="020B0609020000020004" pitchFamily="49" charset="0"/>
               </a:rPr>
               <a:t>	</a:t>
             </a:r>
-            <a:endParaRPr lang="en-US" sz="1200" dirty="0">
+            <a:endParaRPr kumimoji="0" lang="en-US" sz="1200" b="0" i="0" u="none" strike="noStrike" kern="1200" cap="none" spc="0" normalizeH="0" baseline="0" noProof="0" dirty="0">
+              <a:ln>
+                <a:noFill/>
+              </a:ln>
               <a:solidFill>
                 <a:srgbClr val="003268"/>
               </a:solidFill>
+              <a:effectLst/>
+              <a:uLnTx/>
+              <a:uFillTx/>
               <a:latin typeface="Cascadia Code SemiBold" panose="020B0609020000020004" pitchFamily="49" charset="0"/>
+              <a:ea typeface="+mn-ea"/>
               <a:cs typeface="Cascadia Code SemiBold" panose="020B0609020000020004" pitchFamily="49" charset="0"/>
             </a:endParaRPr>
           </a:p>
@@ -17383,79 +17423,729 @@
           </a:bodyPr>
           <a:lstStyle/>
           <a:p>
-            <a:pPr marL="0" indent="0" algn="r">
+            <a:pPr marL="0" marR="0" lvl="0" indent="0" algn="r" defTabSz="914400" rtl="0" eaLnBrk="1" fontAlgn="auto" latinLnBrk="0" hangingPunct="1">
               <a:lnSpc>
                 <a:spcPts val="1365"/>
               </a:lnSpc>
+              <a:spcBef>
+                <a:spcPts val="0"/>
+              </a:spcBef>
+              <a:spcAft>
+                <a:spcPts val="0"/>
+              </a:spcAft>
+              <a:buClrTx/>
+              <a:buSzTx/>
+              <a:buFontTx/>
               <a:buNone/>
+              <a:tabLst/>
+              <a:defRPr/>
             </a:pPr>
             <a:r>
-              <a:rPr lang="en-US" sz="1200" kern="0" spc="75" dirty="0">
+              <a:rPr kumimoji="0" lang="en-US" sz="1200" b="0" i="0" u="none" strike="noStrike" kern="0" cap="none" spc="75" normalizeH="0" baseline="0" noProof="0" dirty="0">
+                <a:ln>
+                  <a:noFill/>
+                </a:ln>
                 <a:solidFill>
                   <a:srgbClr val="003268"/>
                 </a:solidFill>
+                <a:effectLst/>
+                <a:uLnTx/>
+                <a:uFillTx/>
                 <a:latin typeface="Cascadia Code ExtraLight" panose="020B0609020000020004" pitchFamily="49" charset="0"/>
+                <a:ea typeface="+mn-ea"/>
                 <a:cs typeface="Cascadia Code ExtraLight" panose="020B0609020000020004" pitchFamily="49" charset="0"/>
               </a:rPr>
               <a:t>     </a:t>
             </a:r>
             <a:r>
-              <a:rPr lang="en-US" sz="1200" kern="0" spc="75" dirty="0">
+              <a:rPr kumimoji="0" lang="en-US" sz="1200" b="0" i="0" u="none" strike="noStrike" kern="0" cap="none" spc="75" normalizeH="0" baseline="0" noProof="0" dirty="0">
+                <a:ln>
+                  <a:noFill/>
+                </a:ln>
                 <a:solidFill>
                   <a:srgbClr val="003268">
                     <a:alpha val="50000"/>
                   </a:srgbClr>
                 </a:solidFill>
+                <a:effectLst/>
+                <a:uLnTx/>
+                <a:uFillTx/>
                 <a:latin typeface="Cascadia Code SemiBold" panose="020B0609020000020004" pitchFamily="49" charset="0"/>
+                <a:ea typeface="+mn-ea"/>
                 <a:cs typeface="Cascadia Code SemiBold" panose="020B0609020000020004" pitchFamily="49" charset="0"/>
               </a:rPr>
               <a:t>Ponzuoli</a:t>
             </a:r>
             <a:r>
-              <a:rPr lang="en-US" sz="1200" kern="0" spc="75" dirty="0">
+              <a:rPr kumimoji="0" lang="en-US" sz="1200" b="0" i="0" u="none" strike="noStrike" kern="0" cap="none" spc="75" normalizeH="0" baseline="0" noProof="0" dirty="0">
+                <a:ln>
+                  <a:noFill/>
+                </a:ln>
                 <a:solidFill>
                   <a:srgbClr val="003268">
                     <a:alpha val="50000"/>
                   </a:srgbClr>
                 </a:solidFill>
+                <a:effectLst/>
+                <a:uLnTx/>
+                <a:uFillTx/>
                 <a:latin typeface="Cascadia Code ExtraLight" panose="020B0609020000020004" pitchFamily="49" charset="0"/>
+                <a:ea typeface="+mn-ea"/>
                 <a:cs typeface="Cascadia Code ExtraLight" panose="020B0609020000020004" pitchFamily="49" charset="0"/>
               </a:rPr>
               <a:t> </a:t>
             </a:r>
             <a:r>
-              <a:rPr lang="en-US" sz="1200" kern="0" spc="75" dirty="0">
+              <a:rPr kumimoji="0" lang="en-US" sz="1200" b="0" i="0" u="none" strike="noStrike" kern="0" cap="none" spc="75" normalizeH="0" baseline="0" noProof="0" dirty="0">
+                <a:ln>
+                  <a:noFill/>
+                </a:ln>
                 <a:solidFill>
                   <a:srgbClr val="003268">
                     <a:alpha val="50000"/>
                   </a:srgbClr>
                 </a:solidFill>
+                <a:effectLst/>
+                <a:uLnTx/>
+                <a:uFillTx/>
                 <a:latin typeface="Cascadia Code SemiBold" panose="020B0609020000020004" pitchFamily="49" charset="0"/>
+                <a:ea typeface="+mn-ea"/>
                 <a:cs typeface="Cascadia Code SemiBold" panose="020B0609020000020004" pitchFamily="49" charset="0"/>
               </a:rPr>
               <a:t>Giovanni</a:t>
             </a:r>
             <a:r>
-              <a:rPr lang="en-US" sz="1200" kern="0" spc="75" dirty="0">
+              <a:rPr kumimoji="0" lang="en-US" sz="1200" b="0" i="0" u="none" strike="noStrike" kern="0" cap="none" spc="75" normalizeH="0" baseline="0" noProof="0" dirty="0">
+                <a:ln>
+                  <a:noFill/>
+                </a:ln>
                 <a:solidFill>
                   <a:srgbClr val="003268">
                     <a:alpha val="50000"/>
                   </a:srgbClr>
                 </a:solidFill>
+                <a:effectLst/>
+                <a:uLnTx/>
+                <a:uFillTx/>
                 <a:latin typeface="Cascadia Code ExtraLight" panose="020B0609020000020004" pitchFamily="49" charset="0"/>
+                <a:ea typeface="+mn-ea"/>
                 <a:cs typeface="Cascadia Code ExtraLight" panose="020B0609020000020004" pitchFamily="49" charset="0"/>
               </a:rPr>
               <a:t>	    - </a:t>
             </a:r>
-            <a:endParaRPr lang="en-US" sz="1200" dirty="0">
+            <a:endParaRPr kumimoji="0" lang="en-US" sz="1200" b="0" i="0" u="none" strike="noStrike" kern="1200" cap="none" spc="0" normalizeH="0" baseline="0" noProof="0" dirty="0">
+              <a:ln>
+                <a:noFill/>
+              </a:ln>
               <a:solidFill>
                 <a:srgbClr val="003268">
                   <a:alpha val="50000"/>
                 </a:srgbClr>
               </a:solidFill>
+              <a:effectLst/>
+              <a:uLnTx/>
+              <a:uFillTx/>
               <a:latin typeface="Cascadia Code ExtraLight" panose="020B0609020000020004" pitchFamily="49" charset="0"/>
+              <a:ea typeface="+mn-ea"/>
               <a:cs typeface="Cascadia Code ExtraLight" panose="020B0609020000020004" pitchFamily="49" charset="0"/>
             </a:endParaRPr>
+          </a:p>
+        </p:txBody>
+      </p:sp>
+      <p:sp>
+        <p:nvSpPr>
+          <p:cNvPr id="23" name="Inset label"/>
+          <p:cNvSpPr txBox="1"/>
+          <p:nvPr/>
+        </p:nvSpPr>
+        <p:spPr>
+          <a:xfrm>
+            <a:off x="8013122" y="3441700"/>
+            <a:ext cx="3372428" cy="184666"/>
+          </a:xfrm>
+          <a:prstGeom prst="rect">
+            <a:avLst/>
+          </a:prstGeom>
+          <a:noFill/>
+        </p:spPr>
+        <p:txBody>
+          <a:bodyPr wrap="square" lIns="0" tIns="0" rIns="0" bIns="0">
+            <a:spAutoFit/>
+          </a:bodyPr>
+          <a:lstStyle/>
+          <a:p>
+            <a:pPr marL="0" marR="0" lvl="0" indent="0" algn="l" defTabSz="914400" rtl="0" eaLnBrk="1" fontAlgn="auto" latinLnBrk="0" hangingPunct="1">
+              <a:lnSpc>
+                <a:spcPct val="100000"/>
+              </a:lnSpc>
+              <a:spcBef>
+                <a:spcPts val="0"/>
+              </a:spcBef>
+              <a:spcAft>
+                <a:spcPts val="0"/>
+              </a:spcAft>
+              <a:buClrTx/>
+              <a:buSzTx/>
+              <a:buFontTx/>
+              <a:buNone/>
+              <a:tabLst/>
+              <a:defRPr/>
+            </a:pPr>
+            <a:r>
+              <a:rPr kumimoji="0" sz="1200" b="1" i="0" u="none" strike="noStrike" kern="1200" cap="none" spc="0" normalizeH="0" baseline="0" noProof="0" dirty="0">
+                <a:ln>
+                  <a:noFill/>
+                </a:ln>
+                <a:solidFill>
+                  <a:srgbClr val="002060"/>
+                </a:solidFill>
+                <a:effectLst/>
+                <a:uLnTx/>
+                <a:uFillTx/>
+                <a:latin typeface="Cascadia Code SemiBold"/>
+                <a:ea typeface="+mn-ea"/>
+                <a:cs typeface="+mn-cs"/>
+              </a:rPr>
+              <a:t>TEST PLAY</a:t>
+            </a:r>
+          </a:p>
+        </p:txBody>
+      </p:sp>
+      <p:sp>
+        <p:nvSpPr>
+          <p:cNvPr id="24" name="Inset subtitle"/>
+          <p:cNvSpPr txBox="1"/>
+          <p:nvPr/>
+        </p:nvSpPr>
+        <p:spPr>
+          <a:xfrm>
+            <a:off x="8013122" y="3594100"/>
+            <a:ext cx="3372428" cy="169277"/>
+          </a:xfrm>
+          <a:prstGeom prst="rect">
+            <a:avLst/>
+          </a:prstGeom>
+          <a:noFill/>
+        </p:spPr>
+        <p:txBody>
+          <a:bodyPr wrap="square" lIns="0" tIns="0" rIns="0" bIns="0">
+            <a:spAutoFit/>
+          </a:bodyPr>
+          <a:lstStyle/>
+          <a:p>
+            <a:pPr marL="0" marR="0" lvl="0" indent="0" algn="l" defTabSz="914400" rtl="0" eaLnBrk="1" fontAlgn="auto" latinLnBrk="0" hangingPunct="1">
+              <a:lnSpc>
+                <a:spcPct val="100000"/>
+              </a:lnSpc>
+              <a:spcBef>
+                <a:spcPts val="0"/>
+              </a:spcBef>
+              <a:spcAft>
+                <a:spcPts val="0"/>
+              </a:spcAft>
+              <a:buClrTx/>
+              <a:buSzTx/>
+              <a:buFontTx/>
+              <a:buNone/>
+              <a:tabLst/>
+              <a:defRPr/>
+            </a:pPr>
+            <a:r>
+              <a:rPr kumimoji="0" sz="1100" b="0" i="0" u="none" strike="noStrike" kern="1200" cap="none" spc="0" normalizeH="0" baseline="0" noProof="0" dirty="0">
+                <a:ln>
+                  <a:noFill/>
+                </a:ln>
+                <a:solidFill>
+                  <a:srgbClr val="8A8672"/>
+                </a:solidFill>
+                <a:effectLst/>
+                <a:uLnTx/>
+                <a:uFillTx/>
+                <a:latin typeface="Cascadia Code SemiLight"/>
+                <a:ea typeface="+mn-ea"/>
+                <a:cs typeface="+mn-cs"/>
+              </a:rPr>
+              <a:t>predicted vs. real trajectories </a:t>
+            </a:r>
+          </a:p>
+        </p:txBody>
+      </p:sp>
+      <p:pic>
+        <p:nvPicPr>
+          <p:cNvPr id="25" name="Prediction test play 1" descr="tp1.png"/>
+          <p:cNvPicPr>
+            <a:picLocks noChangeAspect="1"/>
+          </p:cNvPicPr>
+          <p:nvPr/>
+        </p:nvPicPr>
+        <p:blipFill>
+          <a:blip r:embed="rId5"/>
+          <a:srcRect l="5162"/>
+          <a:stretch>
+            <a:fillRect/>
+          </a:stretch>
+        </p:blipFill>
+        <p:spPr>
+          <a:xfrm>
+            <a:off x="8013122" y="3810000"/>
+            <a:ext cx="3372427" cy="1996558"/>
+          </a:xfrm>
+          <a:custGeom>
+            <a:avLst/>
+            <a:gdLst>
+              <a:gd name="csX0" fmla="*/ 0 w 3372427"/>
+              <a:gd name="csY0" fmla="*/ 0 h 1996558"/>
+              <a:gd name="csX1" fmla="*/ 528347 w 3372427"/>
+              <a:gd name="csY1" fmla="*/ 0 h 1996558"/>
+              <a:gd name="csX2" fmla="*/ 1022970 w 3372427"/>
+              <a:gd name="csY2" fmla="*/ 0 h 1996558"/>
+              <a:gd name="csX3" fmla="*/ 1618765 w 3372427"/>
+              <a:gd name="csY3" fmla="*/ 0 h 1996558"/>
+              <a:gd name="csX4" fmla="*/ 2180836 w 3372427"/>
+              <a:gd name="csY4" fmla="*/ 0 h 1996558"/>
+              <a:gd name="csX5" fmla="*/ 2742907 w 3372427"/>
+              <a:gd name="csY5" fmla="*/ 0 h 1996558"/>
+              <a:gd name="csX6" fmla="*/ 3372427 w 3372427"/>
+              <a:gd name="csY6" fmla="*/ 0 h 1996558"/>
+              <a:gd name="csX7" fmla="*/ 3372427 w 3372427"/>
+              <a:gd name="csY7" fmla="*/ 519105 h 1996558"/>
+              <a:gd name="csX8" fmla="*/ 3372427 w 3372427"/>
+              <a:gd name="csY8" fmla="*/ 978313 h 1996558"/>
+              <a:gd name="csX9" fmla="*/ 3372427 w 3372427"/>
+              <a:gd name="csY9" fmla="*/ 1497419 h 1996558"/>
+              <a:gd name="csX10" fmla="*/ 3372427 w 3372427"/>
+              <a:gd name="csY10" fmla="*/ 1996558 h 1996558"/>
+              <a:gd name="csX11" fmla="*/ 2776632 w 3372427"/>
+              <a:gd name="csY11" fmla="*/ 1996558 h 1996558"/>
+              <a:gd name="csX12" fmla="*/ 2180836 w 3372427"/>
+              <a:gd name="csY12" fmla="*/ 1996558 h 1996558"/>
+              <a:gd name="csX13" fmla="*/ 1551316 w 3372427"/>
+              <a:gd name="csY13" fmla="*/ 1996558 h 1996558"/>
+              <a:gd name="csX14" fmla="*/ 1022970 w 3372427"/>
+              <a:gd name="csY14" fmla="*/ 1996558 h 1996558"/>
+              <a:gd name="csX15" fmla="*/ 0 w 3372427"/>
+              <a:gd name="csY15" fmla="*/ 1996558 h 1996558"/>
+              <a:gd name="csX16" fmla="*/ 0 w 3372427"/>
+              <a:gd name="csY16" fmla="*/ 1537350 h 1996558"/>
+              <a:gd name="csX17" fmla="*/ 0 w 3372427"/>
+              <a:gd name="csY17" fmla="*/ 1038210 h 1996558"/>
+              <a:gd name="csX18" fmla="*/ 0 w 3372427"/>
+              <a:gd name="csY18" fmla="*/ 519105 h 1996558"/>
+              <a:gd name="csX19" fmla="*/ 0 w 3372427"/>
+              <a:gd name="csY19" fmla="*/ 0 h 1996558"/>
+            </a:gdLst>
+            <a:ahLst/>
+            <a:cxnLst>
+              <a:cxn ang="0">
+                <a:pos x="csX0" y="csY0"/>
+              </a:cxn>
+              <a:cxn ang="0">
+                <a:pos x="csX1" y="csY1"/>
+              </a:cxn>
+              <a:cxn ang="0">
+                <a:pos x="csX2" y="csY2"/>
+              </a:cxn>
+              <a:cxn ang="0">
+                <a:pos x="csX3" y="csY3"/>
+              </a:cxn>
+              <a:cxn ang="0">
+                <a:pos x="csX4" y="csY4"/>
+              </a:cxn>
+              <a:cxn ang="0">
+                <a:pos x="csX5" y="csY5"/>
+              </a:cxn>
+              <a:cxn ang="0">
+                <a:pos x="csX6" y="csY6"/>
+              </a:cxn>
+              <a:cxn ang="0">
+                <a:pos x="csX7" y="csY7"/>
+              </a:cxn>
+              <a:cxn ang="0">
+                <a:pos x="csX8" y="csY8"/>
+              </a:cxn>
+              <a:cxn ang="0">
+                <a:pos x="csX9" y="csY9"/>
+              </a:cxn>
+              <a:cxn ang="0">
+                <a:pos x="csX10" y="csY10"/>
+              </a:cxn>
+              <a:cxn ang="0">
+                <a:pos x="csX11" y="csY11"/>
+              </a:cxn>
+              <a:cxn ang="0">
+                <a:pos x="csX12" y="csY12"/>
+              </a:cxn>
+              <a:cxn ang="0">
+                <a:pos x="csX13" y="csY13"/>
+              </a:cxn>
+              <a:cxn ang="0">
+                <a:pos x="csX14" y="csY14"/>
+              </a:cxn>
+              <a:cxn ang="0">
+                <a:pos x="csX15" y="csY15"/>
+              </a:cxn>
+              <a:cxn ang="0">
+                <a:pos x="csX16" y="csY16"/>
+              </a:cxn>
+              <a:cxn ang="0">
+                <a:pos x="csX17" y="csY17"/>
+              </a:cxn>
+              <a:cxn ang="0">
+                <a:pos x="csX18" y="csY18"/>
+              </a:cxn>
+              <a:cxn ang="0">
+                <a:pos x="csX19" y="csY19"/>
+              </a:cxn>
+            </a:cxnLst>
+            <a:rect l="l" t="t" r="r" b="b"/>
+            <a:pathLst>
+              <a:path w="3372427" h="1996558" fill="none" extrusionOk="0">
+                <a:moveTo>
+                  <a:pt x="0" y="0"/>
+                </a:moveTo>
+                <a:cubicBezTo>
+                  <a:pt x="152852" y="-21622"/>
+                  <a:pt x="351604" y="36662"/>
+                  <a:pt x="528347" y="0"/>
+                </a:cubicBezTo>
+                <a:cubicBezTo>
+                  <a:pt x="705090" y="-36662"/>
+                  <a:pt x="871427" y="48941"/>
+                  <a:pt x="1022970" y="0"/>
+                </a:cubicBezTo>
+                <a:cubicBezTo>
+                  <a:pt x="1174513" y="-48941"/>
+                  <a:pt x="1478004" y="46937"/>
+                  <a:pt x="1618765" y="0"/>
+                </a:cubicBezTo>
+                <a:cubicBezTo>
+                  <a:pt x="1759527" y="-46937"/>
+                  <a:pt x="2036989" y="9012"/>
+                  <a:pt x="2180836" y="0"/>
+                </a:cubicBezTo>
+                <a:cubicBezTo>
+                  <a:pt x="2324683" y="-9012"/>
+                  <a:pt x="2508763" y="22429"/>
+                  <a:pt x="2742907" y="0"/>
+                </a:cubicBezTo>
+                <a:cubicBezTo>
+                  <a:pt x="2977051" y="-22429"/>
+                  <a:pt x="3087485" y="45265"/>
+                  <a:pt x="3372427" y="0"/>
+                </a:cubicBezTo>
+                <a:cubicBezTo>
+                  <a:pt x="3399089" y="135625"/>
+                  <a:pt x="3346800" y="270872"/>
+                  <a:pt x="3372427" y="519105"/>
+                </a:cubicBezTo>
+                <a:cubicBezTo>
+                  <a:pt x="3398054" y="767339"/>
+                  <a:pt x="3368685" y="783134"/>
+                  <a:pt x="3372427" y="978313"/>
+                </a:cubicBezTo>
+                <a:cubicBezTo>
+                  <a:pt x="3376169" y="1173492"/>
+                  <a:pt x="3310901" y="1373459"/>
+                  <a:pt x="3372427" y="1497419"/>
+                </a:cubicBezTo>
+                <a:cubicBezTo>
+                  <a:pt x="3433953" y="1621379"/>
+                  <a:pt x="3317989" y="1833973"/>
+                  <a:pt x="3372427" y="1996558"/>
+                </a:cubicBezTo>
+                <a:cubicBezTo>
+                  <a:pt x="3148671" y="2027331"/>
+                  <a:pt x="3003778" y="1976884"/>
+                  <a:pt x="2776632" y="1996558"/>
+                </a:cubicBezTo>
+                <a:cubicBezTo>
+                  <a:pt x="2549486" y="2016232"/>
+                  <a:pt x="2450460" y="1962786"/>
+                  <a:pt x="2180836" y="1996558"/>
+                </a:cubicBezTo>
+                <a:cubicBezTo>
+                  <a:pt x="1911212" y="2030330"/>
+                  <a:pt x="1761777" y="1966858"/>
+                  <a:pt x="1551316" y="1996558"/>
+                </a:cubicBezTo>
+                <a:cubicBezTo>
+                  <a:pt x="1340855" y="2026258"/>
+                  <a:pt x="1239618" y="1954413"/>
+                  <a:pt x="1022970" y="1996558"/>
+                </a:cubicBezTo>
+                <a:cubicBezTo>
+                  <a:pt x="806322" y="2038703"/>
+                  <a:pt x="360598" y="1972079"/>
+                  <a:pt x="0" y="1996558"/>
+                </a:cubicBezTo>
+                <a:cubicBezTo>
+                  <a:pt x="-12910" y="1820995"/>
+                  <a:pt x="35943" y="1715936"/>
+                  <a:pt x="0" y="1537350"/>
+                </a:cubicBezTo>
+                <a:cubicBezTo>
+                  <a:pt x="-35943" y="1358764"/>
+                  <a:pt x="40608" y="1264909"/>
+                  <a:pt x="0" y="1038210"/>
+                </a:cubicBezTo>
+                <a:cubicBezTo>
+                  <a:pt x="-40608" y="811511"/>
+                  <a:pt x="56662" y="630852"/>
+                  <a:pt x="0" y="519105"/>
+                </a:cubicBezTo>
+                <a:cubicBezTo>
+                  <a:pt x="-56662" y="407358"/>
+                  <a:pt x="57212" y="232444"/>
+                  <a:pt x="0" y="0"/>
+                </a:cubicBezTo>
+                <a:close/>
+              </a:path>
+              <a:path w="3372427" h="1996558" stroke="0" extrusionOk="0">
+                <a:moveTo>
+                  <a:pt x="0" y="0"/>
+                </a:moveTo>
+                <a:cubicBezTo>
+                  <a:pt x="260672" y="-37468"/>
+                  <a:pt x="273115" y="10324"/>
+                  <a:pt x="528347" y="0"/>
+                </a:cubicBezTo>
+                <a:cubicBezTo>
+                  <a:pt x="783579" y="-10324"/>
+                  <a:pt x="800849" y="29415"/>
+                  <a:pt x="989245" y="0"/>
+                </a:cubicBezTo>
+                <a:cubicBezTo>
+                  <a:pt x="1177641" y="-29415"/>
+                  <a:pt x="1333420" y="9423"/>
+                  <a:pt x="1618765" y="0"/>
+                </a:cubicBezTo>
+                <a:cubicBezTo>
+                  <a:pt x="1904110" y="-9423"/>
+                  <a:pt x="1985249" y="38337"/>
+                  <a:pt x="2147112" y="0"/>
+                </a:cubicBezTo>
+                <a:cubicBezTo>
+                  <a:pt x="2308975" y="-38337"/>
+                  <a:pt x="2540446" y="28441"/>
+                  <a:pt x="2675459" y="0"/>
+                </a:cubicBezTo>
+                <a:cubicBezTo>
+                  <a:pt x="2810472" y="-28441"/>
+                  <a:pt x="3110803" y="38683"/>
+                  <a:pt x="3372427" y="0"/>
+                </a:cubicBezTo>
+                <a:cubicBezTo>
+                  <a:pt x="3400372" y="95620"/>
+                  <a:pt x="3320476" y="267224"/>
+                  <a:pt x="3372427" y="459208"/>
+                </a:cubicBezTo>
+                <a:cubicBezTo>
+                  <a:pt x="3424378" y="651192"/>
+                  <a:pt x="3340300" y="776051"/>
+                  <a:pt x="3372427" y="958348"/>
+                </a:cubicBezTo>
+                <a:cubicBezTo>
+                  <a:pt x="3404554" y="1140645"/>
+                  <a:pt x="3318547" y="1318031"/>
+                  <a:pt x="3372427" y="1417556"/>
+                </a:cubicBezTo>
+                <a:cubicBezTo>
+                  <a:pt x="3426307" y="1517081"/>
+                  <a:pt x="3341696" y="1711321"/>
+                  <a:pt x="3372427" y="1996558"/>
+                </a:cubicBezTo>
+                <a:cubicBezTo>
+                  <a:pt x="3126295" y="2034566"/>
+                  <a:pt x="2946164" y="1979882"/>
+                  <a:pt x="2810356" y="1996558"/>
+                </a:cubicBezTo>
+                <a:cubicBezTo>
+                  <a:pt x="2674548" y="2013234"/>
+                  <a:pt x="2470388" y="1989085"/>
+                  <a:pt x="2282009" y="1996558"/>
+                </a:cubicBezTo>
+                <a:cubicBezTo>
+                  <a:pt x="2093630" y="2004031"/>
+                  <a:pt x="1943168" y="1972164"/>
+                  <a:pt x="1652489" y="1996558"/>
+                </a:cubicBezTo>
+                <a:cubicBezTo>
+                  <a:pt x="1361810" y="2020952"/>
+                  <a:pt x="1331303" y="1923894"/>
+                  <a:pt x="1022970" y="1996558"/>
+                </a:cubicBezTo>
+                <a:cubicBezTo>
+                  <a:pt x="714637" y="2069222"/>
+                  <a:pt x="689007" y="1986650"/>
+                  <a:pt x="528347" y="1996558"/>
+                </a:cubicBezTo>
+                <a:cubicBezTo>
+                  <a:pt x="367687" y="2006466"/>
+                  <a:pt x="162221" y="1958107"/>
+                  <a:pt x="0" y="1996558"/>
+                </a:cubicBezTo>
+                <a:cubicBezTo>
+                  <a:pt x="-4836" y="1783552"/>
+                  <a:pt x="14222" y="1578128"/>
+                  <a:pt x="0" y="1457487"/>
+                </a:cubicBezTo>
+                <a:cubicBezTo>
+                  <a:pt x="-14222" y="1336846"/>
+                  <a:pt x="31833" y="1123656"/>
+                  <a:pt x="0" y="1018245"/>
+                </a:cubicBezTo>
+                <a:cubicBezTo>
+                  <a:pt x="-31833" y="912834"/>
+                  <a:pt x="48471" y="742289"/>
+                  <a:pt x="0" y="559036"/>
+                </a:cubicBezTo>
+                <a:cubicBezTo>
+                  <a:pt x="-48471" y="375783"/>
+                  <a:pt x="20598" y="188068"/>
+                  <a:pt x="0" y="0"/>
+                </a:cubicBezTo>
+                <a:close/>
+              </a:path>
+            </a:pathLst>
+          </a:custGeom>
+          <a:solidFill>
+            <a:srgbClr val="F5F3EC"/>
+          </a:solidFill>
+          <a:ln w="31750">
+            <a:solidFill>
+              <a:srgbClr val="FF0000"/>
+            </a:solidFill>
+            <a:extLst>
+              <a:ext uri="{C807C97D-BFC1-408E-A445-0C87EB9F89A2}">
+                <ask:lineSketchStyleProps xmlns:ask="http://schemas.microsoft.com/office/drawing/2018/sketchyshapes" sd="1219033472">
+                  <a:prstGeom prst="rect">
+                    <a:avLst/>
+                  </a:prstGeom>
+                  <ask:type>
+                    <ask:lineSketchScribble/>
+                  </ask:type>
+                </ask:lineSketchStyleProps>
+              </a:ext>
+            </a:extLst>
+          </a:ln>
+        </p:spPr>
+      </p:pic>
+      <p:sp>
+        <p:nvSpPr>
+          <p:cNvPr id="27" name="Inset legend"/>
+          <p:cNvSpPr txBox="1"/>
+          <p:nvPr/>
+        </p:nvSpPr>
+        <p:spPr>
+          <a:xfrm>
+            <a:off x="8013122" y="5853181"/>
+            <a:ext cx="3372427" cy="138499"/>
+          </a:xfrm>
+          <a:prstGeom prst="rect">
+            <a:avLst/>
+          </a:prstGeom>
+          <a:noFill/>
+        </p:spPr>
+        <p:txBody>
+          <a:bodyPr wrap="square" lIns="0" tIns="0" rIns="0" bIns="0">
+            <a:spAutoFit/>
+          </a:bodyPr>
+          <a:lstStyle/>
+          <a:p>
+            <a:pPr marL="0" marR="0" lvl="0" indent="0" algn="ctr" defTabSz="914400" rtl="0" eaLnBrk="1" fontAlgn="auto" latinLnBrk="0" hangingPunct="1">
+              <a:lnSpc>
+                <a:spcPct val="100000"/>
+              </a:lnSpc>
+              <a:spcBef>
+                <a:spcPts val="0"/>
+              </a:spcBef>
+              <a:spcAft>
+                <a:spcPts val="0"/>
+              </a:spcAft>
+              <a:buClrTx/>
+              <a:buSzTx/>
+              <a:buFontTx/>
+              <a:buNone/>
+              <a:tabLst/>
+              <a:defRPr/>
+            </a:pPr>
+            <a:r>
+              <a:rPr kumimoji="0" sz="900" b="0" i="0" u="none" strike="noStrike" kern="1200" cap="none" spc="0" normalizeH="0" baseline="0" noProof="0" dirty="0">
+                <a:ln>
+                  <a:noFill/>
+                </a:ln>
+                <a:solidFill>
+                  <a:srgbClr val="8A8672"/>
+                </a:solidFill>
+                <a:effectLst/>
+                <a:uLnTx/>
+                <a:uFillTx/>
+                <a:latin typeface="Cascadia Code SemiLight"/>
+                <a:ea typeface="+mn-ea"/>
+                <a:cs typeface="+mn-cs"/>
+              </a:rPr>
+              <a:t>dark: prediction</a:t>
+            </a:r>
+            <a:r>
+              <a:rPr kumimoji="0" lang="it-IT" sz="900" b="0" i="0" u="none" strike="noStrike" kern="1200" cap="none" spc="0" normalizeH="0" baseline="0" noProof="0" dirty="0">
+                <a:ln>
+                  <a:noFill/>
+                </a:ln>
+                <a:solidFill>
+                  <a:srgbClr val="8A8672"/>
+                </a:solidFill>
+                <a:effectLst/>
+                <a:uLnTx/>
+                <a:uFillTx/>
+                <a:latin typeface="Cascadia Code SemiLight"/>
+                <a:ea typeface="+mn-ea"/>
+                <a:cs typeface="+mn-cs"/>
+              </a:rPr>
+              <a:t>s</a:t>
+            </a:r>
+            <a:r>
+              <a:rPr kumimoji="0" sz="900" b="0" i="0" u="none" strike="noStrike" kern="1200" cap="none" spc="0" normalizeH="0" baseline="0" noProof="0" dirty="0">
+                <a:ln>
+                  <a:noFill/>
+                </a:ln>
+                <a:solidFill>
+                  <a:srgbClr val="8A8672"/>
+                </a:solidFill>
+                <a:effectLst/>
+                <a:uLnTx/>
+                <a:uFillTx/>
+                <a:latin typeface="Cascadia Code SemiLight"/>
+                <a:ea typeface="+mn-ea"/>
+                <a:cs typeface="+mn-cs"/>
+              </a:rPr>
+              <a:t> </a:t>
+            </a:r>
+            <a:r>
+              <a:rPr lang="it-IT" sz="900" dirty="0">
+                <a:solidFill>
+                  <a:srgbClr val="8A8672"/>
+                </a:solidFill>
+                <a:latin typeface="Cascadia Code SemiLight"/>
+              </a:rPr>
+              <a:t>- </a:t>
+            </a:r>
+            <a:r>
+              <a:rPr kumimoji="0" sz="900" b="0" i="0" u="none" strike="noStrike" kern="1200" cap="none" spc="0" normalizeH="0" baseline="0" noProof="0" dirty="0">
+                <a:ln>
+                  <a:noFill/>
+                </a:ln>
+                <a:solidFill>
+                  <a:srgbClr val="8A8672"/>
+                </a:solidFill>
+                <a:effectLst/>
+                <a:uLnTx/>
+                <a:uFillTx/>
+                <a:latin typeface="Cascadia Code SemiLight"/>
+                <a:ea typeface="+mn-ea"/>
+                <a:cs typeface="+mn-cs"/>
+              </a:rPr>
+              <a:t>light: real paths</a:t>
+            </a:r>
           </a:p>
         </p:txBody>
       </p:sp>
@@ -17467,7 +18157,7 @@
 </p:sld>
 </file>
 
-<file path=ppt/slides/slide15.xml><?xml version="1.0" encoding="utf-8"?>
+<file path=ppt/slides/slide14.xml><?xml version="1.0" encoding="utf-8"?>
 <p:sld xmlns:a="http://schemas.openxmlformats.org/drawingml/2006/main" xmlns:r="http://schemas.openxmlformats.org/officeDocument/2006/relationships" xmlns:p="http://schemas.openxmlformats.org/presentationml/2006/main">
   <p:cSld>
     <p:bg>
@@ -18632,9 +19322,9 @@
               </a:lnSpc>
             </a:pPr>
             <a:r>
-              <a:rPr sz="2800" b="1">
-                <a:solidFill>
-                  <a:srgbClr val="002060"/>
+              <a:rPr sz="2800" b="1" dirty="0">
+                <a:solidFill>
+                  <a:srgbClr val="FF0000"/>
                 </a:solidFill>
                 <a:latin typeface="Cascadia Code SemiBold"/>
               </a:rPr>
@@ -18648,7 +19338,7 @@
               </a:lnSpc>
             </a:pPr>
             <a:r>
-              <a:rPr sz="1200" b="0">
+              <a:rPr sz="1200" b="0" dirty="0">
                 <a:solidFill>
                   <a:srgbClr val="121417"/>
                 </a:solidFill>
@@ -19186,7 +19876,7 @@
                 <a:latin typeface="Cascadia Code SemiLight" panose="020B0609020000020004" pitchFamily="49" charset="0"/>
                 <a:cs typeface="Cascadia Code SemiLight" panose="020B0609020000020004" pitchFamily="49" charset="0"/>
               </a:rPr>
-              <a:t> Big Data Bowl 2026, </a:t>
+              <a:t> NFL Big Data Bowl 2026, </a:t>
             </a:r>
             <a:r>
               <a:rPr lang="en-US" sz="1400" dirty="0">
@@ -21962,7 +22652,7 @@
                   <a:noFill/>
                 </a:ln>
                 <a:solidFill>
-                  <a:srgbClr val="002060"/>
+                  <a:srgbClr val="FF0000"/>
                 </a:solidFill>
                 <a:effectLst/>
                 <a:uLnTx/>
@@ -24173,30 +24863,6 @@
           </a:p>
         </p:txBody>
       </p:sp>
-      <p:pic>
-        <p:nvPicPr>
-          <p:cNvPr id="37" name="BMI density by position" descr="bmi_kde.png"/>
-          <p:cNvPicPr>
-            <a:picLocks noChangeAspect="1"/>
-          </p:cNvPicPr>
-          <p:nvPr/>
-        </p:nvPicPr>
-        <p:blipFill>
-          <a:blip r:embed="rId5"/>
-          <a:stretch>
-            <a:fillRect/>
-          </a:stretch>
-        </p:blipFill>
-        <p:spPr>
-          <a:xfrm>
-            <a:off x="7882227" y="3657600"/>
-            <a:ext cx="3496973" cy="2489200"/>
-          </a:xfrm>
-          <a:prstGeom prst="rect">
-            <a:avLst/>
-          </a:prstGeom>
-        </p:spPr>
-      </p:pic>
       <p:sp>
         <p:nvSpPr>
           <p:cNvPr id="38" name="caption table"/>
@@ -24247,6 +24913,31 @@
           </a:p>
         </p:txBody>
       </p:sp>
+      <p:pic>
+        <p:nvPicPr>
+          <p:cNvPr id="37" name="BMI density by position" descr="bmi_kde.png"/>
+          <p:cNvPicPr>
+            <a:picLocks noChangeAspect="1"/>
+          </p:cNvPicPr>
+          <p:nvPr/>
+        </p:nvPicPr>
+        <p:blipFill>
+          <a:blip r:embed="rId5"/>
+          <a:stretch>
+            <a:fillRect/>
+          </a:stretch>
+        </p:blipFill>
+        <p:spPr>
+          <a:xfrm>
+            <a:off x="7882227" y="3657600"/>
+            <a:ext cx="3496973" cy="2489200"/>
+          </a:xfrm>
+          <a:prstGeom prst="rect">
+            <a:avLst/>
+          </a:prstGeom>
+          <a:noFill/>
+        </p:spPr>
+      </p:pic>
     </p:spTree>
   </p:cSld>
   <p:clrMapOvr>
@@ -24344,7 +25035,25 @@
                 </a:solidFill>
                 <a:latin typeface="Cascadia Code SemiBold"/>
               </a:rPr>
-              <a:t>4. Plays: Standardization and Visualization</a:t>
+              <a:t>4. </a:t>
+            </a:r>
+            <a:r>
+              <a:rPr sz="3800" b="1" dirty="0" err="1">
+                <a:solidFill>
+                  <a:srgbClr val="121417"/>
+                </a:solidFill>
+                <a:latin typeface="Cascadia Code SemiBold"/>
+              </a:rPr>
+              <a:t>Plays:Standardization</a:t>
+            </a:r>
+            <a:r>
+              <a:rPr sz="3800" b="1" dirty="0">
+                <a:solidFill>
+                  <a:srgbClr val="121417"/>
+                </a:solidFill>
+                <a:latin typeface="Cascadia Code SemiBold"/>
+              </a:rPr>
+              <a:t> and Visualization</a:t>
             </a:r>
           </a:p>
         </p:txBody>
@@ -35913,6 +36622,23 @@
 </file>
 
 <file path=customXml/item1.xml><?xml version="1.0" encoding="utf-8"?>
+<p:properties xmlns:p="http://schemas.microsoft.com/office/2006/metadata/properties" xmlns:xsi="http://www.w3.org/2001/XMLSchema-instance" xmlns:pc="http://schemas.microsoft.com/office/infopath/2007/PartnerControls">
+  <documentManagement>
+    <_activity xmlns="79748cc8-8fa4-40f7-8d24-135f34c05ee1" xsi:nil="true"/>
+  </documentManagement>
+</p:properties>
+</file>
+
+<file path=customXml/item2.xml><?xml version="1.0" encoding="utf-8"?>
+<?mso-contentType ?>
+<FormTemplates xmlns="http://schemas.microsoft.com/sharepoint/v3/contenttype/forms">
+  <Display>DocumentLibraryForm</Display>
+  <Edit>DocumentLibraryForm</Edit>
+  <New>DocumentLibraryForm</New>
+</FormTemplates>
+</file>
+
+<file path=customXml/item3.xml><?xml version="1.0" encoding="utf-8"?>
 <ct:contentTypeSchema xmlns:ct="http://schemas.microsoft.com/office/2006/metadata/contentType" xmlns:ma="http://schemas.microsoft.com/office/2006/metadata/properties/metaAttributes" ct:_="" ma:_="" ma:contentTypeName="Document" ma:contentTypeID="0x01010012BB9DD747ED6C42B76363A2830CAFBB" ma:contentTypeVersion="11" ma:contentTypeDescription="Create a new document." ma:contentTypeScope="" ma:versionID="a9b8399940927418ece3d8e09883ba17">
   <xsd:schema xmlns:xsd="http://www.w3.org/2001/XMLSchema" xmlns:xs="http://www.w3.org/2001/XMLSchema" xmlns:p="http://schemas.microsoft.com/office/2006/metadata/properties" xmlns:ns3="79748cc8-8fa4-40f7-8d24-135f34c05ee1" targetNamespace="http://schemas.microsoft.com/office/2006/metadata/properties" ma:root="true" ma:fieldsID="e9ed0509c7a7d2c576253154b5fcb23d" ns3:_="">
     <xsd:import namespace="79748cc8-8fa4-40f7-8d24-135f34c05ee1"/>
@@ -36100,24 +36826,31 @@
 </ct:contentTypeSchema>
 </file>
 
-<file path=customXml/item2.xml><?xml version="1.0" encoding="utf-8"?>
-<p:properties xmlns:p="http://schemas.microsoft.com/office/2006/metadata/properties" xmlns:xsi="http://www.w3.org/2001/XMLSchema-instance" xmlns:pc="http://schemas.microsoft.com/office/infopath/2007/PartnerControls">
-  <documentManagement>
-    <_activity xmlns="79748cc8-8fa4-40f7-8d24-135f34c05ee1" xsi:nil="true"/>
-  </documentManagement>
-</p:properties>
+<file path=customXml/itemProps1.xml><?xml version="1.0" encoding="utf-8"?>
+<ds:datastoreItem xmlns:ds="http://schemas.openxmlformats.org/officeDocument/2006/customXml" ds:itemID="{BEFAEDA8-D123-4839-AD48-9EEA69C07ECC}">
+  <ds:schemaRefs>
+    <ds:schemaRef ds:uri="http://schemas.microsoft.com/office/2006/metadata/properties"/>
+    <ds:schemaRef ds:uri="http://schemas.microsoft.com/office/2006/documentManagement/types"/>
+    <ds:schemaRef ds:uri="http://schemas.openxmlformats.org/package/2006/metadata/core-properties"/>
+    <ds:schemaRef ds:uri="http://purl.org/dc/dcmitype/"/>
+    <ds:schemaRef ds:uri="http://schemas.microsoft.com/office/infopath/2007/PartnerControls"/>
+    <ds:schemaRef ds:uri="http://purl.org/dc/elements/1.1/"/>
+    <ds:schemaRef ds:uri="79748cc8-8fa4-40f7-8d24-135f34c05ee1"/>
+    <ds:schemaRef ds:uri="http://www.w3.org/XML/1998/namespace"/>
+    <ds:schemaRef ds:uri="http://purl.org/dc/terms/"/>
+  </ds:schemaRefs>
+</ds:datastoreItem>
 </file>
 
-<file path=customXml/item3.xml><?xml version="1.0" encoding="utf-8"?>
-<?mso-contentType ?>
-<FormTemplates xmlns="http://schemas.microsoft.com/sharepoint/v3/contenttype/forms">
-  <Display>DocumentLibraryForm</Display>
-  <Edit>DocumentLibraryForm</Edit>
-  <New>DocumentLibraryForm</New>
-</FormTemplates>
+<file path=customXml/itemProps2.xml><?xml version="1.0" encoding="utf-8"?>
+<ds:datastoreItem xmlns:ds="http://schemas.openxmlformats.org/officeDocument/2006/customXml" ds:itemID="{D6115BFE-5C1D-4CA8-863C-957A13FCB5A0}">
+  <ds:schemaRefs>
+    <ds:schemaRef ds:uri="http://schemas.microsoft.com/sharepoint/v3/contenttype/forms"/>
+  </ds:schemaRefs>
+</ds:datastoreItem>
 </file>
 
-<file path=customXml/itemProps1.xml><?xml version="1.0" encoding="utf-8"?>
+<file path=customXml/itemProps3.xml><?xml version="1.0" encoding="utf-8"?>
 <ds:datastoreItem xmlns:ds="http://schemas.openxmlformats.org/officeDocument/2006/customXml" ds:itemID="{12DA49BA-EB68-4841-9E88-4DB2811FEBDB}">
   <ds:schemaRefs>
     <ds:schemaRef ds:uri="http://schemas.microsoft.com/office/2006/metadata/contentType"/>
@@ -36133,28 +36866,4 @@
     <ds:schemaRef ds:uri="http://schemas.microsoft.com/internal/obd"/>
   </ds:schemaRefs>
 </ds:datastoreItem>
-</file>
-
-<file path=customXml/itemProps2.xml><?xml version="1.0" encoding="utf-8"?>
-<ds:datastoreItem xmlns:ds="http://schemas.openxmlformats.org/officeDocument/2006/customXml" ds:itemID="{BEFAEDA8-D123-4839-AD48-9EEA69C07ECC}">
-  <ds:schemaRefs>
-    <ds:schemaRef ds:uri="http://schemas.microsoft.com/office/2006/metadata/properties"/>
-    <ds:schemaRef ds:uri="http://schemas.microsoft.com/office/2006/documentManagement/types"/>
-    <ds:schemaRef ds:uri="http://schemas.openxmlformats.org/package/2006/metadata/core-properties"/>
-    <ds:schemaRef ds:uri="http://purl.org/dc/dcmitype/"/>
-    <ds:schemaRef ds:uri="http://schemas.microsoft.com/office/infopath/2007/PartnerControls"/>
-    <ds:schemaRef ds:uri="http://purl.org/dc/elements/1.1/"/>
-    <ds:schemaRef ds:uri="79748cc8-8fa4-40f7-8d24-135f34c05ee1"/>
-    <ds:schemaRef ds:uri="http://www.w3.org/XML/1998/namespace"/>
-    <ds:schemaRef ds:uri="http://purl.org/dc/terms/"/>
-  </ds:schemaRefs>
-</ds:datastoreItem>
-</file>
-
-<file path=customXml/itemProps3.xml><?xml version="1.0" encoding="utf-8"?>
-<ds:datastoreItem xmlns:ds="http://schemas.openxmlformats.org/officeDocument/2006/customXml" ds:itemID="{D6115BFE-5C1D-4CA8-863C-957A13FCB5A0}">
-  <ds:schemaRefs>
-    <ds:schemaRef ds:uri="http://schemas.microsoft.com/sharepoint/v3/contenttype/forms"/>
-  </ds:schemaRefs>
-</ds:datastoreItem>
 </file>